--- a/docs/portfolio/ProjectGuard_Portfolio.pptx
+++ b/docs/portfolio/ProjectGuard_Portfolio.pptx
@@ -38,9 +38,10 @@
     <p:sldId id="286" r:id="rId32"/>
     <p:sldId id="287" r:id="rId33"/>
     <p:sldId id="288" r:id="rId34"/>
+    <p:sldId id="289" r:id="rId35"/>
   </p:sldIdLst>
   <p:notesMasterIdLst>
-    <p:notesMasterId r:id="rId35"/>
+    <p:notesMasterId r:id="rId36"/>
   </p:notesMasterIdLst>
   <p:sldSz cx="9144000" cy="5143500"/>
   <p:notesSz cx="5143500" cy="9144000"/>
@@ -139,13 +140,13 @@
   <p:extLst>
     <p:ext uri="{521415D9-36F7-43E2-AB2F-B90AF26B5E84}">
       <p14:sectionLst xmlns:p14="http://schemas.microsoft.com/office/powerpoint/2010/main">
-        <p14:section name="표지" id="{c5424425-e67e-1b7c-a648-868c35c14874}">
+        <p14:section name="표지" id="{88c0e07a-cad4-e5de-ad0c-52d2f3b16b99}">
           <p14:sldIdLst>
             <p14:sldId id="256"/>
             <p14:sldId id="257"/>
           </p14:sldIdLst>
         </p14:section>
-        <p14:section name="01 프로젝트 개요" id="{3bb98a95-bb74-2dd7-704c-80f8e4cabcb8}">
+        <p14:section name="01 프로젝트 개요" id="{db77ed6d-b610-c02a-e811-5fea9ff4d919}">
           <p14:sldIdLst>
             <p14:sldId id="258"/>
             <p14:sldId id="259"/>
@@ -154,7 +155,7 @@
             <p14:sldId id="262"/>
           </p14:sldIdLst>
         </p14:section>
-        <p14:section name="02 설계와 기술" id="{da0f976e-979e-ce15-06fc-e680c73e204a}">
+        <p14:section name="02 설계와 기술" id="{330e2825-93b6-80b3-a76c-c8b47fb1b258}">
           <p14:sldIdLst>
             <p14:sldId id="263"/>
             <p14:sldId id="264"/>
@@ -163,7 +164,7 @@
             <p14:sldId id="267"/>
           </p14:sldIdLst>
         </p14:section>
-        <p14:section name="03 핵심 기능" id="{21fd83e3-f077-2520-deb0-9f7be47df8fb}">
+        <p14:section name="03 핵심 기능" id="{c3d4e8f8-7ffd-a76e-bf8e-2c806ce1a6bf}">
           <p14:sldIdLst>
             <p14:sldId id="268"/>
             <p14:sldId id="269"/>
@@ -178,22 +179,23 @@
             <p14:sldId id="278"/>
           </p14:sldIdLst>
         </p14:section>
-        <p14:section name="04 트러블슈팅" id="{b37ddb61-47f6-5c79-b663-5ce13b14bf98}">
+        <p14:section name="04 트러블슈팅" id="{27a0919d-a8b7-c66e-952f-15e19466cb04}">
           <p14:sldIdLst>
             <p14:sldId id="279"/>
             <p14:sldId id="280"/>
             <p14:sldId id="281"/>
             <p14:sldId id="282"/>
             <p14:sldId id="283"/>
+            <p14:sldId id="284"/>
           </p14:sldIdLst>
         </p14:section>
-        <p14:section name="05 평가와 배포" id="{1ac8bdc2-12c4-bda2-b78d-726a8671ac91}">
+        <p14:section name="05 평가와 배포" id="{1380d9ba-87a9-a183-f275-3c0753640473}">
           <p14:sldIdLst>
-            <p14:sldId id="284"/>
             <p14:sldId id="285"/>
             <p14:sldId id="286"/>
             <p14:sldId id="287"/>
             <p14:sldId id="288"/>
+            <p14:sldId id="289"/>
           </p14:sldIdLst>
         </p14:section>
       </p14:sectionLst>
@@ -288,13 +290,13 @@
                 <c:formatCode>General</c:formatCode>
                 <c:ptCount val="3"/>
                 <c:pt idx="0">
-                  <c:v>10989</c:v>
+                  <c:v>11222</c:v>
                 </c:pt>
                 <c:pt idx="1">
-                  <c:v>8602</c:v>
+                  <c:v>8617</c:v>
                 </c:pt>
                 <c:pt idx="2">
-                  <c:v>8051</c:v>
+                  <c:v>8075</c:v>
                 </c:pt>
               </c:numCache>
             </c:numRef>
@@ -3142,6 +3144,94 @@
             <a:fld id="{F7021451-1387-4CA6-816F-3879F97B5CBC}" type="slidenum">
               <a:rPr lang="en-US"/>
               <a:t>33</a:t>
+            </a:fld>
+            <a:endParaRPr lang="en-US"/>
+          </a:p>
+        </p:txBody>
+      </p:sp>
+    </p:spTree>
+    <p:extLst>
+      <p:ext uri="{BB962C8B-B14F-4D97-AF65-F5344CB8AC3E}">
+        <p14:creationId xmlns:p14="http://schemas.microsoft.com/office/powerpoint/2010/main" val="1024086991"/>
+      </p:ext>
+    </p:extLst>
+  </p:cSld>
+  <p:clrMapOvr>
+    <a:masterClrMapping/>
+  </p:clrMapOvr>
+</p:notes>
+</file>
+
+<file path=ppt/notesSlides/notesSlide34.xml><?xml version="1.0" encoding="utf-8"?>
+<p:notes xmlns:a="http://schemas.openxmlformats.org/drawingml/2006/main" xmlns:r="http://schemas.openxmlformats.org/officeDocument/2006/relationships" xmlns:p="http://schemas.openxmlformats.org/presentationml/2006/main">
+  <p:cSld>
+    <p:spTree>
+      <p:nvGrpSpPr>
+        <p:cNvPr id="1" name=""/>
+        <p:cNvGrpSpPr/>
+        <p:nvPr/>
+      </p:nvGrpSpPr>
+      <p:grpSpPr>
+        <a:xfrm>
+          <a:off x="0" y="0"/>
+          <a:ext cx="0" cy="0"/>
+          <a:chOff x="0" y="0"/>
+          <a:chExt cx="0" cy="0"/>
+        </a:xfrm>
+      </p:grpSpPr>
+      <p:sp>
+        <p:nvSpPr>
+          <p:cNvPr id="2" name="Slide Image Placeholder 1"/>
+          <p:cNvSpPr>
+            <a:spLocks noGrp="1" noRot="1" noChangeAspect="1"/>
+          </p:cNvSpPr>
+          <p:nvPr>
+            <p:ph type="sldImg"/>
+          </p:nvPr>
+        </p:nvSpPr>
+        <p:spPr/>
+      </p:sp>
+      <p:sp>
+        <p:nvSpPr>
+          <p:cNvPr id="3" name="Notes Placeholder 2"/>
+          <p:cNvSpPr>
+            <a:spLocks noGrp="1"/>
+          </p:cNvSpPr>
+          <p:nvPr>
+            <p:ph type="body" idx="1"/>
+          </p:nvPr>
+        </p:nvSpPr>
+        <p:spPr/>
+        <p:txBody>
+          <a:bodyPr/>
+          <a:lstStyle/>
+          <a:p>
+            <a:r>
+              <a:rPr lang="en-US" dirty="0"/>
+              <a:t/>
+            </a:r>
+            <a:endParaRPr lang="en-US" dirty="0"/>
+          </a:p>
+        </p:txBody>
+      </p:sp>
+      <p:sp>
+        <p:nvSpPr>
+          <p:cNvPr id="4" name="Slide Number Placeholder 3"/>
+          <p:cNvSpPr>
+            <a:spLocks noGrp="1"/>
+          </p:cNvSpPr>
+          <p:nvPr>
+            <p:ph type="sldNum" sz="quarter" idx="10"/>
+          </p:nvPr>
+        </p:nvSpPr>
+        <p:spPr/>
+        <p:txBody>
+          <a:bodyPr/>
+          <a:lstStyle/>
+          <a:p>
+            <a:fld id="{F7021451-1387-4CA6-816F-3879F97B5CBC}" type="slidenum">
+              <a:rPr lang="en-US"/>
+              <a:t>34</a:t>
             </a:fld>
             <a:endParaRPr lang="en-US"/>
           </a:p>
@@ -4515,7 +4605,7 @@
                 <a:ea typeface="Malgun Gothic" pitchFamily="34" charset="-122"/>
                 <a:cs typeface="Malgun Gothic" pitchFamily="34" charset="-120"/>
               </a:rPr>
-              <a:t>2026.09.22 – 2026.10.10 개발 완료 · 배포 준비   |   임채은 · 1인 풀스택 개발</a:t>
+              <a:t>2026.09.22 – 2026.10.10 개발 완료 · 10.15 보완 · 배포 준비   |   임채은 · 1인 풀스택 개발</a:t>
             </a:r>
             <a:endParaRPr lang="en-US" sz="750" dirty="0"/>
           </a:p>
@@ -7481,7 +7571,7 @@
                 <a:ea typeface="Malgun Gothic" pitchFamily="34" charset="-122"/>
                 <a:cs typeface="Malgun Gothic" pitchFamily="34" charset="-120"/>
               </a:rPr>
-              <a:t>PDF·이미지 여러 장</a:t>
+              <a:t>파일 5장 · PDF 30쪽까지</a:t>
             </a:r>
             <a:endParaRPr lang="en-US" sz="800" dirty="0"/>
           </a:p>
@@ -20900,7 +20990,7 @@
                 <a:ea typeface="Malgun Gothic" pitchFamily="34" charset="-122"/>
                 <a:cs typeface="Malgun Gothic" pitchFamily="34" charset="-120"/>
               </a:rPr>
-              <a:t>OCR 표 인식, 조용한 설정 실패, 환경변수 오염, DB 스키마</a:t>
+              <a:t>OCR 표 인식, 조용한 설정 실패, 환경변수 오염, DB 스키마, 결제 결과 불확실</a:t>
             </a:r>
             <a:endParaRPr lang="en-US" sz="950" dirty="0"/>
           </a:p>
@@ -22046,7 +22136,7 @@
                 <a:ea typeface="Malgun Gothic" pitchFamily="34" charset="-122"/>
                 <a:cs typeface="Malgun Gothic" pitchFamily="34" charset="-120"/>
               </a:rPr>
-              <a:t>Idempotency-Key</a:t>
+              <a:t>Idempotency-Key = 주문번호</a:t>
             </a:r>
             <a:endParaRPr lang="en-US" sz="750" dirty="0"/>
           </a:p>
@@ -22063,7 +22153,7 @@
                 <a:ea typeface="Malgun Gothic" pitchFamily="34" charset="-122"/>
                 <a:cs typeface="Malgun Gothic" pitchFamily="34" charset="-120"/>
               </a:rPr>
-              <a:t>= 주문번호</a:t>
+              <a:t>시간 초과·5xx는 결과 불확실</a:t>
             </a:r>
             <a:endParaRPr lang="en-US" sz="750" dirty="0"/>
           </a:p>
@@ -22207,7 +22297,7 @@
                 <a:ea typeface="Malgun Gothic" pitchFamily="34" charset="-122"/>
                 <a:cs typeface="Malgun Gothic" pitchFamily="34" charset="-120"/>
               </a:rPr>
-              <a:t>이용권 발급</a:t>
+              <a:t>이용권 사용</a:t>
             </a:r>
             <a:endParaRPr lang="en-US" sz="1050" dirty="0"/>
           </a:p>
@@ -22246,7 +22336,7 @@
                 <a:ea typeface="Malgun Gothic" pitchFamily="34" charset="-122"/>
                 <a:cs typeface="Malgun Gothic" pitchFamily="34" charset="-120"/>
               </a:rPr>
-              <a:t>중복 승인에도 1장</a:t>
+              <a:t>분석 시작 시 선점</a:t>
             </a:r>
             <a:endParaRPr lang="en-US" sz="750" dirty="0"/>
           </a:p>
@@ -22263,7 +22353,7 @@
                 <a:ea typeface="Malgun Gothic" pitchFamily="34" charset="-122"/>
                 <a:cs typeface="Malgun Gothic" pitchFamily="34" charset="-120"/>
               </a:rPr>
-              <a:t>분석 성공 시에만 차감</a:t>
+              <a:t>실패하면 환원</a:t>
             </a:r>
             <a:endParaRPr lang="en-US" sz="750" dirty="0"/>
           </a:p>
@@ -22587,7 +22677,7 @@
                 <a:ea typeface="Malgun Gothic" pitchFamily="34" charset="-122"/>
                 <a:cs typeface="Malgun Gothic" pitchFamily="34" charset="-120"/>
               </a:rPr>
-              <a:t>이메일 해시로 계산 — 탈퇴 후 재가입해도 유지</a:t>
+              <a:t>이메일 해시 — 재가입해도 유지, 실패 시 환원</a:t>
             </a:r>
             <a:endParaRPr lang="en-US" sz="850" dirty="0"/>
           </a:p>
@@ -22911,7 +23001,7 @@
                 <a:ea typeface="Malgun Gothic" pitchFamily="34" charset="-122"/>
                 <a:cs typeface="Malgun Gothic" pitchFamily="34" charset="-120"/>
               </a:rPr>
-              <a:t>주문 행 비관적 잠금 (PESSIMISTIC_WRITE)</a:t>
+              <a:t>주문 비관적 잠금 · 이용권 선점으로 중복 사용 차단</a:t>
             </a:r>
             <a:endParaRPr lang="en-US" sz="850" dirty="0"/>
           </a:p>
@@ -23324,7 +23414,7 @@
                 <a:ea typeface="Malgun Gothic" pitchFamily="34" charset="-122"/>
                 <a:cs typeface="Malgun Gothic" pitchFamily="34" charset="-120"/>
               </a:rPr>
-              <a:t>불투명 랜덤 토큰을 DB에 저장</a:t>
+              <a:t>불투명 랜덤 토큰, DB엔 SHA-256 해시만</a:t>
             </a:r>
             <a:endParaRPr lang="en-US" sz="800" dirty="0"/>
           </a:p>
@@ -23541,7 +23631,7 @@
                 <a:ea typeface="Malgun Gothic" pitchFamily="34" charset="-122"/>
                 <a:cs typeface="Malgun Gothic" pitchFamily="34" charset="-120"/>
               </a:rPr>
-              <a:t>가입 이메일 6자리 인증</a:t>
+              <a:t>가입 이메일 6자리 인증 · 대소문자 통일</a:t>
             </a:r>
             <a:endParaRPr lang="en-US" sz="800" dirty="0"/>
           </a:p>
@@ -24309,7 +24399,7 @@
                 <a:ea typeface="Malgun Gothic" pitchFamily="34" charset="-122"/>
                 <a:cs typeface="Malgun Gothic" pitchFamily="34" charset="-120"/>
               </a:rPr>
-              <a:t>보안 헤더(클릭재킹 방지) · secure 쿠키</a:t>
+              <a:t>보안 헤더 · secure 쿠키 · H2 콘솔 차단</a:t>
             </a:r>
             <a:endParaRPr lang="en-US" sz="800" dirty="0"/>
           </a:p>
@@ -24329,7 +24419,7 @@
                 <a:ea typeface="Malgun Gothic" pitchFamily="34" charset="-122"/>
                 <a:cs typeface="Malgun Gothic" pitchFamily="34" charset="-120"/>
               </a:rPr>
-              <a:t>H2 콘솔 차단 · DDL 설정 환경 분리</a:t>
+              <a:t>Next.js 보안 패치, 운영 의존성 audit 0건</a:t>
             </a:r>
             <a:endParaRPr lang="en-US" sz="800" dirty="0"/>
           </a:p>
@@ -25390,7 +25480,7 @@
                 <a:ea typeface="Malgun Gothic" pitchFamily="34" charset="-122"/>
                 <a:cs typeface="Malgun Gothic" pitchFamily="34" charset="-120"/>
               </a:rPr>
-              <a:t>분석 무료 5회 · 인증번호 10분 유효 · 5회 오답 제한 · 메일 발송 하루 5회 · 비밀번호 5회 오류 잠금</a:t>
+              <a:t>분석 시도 하루 20회 · 업로드 5장/PDF 30쪽 · 상담 메시지 2000자 · 인증번호 10분·5회 · 비밀번호 5회 오류 잠금</a:t>
             </a:r>
             <a:endParaRPr lang="en-US" sz="800" dirty="0"/>
           </a:p>
@@ -27774,7 +27864,7 @@
                 <a:ea typeface="Malgun Gothic" pitchFamily="34" charset="-122"/>
                 <a:cs typeface="Malgun Gothic" pitchFamily="34" charset="-120"/>
               </a:rPr>
-              <a:t>OCR 표 인식, 조용한 설정 실패, 환경변수 오염, DB 스키마 문제</a:t>
+              <a:t>OCR 표 인식, 조용한 설정 실패, 환경변수 오염, DB 스키마, 결제 결과 불확실</a:t>
             </a:r>
             <a:endParaRPr lang="en-US" sz="1000" dirty="0"/>
           </a:p>
@@ -30933,40 +31023,16 @@
           <a:chExt cx="0" cy="0"/>
         </a:xfrm>
       </p:grpSpPr>
-      <p:pic>
-        <p:nvPicPr>
-          <p:cNvPr id="2" name="Image 0" descr="preencoded.png">    </p:cNvPr>
-          <p:cNvPicPr>
-            <a:picLocks noChangeAspect="1"/>
-          </p:cNvPicPr>
-          <p:nvPr/>
-        </p:nvPicPr>
-        <p:blipFill>
-          <a:blip r:embed="rId1"/>
-          <a:stretch>
-            <a:fillRect/>
-          </a:stretch>
-        </p:blipFill>
-        <p:spPr>
-          <a:xfrm>
-            <a:off x="5760720" y="640080"/>
-            <a:ext cx="3840480" cy="3840480"/>
-          </a:xfrm>
-          <a:prstGeom prst="rect">
-            <a:avLst/>
-          </a:prstGeom>
-        </p:spPr>
-      </p:pic>
-      <p:sp>
-        <p:nvSpPr>
-          <p:cNvPr id="3" name="Text 0"/>
-          <p:cNvSpPr txBox="1"/>
-          <p:nvPr/>
-        </p:nvSpPr>
-        <p:spPr>
-          <a:xfrm>
-            <a:off x="548640" y="1783080"/>
-            <a:ext cx="1828800" cy="320040"/>
+      <p:sp>
+        <p:nvSpPr>
+          <p:cNvPr id="2" name="Text 0"/>
+          <p:cNvSpPr txBox="1"/>
+          <p:nvPr/>
+        </p:nvSpPr>
+        <p:spPr>
+          <a:xfrm>
+            <a:off x="411480" y="237744"/>
+            <a:ext cx="4572000" cy="146304"/>
           </a:xfrm>
           <a:prstGeom prst="rect">
             <a:avLst/>
@@ -30982,7 +31048,7 @@
               <a:buNone/>
             </a:pPr>
             <a:r>
-              <a:rPr lang="en-US" sz="1500" b="1" dirty="0">
+              <a:rPr lang="en-US" sz="700" b="1" spc="100" kern="0" dirty="0">
                 <a:solidFill>
                   <a:srgbClr val="F97316"/>
                 </a:solidFill>
@@ -30990,110 +31056,73 @@
                 <a:ea typeface="Malgun Gothic" pitchFamily="34" charset="-122"/>
                 <a:cs typeface="Malgun Gothic" pitchFamily="34" charset="-120"/>
               </a:rPr>
-              <a:t>05</a:t>
-            </a:r>
-            <a:endParaRPr lang="en-US" sz="1500" dirty="0"/>
-          </a:p>
-        </p:txBody>
-      </p:sp>
-      <p:sp>
-        <p:nvSpPr>
-          <p:cNvPr id="4" name="Text 1"/>
-          <p:cNvSpPr txBox="1"/>
-          <p:nvPr/>
-        </p:nvSpPr>
-        <p:spPr>
-          <a:xfrm>
-            <a:off x="548640" y="2103120"/>
-            <a:ext cx="5486400" cy="548640"/>
-          </a:xfrm>
-          <a:prstGeom prst="rect">
-            <a:avLst/>
-          </a:prstGeom>
-          <a:noFill/>
-          <a:ln/>
-        </p:spPr>
-        <p:txBody>
-          <a:bodyPr wrap="square" lIns="0" tIns="0" rIns="0" bIns="0" rtlCol="0" anchor="t"/>
-          <a:lstStyle/>
-          <a:p>
-            <a:pPr indent="0" marL="0">
-              <a:buNone/>
-            </a:pPr>
-            <a:r>
-              <a:rPr lang="en-US" sz="2800" b="1" dirty="0">
-                <a:solidFill>
-                  <a:srgbClr val="FFFFFF"/>
-                </a:solidFill>
-                <a:latin typeface="Malgun Gothic" pitchFamily="34" charset="0"/>
-                <a:ea typeface="Malgun Gothic" pitchFamily="34" charset="-122"/>
-                <a:cs typeface="Malgun Gothic" pitchFamily="34" charset="-120"/>
-              </a:rPr>
-              <a:t>평가와 배포</a:t>
-            </a:r>
-            <a:endParaRPr lang="en-US" sz="2800" dirty="0"/>
-          </a:p>
-        </p:txBody>
-      </p:sp>
-      <p:sp>
-        <p:nvSpPr>
-          <p:cNvPr id="5" name="Text 2"/>
-          <p:cNvSpPr txBox="1"/>
-          <p:nvPr/>
-        </p:nvSpPr>
-        <p:spPr>
-          <a:xfrm>
-            <a:off x="548640" y="2724912"/>
-            <a:ext cx="5669280" cy="274320"/>
-          </a:xfrm>
-          <a:prstGeom prst="rect">
-            <a:avLst/>
-          </a:prstGeom>
-          <a:noFill/>
-          <a:ln/>
-        </p:spPr>
-        <p:txBody>
-          <a:bodyPr wrap="square" lIns="0" tIns="0" rIns="0" bIns="0" rtlCol="0" anchor="t"/>
-          <a:lstStyle/>
-          <a:p>
-            <a:pPr indent="0" marL="0">
-              <a:buNone/>
-            </a:pPr>
-            <a:r>
-              <a:rPr lang="en-US" sz="1000" dirty="0">
-                <a:solidFill>
-                  <a:srgbClr val="A1A1AA"/>
-                </a:solidFill>
-                <a:latin typeface="Malgun Gothic" pitchFamily="34" charset="0"/>
-                <a:ea typeface="Malgun Gothic" pitchFamily="34" charset="-122"/>
-                <a:cs typeface="Malgun Gothic" pitchFamily="34" charset="-120"/>
-              </a:rPr>
-              <a:t>성과, 배포 준비 현황, 다음 단계</a:t>
-            </a:r>
-            <a:endParaRPr lang="en-US" sz="1000" dirty="0"/>
-          </a:p>
-        </p:txBody>
-      </p:sp>
-      <p:sp>
-        <p:nvSpPr>
-          <p:cNvPr id="6" name="Shape 3"/>
+              <a:t>TROUBLESHOOTING</a:t>
+            </a:r>
+            <a:endParaRPr lang="en-US" sz="700" dirty="0"/>
+          </a:p>
+        </p:txBody>
+      </p:sp>
+      <p:sp>
+        <p:nvSpPr>
+          <p:cNvPr id="3" name="Text 1"/>
+          <p:cNvSpPr txBox="1"/>
+          <p:nvPr/>
+        </p:nvSpPr>
+        <p:spPr>
+          <a:xfrm>
+            <a:off x="411480" y="384048"/>
+            <a:ext cx="6949440" cy="411480"/>
+          </a:xfrm>
+          <a:prstGeom prst="rect">
+            <a:avLst/>
+          </a:prstGeom>
+          <a:noFill/>
+          <a:ln/>
+        </p:spPr>
+        <p:txBody>
+          <a:bodyPr wrap="square" lIns="0" tIns="0" rIns="0" bIns="0" rtlCol="0" anchor="ctr"/>
+          <a:lstStyle/>
+          <a:p>
+            <a:pPr indent="0" marL="0">
+              <a:buNone/>
+            </a:pPr>
+            <a:r>
+              <a:rPr lang="en-US" sz="2100" b="1" dirty="0">
+                <a:solidFill>
+                  <a:srgbClr val="18181B"/>
+                </a:solidFill>
+                <a:latin typeface="Malgun Gothic" pitchFamily="34" charset="0"/>
+                <a:ea typeface="Malgun Gothic" pitchFamily="34" charset="-122"/>
+                <a:cs typeface="Malgun Gothic" pitchFamily="34" charset="-120"/>
+              </a:rPr>
+              <a:t>결제 승인 결과를 알 수 없을 때</a:t>
+            </a:r>
+            <a:endParaRPr lang="en-US" sz="2100" dirty="0"/>
+          </a:p>
+        </p:txBody>
+      </p:sp>
+      <p:sp>
+        <p:nvSpPr>
+          <p:cNvPr id="4" name="Shape 2"/>
           <p:cNvSpPr/>
           <p:nvPr/>
         </p:nvSpPr>
         <p:spPr>
           <a:xfrm>
-            <a:off x="548640" y="3154680"/>
-            <a:ext cx="411480" cy="45720"/>
-          </a:xfrm>
-          <a:prstGeom prst="rect">
-            <a:avLst/>
+            <a:off x="6981444" y="329184"/>
+            <a:ext cx="1751076" cy="219456"/>
+          </a:xfrm>
+          <a:prstGeom prst="roundRect">
+            <a:avLst>
+              <a:gd name="adj" fmla="val 50000"/>
+            </a:avLst>
           </a:prstGeom>
           <a:solidFill>
-            <a:srgbClr val="F97316"/>
+            <a:srgbClr val="FFEDD5"/>
           </a:solidFill>
-          <a:ln w="12700">
+          <a:ln w="6350">
             <a:solidFill>
-              <a:srgbClr val="F97316"/>
+              <a:srgbClr val="FFEDD5"/>
             </a:solidFill>
             <a:prstDash val="solid"/>
           </a:ln>
@@ -31101,13 +31130,52 @@
       </p:sp>
       <p:sp>
         <p:nvSpPr>
-          <p:cNvPr id="7" name="Text 4"/>
-          <p:cNvSpPr txBox="1"/>
-          <p:nvPr/>
-        </p:nvSpPr>
-        <p:spPr>
-          <a:xfrm>
-            <a:off x="548640" y="4828032"/>
+          <p:cNvPr id="5" name="Text 3"/>
+          <p:cNvSpPr txBox="1"/>
+          <p:nvPr/>
+        </p:nvSpPr>
+        <p:spPr>
+          <a:xfrm>
+            <a:off x="6981444" y="329184"/>
+            <a:ext cx="1751076" cy="219456"/>
+          </a:xfrm>
+          <a:prstGeom prst="rect">
+            <a:avLst/>
+          </a:prstGeom>
+          <a:noFill/>
+          <a:ln/>
+        </p:spPr>
+        <p:txBody>
+          <a:bodyPr wrap="square" lIns="0" tIns="0" rIns="0" bIns="0" rtlCol="0" anchor="ctr"/>
+          <a:lstStyle/>
+          <a:p>
+            <a:pPr algn="ctr" indent="0" marL="0">
+              <a:buNone/>
+            </a:pPr>
+            <a:r>
+              <a:rPr lang="en-US" sz="700" b="1" dirty="0">
+                <a:solidFill>
+                  <a:srgbClr val="EA580C"/>
+                </a:solidFill>
+                <a:latin typeface="Malgun Gothic" pitchFamily="34" charset="0"/>
+                <a:ea typeface="Malgun Gothic" pitchFamily="34" charset="-122"/>
+                <a:cs typeface="Malgun Gothic" pitchFamily="34" charset="-120"/>
+              </a:rPr>
+              <a:t>Toss Payments · 멱등키</a:t>
+            </a:r>
+            <a:endParaRPr lang="en-US" sz="700" dirty="0"/>
+          </a:p>
+        </p:txBody>
+      </p:sp>
+      <p:sp>
+        <p:nvSpPr>
+          <p:cNvPr id="6" name="Text 4"/>
+          <p:cNvSpPr txBox="1"/>
+          <p:nvPr/>
+        </p:nvSpPr>
+        <p:spPr>
+          <a:xfrm>
+            <a:off x="411480" y="4828032"/>
             <a:ext cx="2743200" cy="182880"/>
           </a:xfrm>
           <a:prstGeom prst="rect">
@@ -31126,15 +31194,513 @@
             <a:r>
               <a:rPr lang="en-US" sz="650" b="1" spc="100" kern="0" dirty="0">
                 <a:solidFill>
-                  <a:srgbClr val="5A5A60"/>
-                </a:solidFill>
-                <a:latin typeface="Malgun Gothic" pitchFamily="34" charset="0"/>
-                <a:ea typeface="Malgun Gothic" pitchFamily="34" charset="-122"/>
-                <a:cs typeface="Malgun Gothic" pitchFamily="34" charset="-120"/>
-              </a:rPr>
-              <a:t>RETROSPECTIVE</a:t>
+                  <a:srgbClr val="8A8A93"/>
+                </a:solidFill>
+                <a:latin typeface="Malgun Gothic" pitchFamily="34" charset="0"/>
+                <a:ea typeface="Malgun Gothic" pitchFamily="34" charset="-122"/>
+                <a:cs typeface="Malgun Gothic" pitchFamily="34" charset="-120"/>
+              </a:rPr>
+              <a:t>TROUBLESHOOTING</a:t>
             </a:r>
             <a:endParaRPr lang="en-US" sz="650" dirty="0"/>
+          </a:p>
+        </p:txBody>
+      </p:sp>
+      <p:sp>
+        <p:nvSpPr>
+          <p:cNvPr id="7" name="Shape 5"/>
+          <p:cNvSpPr/>
+          <p:nvPr/>
+        </p:nvSpPr>
+        <p:spPr>
+          <a:xfrm>
+            <a:off x="411480" y="1097280"/>
+            <a:ext cx="1965960" cy="2331720"/>
+          </a:xfrm>
+          <a:prstGeom prst="roundRect">
+            <a:avLst>
+              <a:gd name="adj" fmla="val 2791"/>
+            </a:avLst>
+          </a:prstGeom>
+          <a:solidFill>
+            <a:srgbClr val="FFFFFF"/>
+          </a:solidFill>
+          <a:ln w="9525">
+            <a:solidFill>
+              <a:srgbClr val="E4E4E7"/>
+            </a:solidFill>
+            <a:prstDash val="solid"/>
+          </a:ln>
+        </p:spPr>
+      </p:sp>
+      <p:sp>
+        <p:nvSpPr>
+          <p:cNvPr id="8" name="Text 6"/>
+          <p:cNvSpPr txBox="1"/>
+          <p:nvPr/>
+        </p:nvSpPr>
+        <p:spPr>
+          <a:xfrm>
+            <a:off x="576072" y="1261872"/>
+            <a:ext cx="1691640" cy="237744"/>
+          </a:xfrm>
+          <a:prstGeom prst="rect">
+            <a:avLst/>
+          </a:prstGeom>
+          <a:noFill/>
+          <a:ln/>
+        </p:spPr>
+        <p:txBody>
+          <a:bodyPr wrap="square" lIns="0" tIns="0" rIns="0" bIns="0" rtlCol="0" anchor="t"/>
+          <a:lstStyle/>
+          <a:p>
+            <a:pPr indent="0" marL="0">
+              <a:buNone/>
+            </a:pPr>
+            <a:r>
+              <a:rPr lang="en-US" sz="1100" b="1" dirty="0">
+                <a:solidFill>
+                  <a:srgbClr val="DC2626"/>
+                </a:solidFill>
+                <a:latin typeface="Malgun Gothic" pitchFamily="34" charset="0"/>
+                <a:ea typeface="Malgun Gothic" pitchFamily="34" charset="-122"/>
+                <a:cs typeface="Malgun Gothic" pitchFamily="34" charset="-120"/>
+              </a:rPr>
+              <a:t>문제</a:t>
+            </a:r>
+            <a:endParaRPr lang="en-US" sz="1100" dirty="0"/>
+          </a:p>
+        </p:txBody>
+      </p:sp>
+      <p:sp>
+        <p:nvSpPr>
+          <p:cNvPr id="9" name="Text 7"/>
+          <p:cNvSpPr txBox="1"/>
+          <p:nvPr/>
+        </p:nvSpPr>
+        <p:spPr>
+          <a:xfrm>
+            <a:off x="576072" y="1600200"/>
+            <a:ext cx="1655064" cy="1691640"/>
+          </a:xfrm>
+          <a:prstGeom prst="rect">
+            <a:avLst/>
+          </a:prstGeom>
+          <a:noFill/>
+          <a:ln/>
+        </p:spPr>
+        <p:txBody>
+          <a:bodyPr wrap="square" lIns="0" tIns="0" rIns="0" bIns="0" rtlCol="0" anchor="t"/>
+          <a:lstStyle/>
+          <a:p>
+            <a:pPr indent="0" marL="0">
+              <a:lnSpc>
+                <a:spcPct val="125000"/>
+              </a:lnSpc>
+              <a:buNone/>
+            </a:pPr>
+            <a:r>
+              <a:rPr lang="en-US" sz="950" dirty="0">
+                <a:solidFill>
+                  <a:srgbClr val="52525B"/>
+                </a:solidFill>
+                <a:latin typeface="Malgun Gothic" pitchFamily="34" charset="0"/>
+                <a:ea typeface="Malgun Gothic" pitchFamily="34" charset="-122"/>
+                <a:cs typeface="Malgun Gothic" pitchFamily="34" charset="-120"/>
+              </a:rPr>
+              <a:t>토스 승인 요청이 시간 초과·5xx로 끝나면 돈이 빠져나갔을 수 있는데, 주문을 FAILED로 굳혀 재시도가 막힘</a:t>
+            </a:r>
+            <a:endParaRPr lang="en-US" sz="950" dirty="0"/>
+          </a:p>
+        </p:txBody>
+      </p:sp>
+      <p:sp>
+        <p:nvSpPr>
+          <p:cNvPr id="10" name="Shape 8"/>
+          <p:cNvSpPr/>
+          <p:nvPr/>
+        </p:nvSpPr>
+        <p:spPr>
+          <a:xfrm>
+            <a:off x="2532888" y="1097280"/>
+            <a:ext cx="1965960" cy="2331720"/>
+          </a:xfrm>
+          <a:prstGeom prst="roundRect">
+            <a:avLst>
+              <a:gd name="adj" fmla="val 2791"/>
+            </a:avLst>
+          </a:prstGeom>
+          <a:solidFill>
+            <a:srgbClr val="FFFFFF"/>
+          </a:solidFill>
+          <a:ln w="9525">
+            <a:solidFill>
+              <a:srgbClr val="E4E4E7"/>
+            </a:solidFill>
+            <a:prstDash val="solid"/>
+          </a:ln>
+        </p:spPr>
+      </p:sp>
+      <p:sp>
+        <p:nvSpPr>
+          <p:cNvPr id="11" name="Text 9"/>
+          <p:cNvSpPr txBox="1"/>
+          <p:nvPr/>
+        </p:nvSpPr>
+        <p:spPr>
+          <a:xfrm>
+            <a:off x="2697480" y="1261872"/>
+            <a:ext cx="1691640" cy="237744"/>
+          </a:xfrm>
+          <a:prstGeom prst="rect">
+            <a:avLst/>
+          </a:prstGeom>
+          <a:noFill/>
+          <a:ln/>
+        </p:spPr>
+        <p:txBody>
+          <a:bodyPr wrap="square" lIns="0" tIns="0" rIns="0" bIns="0" rtlCol="0" anchor="t"/>
+          <a:lstStyle/>
+          <a:p>
+            <a:pPr indent="0" marL="0">
+              <a:buNone/>
+            </a:pPr>
+            <a:r>
+              <a:rPr lang="en-US" sz="1100" b="1" dirty="0">
+                <a:solidFill>
+                  <a:srgbClr val="D97706"/>
+                </a:solidFill>
+                <a:latin typeface="Malgun Gothic" pitchFamily="34" charset="0"/>
+                <a:ea typeface="Malgun Gothic" pitchFamily="34" charset="-122"/>
+                <a:cs typeface="Malgun Gothic" pitchFamily="34" charset="-120"/>
+              </a:rPr>
+              <a:t>원인</a:t>
+            </a:r>
+            <a:endParaRPr lang="en-US" sz="1100" dirty="0"/>
+          </a:p>
+        </p:txBody>
+      </p:sp>
+      <p:sp>
+        <p:nvSpPr>
+          <p:cNvPr id="12" name="Text 10"/>
+          <p:cNvSpPr txBox="1"/>
+          <p:nvPr/>
+        </p:nvSpPr>
+        <p:spPr>
+          <a:xfrm>
+            <a:off x="2697480" y="1600200"/>
+            <a:ext cx="1655064" cy="1691640"/>
+          </a:xfrm>
+          <a:prstGeom prst="rect">
+            <a:avLst/>
+          </a:prstGeom>
+          <a:noFill/>
+          <a:ln/>
+        </p:spPr>
+        <p:txBody>
+          <a:bodyPr wrap="square" lIns="0" tIns="0" rIns="0" bIns="0" rtlCol="0" anchor="t"/>
+          <a:lstStyle/>
+          <a:p>
+            <a:pPr indent="0" marL="0">
+              <a:lnSpc>
+                <a:spcPct val="125000"/>
+              </a:lnSpc>
+              <a:buNone/>
+            </a:pPr>
+            <a:r>
+              <a:rPr lang="en-US" sz="950" dirty="0">
+                <a:solidFill>
+                  <a:srgbClr val="52525B"/>
+                </a:solidFill>
+                <a:latin typeface="Malgun Gothic" pitchFamily="34" charset="0"/>
+                <a:ea typeface="Malgun Gothic" pitchFamily="34" charset="-122"/>
+                <a:cs typeface="Malgun Gothic" pitchFamily="34" charset="-120"/>
+              </a:rPr>
+              <a:t>거절이 확실한 응답(4xx)과 결과를 알 수 없는 응답을 구분하지 않고 모든 오류를 실패로 처리</a:t>
+            </a:r>
+            <a:endParaRPr lang="en-US" sz="950" dirty="0"/>
+          </a:p>
+        </p:txBody>
+      </p:sp>
+      <p:sp>
+        <p:nvSpPr>
+          <p:cNvPr id="13" name="Shape 11"/>
+          <p:cNvSpPr/>
+          <p:nvPr/>
+        </p:nvSpPr>
+        <p:spPr>
+          <a:xfrm>
+            <a:off x="4654296" y="1097280"/>
+            <a:ext cx="1965960" cy="2331720"/>
+          </a:xfrm>
+          <a:prstGeom prst="roundRect">
+            <a:avLst>
+              <a:gd name="adj" fmla="val 2791"/>
+            </a:avLst>
+          </a:prstGeom>
+          <a:solidFill>
+            <a:srgbClr val="18181A"/>
+          </a:solidFill>
+          <a:ln w="9525">
+            <a:solidFill>
+              <a:srgbClr val="18181A"/>
+            </a:solidFill>
+            <a:prstDash val="solid"/>
+          </a:ln>
+        </p:spPr>
+      </p:sp>
+      <p:sp>
+        <p:nvSpPr>
+          <p:cNvPr id="14" name="Text 12"/>
+          <p:cNvSpPr txBox="1"/>
+          <p:nvPr/>
+        </p:nvSpPr>
+        <p:spPr>
+          <a:xfrm>
+            <a:off x="4818888" y="1261872"/>
+            <a:ext cx="1691640" cy="237744"/>
+          </a:xfrm>
+          <a:prstGeom prst="rect">
+            <a:avLst/>
+          </a:prstGeom>
+          <a:noFill/>
+          <a:ln/>
+        </p:spPr>
+        <p:txBody>
+          <a:bodyPr wrap="square" lIns="0" tIns="0" rIns="0" bIns="0" rtlCol="0" anchor="t"/>
+          <a:lstStyle/>
+          <a:p>
+            <a:pPr indent="0" marL="0">
+              <a:buNone/>
+            </a:pPr>
+            <a:r>
+              <a:rPr lang="en-US" sz="1100" b="1" dirty="0">
+                <a:solidFill>
+                  <a:srgbClr val="F97316"/>
+                </a:solidFill>
+                <a:latin typeface="Malgun Gothic" pitchFamily="34" charset="0"/>
+                <a:ea typeface="Malgun Gothic" pitchFamily="34" charset="-122"/>
+                <a:cs typeface="Malgun Gothic" pitchFamily="34" charset="-120"/>
+              </a:rPr>
+              <a:t>개선</a:t>
+            </a:r>
+            <a:endParaRPr lang="en-US" sz="1100" dirty="0"/>
+          </a:p>
+        </p:txBody>
+      </p:sp>
+      <p:sp>
+        <p:nvSpPr>
+          <p:cNvPr id="15" name="Text 13"/>
+          <p:cNvSpPr txBox="1"/>
+          <p:nvPr/>
+        </p:nvSpPr>
+        <p:spPr>
+          <a:xfrm>
+            <a:off x="4818888" y="1600200"/>
+            <a:ext cx="1655064" cy="1691640"/>
+          </a:xfrm>
+          <a:prstGeom prst="rect">
+            <a:avLst/>
+          </a:prstGeom>
+          <a:noFill/>
+          <a:ln/>
+        </p:spPr>
+        <p:txBody>
+          <a:bodyPr wrap="square" lIns="0" tIns="0" rIns="0" bIns="0" rtlCol="0" anchor="t"/>
+          <a:lstStyle/>
+          <a:p>
+            <a:pPr indent="0" marL="0">
+              <a:lnSpc>
+                <a:spcPct val="125000"/>
+              </a:lnSpc>
+              <a:buNone/>
+            </a:pPr>
+            <a:r>
+              <a:rPr lang="en-US" sz="950" b="1" dirty="0">
+                <a:solidFill>
+                  <a:srgbClr val="FFFFFF"/>
+                </a:solidFill>
+                <a:latin typeface="Malgun Gothic" pitchFamily="34" charset="0"/>
+                <a:ea typeface="Malgun Gothic" pitchFamily="34" charset="-122"/>
+                <a:cs typeface="Malgun Gothic" pitchFamily="34" charset="-120"/>
+              </a:rPr>
+              <a:t>4xx만 실패, 나머지는 결과 불확실로 주문을 READY 유지 — 같은 주문으로 재승인(멱등키), '이미 처리됨' 응답은 결제 조회로 상태·주문번호·금액 확인 후 성공</a:t>
+            </a:r>
+            <a:endParaRPr lang="en-US" sz="950" dirty="0"/>
+          </a:p>
+        </p:txBody>
+      </p:sp>
+      <p:sp>
+        <p:nvSpPr>
+          <p:cNvPr id="16" name="Shape 14"/>
+          <p:cNvSpPr/>
+          <p:nvPr/>
+        </p:nvSpPr>
+        <p:spPr>
+          <a:xfrm>
+            <a:off x="6775704" y="1097280"/>
+            <a:ext cx="1965960" cy="2331720"/>
+          </a:xfrm>
+          <a:prstGeom prst="roundRect">
+            <a:avLst>
+              <a:gd name="adj" fmla="val 2791"/>
+            </a:avLst>
+          </a:prstGeom>
+          <a:solidFill>
+            <a:srgbClr val="FFFFFF"/>
+          </a:solidFill>
+          <a:ln w="9525">
+            <a:solidFill>
+              <a:srgbClr val="E4E4E7"/>
+            </a:solidFill>
+            <a:prstDash val="solid"/>
+          </a:ln>
+        </p:spPr>
+      </p:sp>
+      <p:sp>
+        <p:nvSpPr>
+          <p:cNvPr id="17" name="Text 15"/>
+          <p:cNvSpPr txBox="1"/>
+          <p:nvPr/>
+        </p:nvSpPr>
+        <p:spPr>
+          <a:xfrm>
+            <a:off x="6940296" y="1261872"/>
+            <a:ext cx="1691640" cy="237744"/>
+          </a:xfrm>
+          <a:prstGeom prst="rect">
+            <a:avLst/>
+          </a:prstGeom>
+          <a:noFill/>
+          <a:ln/>
+        </p:spPr>
+        <p:txBody>
+          <a:bodyPr wrap="square" lIns="0" tIns="0" rIns="0" bIns="0" rtlCol="0" anchor="t"/>
+          <a:lstStyle/>
+          <a:p>
+            <a:pPr indent="0" marL="0">
+              <a:buNone/>
+            </a:pPr>
+            <a:r>
+              <a:rPr lang="en-US" sz="1100" b="1" dirty="0">
+                <a:solidFill>
+                  <a:srgbClr val="16A34A"/>
+                </a:solidFill>
+                <a:latin typeface="Malgun Gothic" pitchFamily="34" charset="0"/>
+                <a:ea typeface="Malgun Gothic" pitchFamily="34" charset="-122"/>
+                <a:cs typeface="Malgun Gothic" pitchFamily="34" charset="-120"/>
+              </a:rPr>
+              <a:t>결과</a:t>
+            </a:r>
+            <a:endParaRPr lang="en-US" sz="1100" dirty="0"/>
+          </a:p>
+        </p:txBody>
+      </p:sp>
+      <p:sp>
+        <p:nvSpPr>
+          <p:cNvPr id="18" name="Text 16"/>
+          <p:cNvSpPr txBox="1"/>
+          <p:nvPr/>
+        </p:nvSpPr>
+        <p:spPr>
+          <a:xfrm>
+            <a:off x="6940296" y="1600200"/>
+            <a:ext cx="1655064" cy="1691640"/>
+          </a:xfrm>
+          <a:prstGeom prst="rect">
+            <a:avLst/>
+          </a:prstGeom>
+          <a:noFill/>
+          <a:ln/>
+        </p:spPr>
+        <p:txBody>
+          <a:bodyPr wrap="square" lIns="0" tIns="0" rIns="0" bIns="0" rtlCol="0" anchor="t"/>
+          <a:lstStyle/>
+          <a:p>
+            <a:pPr indent="0" marL="0">
+              <a:lnSpc>
+                <a:spcPct val="125000"/>
+              </a:lnSpc>
+              <a:buNone/>
+            </a:pPr>
+            <a:r>
+              <a:rPr lang="en-US" sz="950" dirty="0">
+                <a:solidFill>
+                  <a:srgbClr val="52525B"/>
+                </a:solidFill>
+                <a:latin typeface="Malgun Gothic" pitchFamily="34" charset="0"/>
+                <a:ea typeface="Malgun Gothic" pitchFamily="34" charset="-122"/>
+                <a:cs typeface="Malgun Gothic" pitchFamily="34" charset="-120"/>
+              </a:rPr>
+              <a:t>중복 결제 없이 재시도 가능, 토스 테스트 키로 오류·조회 응답 형식 확인 — 이용권도 시작 시 선점·실패 시 환원</a:t>
+            </a:r>
+            <a:endParaRPr lang="en-US" sz="950" dirty="0"/>
+          </a:p>
+        </p:txBody>
+      </p:sp>
+      <p:sp>
+        <p:nvSpPr>
+          <p:cNvPr id="19" name="Shape 17"/>
+          <p:cNvSpPr/>
+          <p:nvPr/>
+        </p:nvSpPr>
+        <p:spPr>
+          <a:xfrm>
+            <a:off x="411480" y="3703320"/>
+            <a:ext cx="8321040" cy="347472"/>
+          </a:xfrm>
+          <a:prstGeom prst="roundRect">
+            <a:avLst>
+              <a:gd name="adj" fmla="val 15789"/>
+            </a:avLst>
+          </a:prstGeom>
+          <a:solidFill>
+            <a:srgbClr val="FFF7ED"/>
+          </a:solidFill>
+          <a:ln w="9525">
+            <a:solidFill>
+              <a:srgbClr val="FED7AA"/>
+            </a:solidFill>
+            <a:prstDash val="solid"/>
+          </a:ln>
+        </p:spPr>
+      </p:sp>
+      <p:sp>
+        <p:nvSpPr>
+          <p:cNvPr id="20" name="Text 18"/>
+          <p:cNvSpPr txBox="1"/>
+          <p:nvPr/>
+        </p:nvSpPr>
+        <p:spPr>
+          <a:xfrm>
+            <a:off x="548640" y="3703320"/>
+            <a:ext cx="8046720" cy="347472"/>
+          </a:xfrm>
+          <a:prstGeom prst="rect">
+            <a:avLst/>
+          </a:prstGeom>
+          <a:noFill/>
+          <a:ln/>
+        </p:spPr>
+        <p:txBody>
+          <a:bodyPr wrap="square" lIns="0" tIns="0" rIns="0" bIns="0" rtlCol="0" anchor="ctr"/>
+          <a:lstStyle/>
+          <a:p>
+            <a:pPr algn="ctr" indent="0" marL="0">
+              <a:buNone/>
+            </a:pPr>
+            <a:r>
+              <a:rPr lang="en-US" sz="900" b="1" dirty="0">
+                <a:solidFill>
+                  <a:srgbClr val="18181B"/>
+                </a:solidFill>
+                <a:latin typeface="Malgun Gothic" pitchFamily="34" charset="0"/>
+                <a:ea typeface="Malgun Gothic" pitchFamily="34" charset="-122"/>
+                <a:cs typeface="Malgun Gothic" pitchFamily="34" charset="-120"/>
+              </a:rPr>
+              <a:t>돈이 오가는 흐름은 '실패'와 '모름'을 구분해 설계</a:t>
+            </a:r>
+            <a:endParaRPr lang="en-US" sz="900" dirty="0"/>
           </a:p>
         </p:txBody>
       </p:sp>
@@ -31168,7 +31734,7 @@
             <a:lvl1pPr>
               <a:defRPr sz="700">
                 <a:solidFill>
-                  <a:srgbClr val="5A5A60"/>
+                  <a:srgbClr val="8A8A93"/>
                 </a:solidFill>
                 <a:latin typeface="Malgun Gothic"/>
                 <a:ea typeface="Malgun Gothic"/>
@@ -31489,16 +32055,40 @@
           <a:chExt cx="0" cy="0"/>
         </a:xfrm>
       </p:grpSpPr>
-      <p:sp>
-        <p:nvSpPr>
-          <p:cNvPr id="2" name="Text 0"/>
-          <p:cNvSpPr txBox="1"/>
-          <p:nvPr/>
-        </p:nvSpPr>
-        <p:spPr>
-          <a:xfrm>
-            <a:off x="411480" y="237744"/>
-            <a:ext cx="4572000" cy="146304"/>
+      <p:pic>
+        <p:nvPicPr>
+          <p:cNvPr id="2" name="Image 0" descr="preencoded.png">    </p:cNvPr>
+          <p:cNvPicPr>
+            <a:picLocks noChangeAspect="1"/>
+          </p:cNvPicPr>
+          <p:nvPr/>
+        </p:nvPicPr>
+        <p:blipFill>
+          <a:blip r:embed="rId1"/>
+          <a:stretch>
+            <a:fillRect/>
+          </a:stretch>
+        </p:blipFill>
+        <p:spPr>
+          <a:xfrm>
+            <a:off x="5760720" y="640080"/>
+            <a:ext cx="3840480" cy="3840480"/>
+          </a:xfrm>
+          <a:prstGeom prst="rect">
+            <a:avLst/>
+          </a:prstGeom>
+        </p:spPr>
+      </p:pic>
+      <p:sp>
+        <p:nvSpPr>
+          <p:cNvPr id="3" name="Text 0"/>
+          <p:cNvSpPr txBox="1"/>
+          <p:nvPr/>
+        </p:nvSpPr>
+        <p:spPr>
+          <a:xfrm>
+            <a:off x="548640" y="1783080"/>
+            <a:ext cx="1828800" cy="320040"/>
           </a:xfrm>
           <a:prstGeom prst="rect">
             <a:avLst/>
@@ -31514,7 +32104,7 @@
               <a:buNone/>
             </a:pPr>
             <a:r>
-              <a:rPr lang="en-US" sz="700" b="1" spc="100" kern="0" dirty="0">
+              <a:rPr lang="en-US" sz="1500" b="1" dirty="0">
                 <a:solidFill>
                   <a:srgbClr val="F97316"/>
                 </a:solidFill>
@@ -31522,61 +32112,22 @@
                 <a:ea typeface="Malgun Gothic" pitchFamily="34" charset="-122"/>
                 <a:cs typeface="Malgun Gothic" pitchFamily="34" charset="-120"/>
               </a:rPr>
-              <a:t>RETROSPECTIVE</a:t>
-            </a:r>
-            <a:endParaRPr lang="en-US" sz="700" dirty="0"/>
-          </a:p>
-        </p:txBody>
-      </p:sp>
-      <p:sp>
-        <p:nvSpPr>
-          <p:cNvPr id="3" name="Text 1"/>
-          <p:cNvSpPr txBox="1"/>
-          <p:nvPr/>
-        </p:nvSpPr>
-        <p:spPr>
-          <a:xfrm>
-            <a:off x="411480" y="384048"/>
-            <a:ext cx="6949440" cy="411480"/>
-          </a:xfrm>
-          <a:prstGeom prst="rect">
-            <a:avLst/>
-          </a:prstGeom>
-          <a:noFill/>
-          <a:ln/>
-        </p:spPr>
-        <p:txBody>
-          <a:bodyPr wrap="square" lIns="0" tIns="0" rIns="0" bIns="0" rtlCol="0" anchor="ctr"/>
-          <a:lstStyle/>
-          <a:p>
-            <a:pPr indent="0" marL="0">
-              <a:buNone/>
-            </a:pPr>
-            <a:r>
-              <a:rPr lang="en-US" sz="2100" b="1" dirty="0">
-                <a:solidFill>
-                  <a:srgbClr val="18181B"/>
-                </a:solidFill>
-                <a:latin typeface="Malgun Gothic" pitchFamily="34" charset="0"/>
-                <a:ea typeface="Malgun Gothic" pitchFamily="34" charset="-122"/>
-                <a:cs typeface="Malgun Gothic" pitchFamily="34" charset="-120"/>
-              </a:rPr>
-              <a:t>프로젝트 평가</a:t>
-            </a:r>
-            <a:endParaRPr lang="en-US" sz="2100" dirty="0"/>
-          </a:p>
-        </p:txBody>
-      </p:sp>
-      <p:sp>
-        <p:nvSpPr>
-          <p:cNvPr id="4" name="Text 2"/>
-          <p:cNvSpPr txBox="1"/>
-          <p:nvPr/>
-        </p:nvSpPr>
-        <p:spPr>
-          <a:xfrm>
-            <a:off x="411480" y="4828032"/>
-            <a:ext cx="2743200" cy="182880"/>
+              <a:t>05</a:t>
+            </a:r>
+            <a:endParaRPr lang="en-US" sz="1500" dirty="0"/>
+          </a:p>
+        </p:txBody>
+      </p:sp>
+      <p:sp>
+        <p:nvSpPr>
+          <p:cNvPr id="4" name="Text 1"/>
+          <p:cNvSpPr txBox="1"/>
+          <p:nvPr/>
+        </p:nvSpPr>
+        <p:spPr>
+          <a:xfrm>
+            <a:off x="548640" y="2103120"/>
+            <a:ext cx="5486400" cy="548640"/>
           </a:xfrm>
           <a:prstGeom prst="rect">
             <a:avLst/>
@@ -31592,42 +32143,79 @@
               <a:buNone/>
             </a:pPr>
             <a:r>
-              <a:rPr lang="en-US" sz="650" b="1" spc="100" kern="0" dirty="0">
-                <a:solidFill>
-                  <a:srgbClr val="8A8A93"/>
-                </a:solidFill>
-                <a:latin typeface="Malgun Gothic" pitchFamily="34" charset="0"/>
-                <a:ea typeface="Malgun Gothic" pitchFamily="34" charset="-122"/>
-                <a:cs typeface="Malgun Gothic" pitchFamily="34" charset="-120"/>
-              </a:rPr>
-              <a:t>RETROSPECTIVE</a:t>
-            </a:r>
-            <a:endParaRPr lang="en-US" sz="650" dirty="0"/>
-          </a:p>
-        </p:txBody>
-      </p:sp>
-      <p:sp>
-        <p:nvSpPr>
-          <p:cNvPr id="5" name="Shape 3"/>
+              <a:rPr lang="en-US" sz="2800" b="1" dirty="0">
+                <a:solidFill>
+                  <a:srgbClr val="FFFFFF"/>
+                </a:solidFill>
+                <a:latin typeface="Malgun Gothic" pitchFamily="34" charset="0"/>
+                <a:ea typeface="Malgun Gothic" pitchFamily="34" charset="-122"/>
+                <a:cs typeface="Malgun Gothic" pitchFamily="34" charset="-120"/>
+              </a:rPr>
+              <a:t>평가와 배포</a:t>
+            </a:r>
+            <a:endParaRPr lang="en-US" sz="2800" dirty="0"/>
+          </a:p>
+        </p:txBody>
+      </p:sp>
+      <p:sp>
+        <p:nvSpPr>
+          <p:cNvPr id="5" name="Text 2"/>
+          <p:cNvSpPr txBox="1"/>
+          <p:nvPr/>
+        </p:nvSpPr>
+        <p:spPr>
+          <a:xfrm>
+            <a:off x="548640" y="2724912"/>
+            <a:ext cx="5669280" cy="274320"/>
+          </a:xfrm>
+          <a:prstGeom prst="rect">
+            <a:avLst/>
+          </a:prstGeom>
+          <a:noFill/>
+          <a:ln/>
+        </p:spPr>
+        <p:txBody>
+          <a:bodyPr wrap="square" lIns="0" tIns="0" rIns="0" bIns="0" rtlCol="0" anchor="t"/>
+          <a:lstStyle/>
+          <a:p>
+            <a:pPr indent="0" marL="0">
+              <a:buNone/>
+            </a:pPr>
+            <a:r>
+              <a:rPr lang="en-US" sz="1000" dirty="0">
+                <a:solidFill>
+                  <a:srgbClr val="A1A1AA"/>
+                </a:solidFill>
+                <a:latin typeface="Malgun Gothic" pitchFamily="34" charset="0"/>
+                <a:ea typeface="Malgun Gothic" pitchFamily="34" charset="-122"/>
+                <a:cs typeface="Malgun Gothic" pitchFamily="34" charset="-120"/>
+              </a:rPr>
+              <a:t>성과, 배포 준비 현황, 다음 단계</a:t>
+            </a:r>
+            <a:endParaRPr lang="en-US" sz="1000" dirty="0"/>
+          </a:p>
+        </p:txBody>
+      </p:sp>
+      <p:sp>
+        <p:nvSpPr>
+          <p:cNvPr id="6" name="Shape 3"/>
           <p:cNvSpPr/>
           <p:nvPr/>
         </p:nvSpPr>
         <p:spPr>
           <a:xfrm>
-            <a:off x="411480" y="1005840"/>
-            <a:ext cx="8321040" cy="822960"/>
-          </a:xfrm>
-          <a:prstGeom prst="roundRect">
-            <a:avLst>
-              <a:gd name="adj" fmla="val 6667"/>
-            </a:avLst>
+            <a:off x="548640" y="3154680"/>
+            <a:ext cx="411480" cy="45720"/>
+          </a:xfrm>
+          <a:prstGeom prst="rect">
+            <a:avLst/>
           </a:prstGeom>
           <a:solidFill>
-            <a:srgbClr val="FFFFFF"/>
+            <a:srgbClr val="F97316"/>
           </a:solidFill>
-          <a:ln w="9525">
+          <a:ln w="12700">
             <a:solidFill>
-              <a:srgbClr val="E4E4E7"/>
+              <a:srgbClr val="F97316"/>
             </a:solidFill>
             <a:prstDash val="solid"/>
           </a:ln>
@@ -31635,53 +32223,14 @@
       </p:sp>
       <p:sp>
         <p:nvSpPr>
-          <p:cNvPr id="6" name="Text 4"/>
-          <p:cNvSpPr txBox="1"/>
-          <p:nvPr/>
-        </p:nvSpPr>
-        <p:spPr>
-          <a:xfrm>
-            <a:off x="411480" y="1078992"/>
-            <a:ext cx="1664208" cy="384048"/>
-          </a:xfrm>
-          <a:prstGeom prst="rect">
-            <a:avLst/>
-          </a:prstGeom>
-          <a:noFill/>
-          <a:ln/>
-        </p:spPr>
-        <p:txBody>
-          <a:bodyPr wrap="square" lIns="0" tIns="0" rIns="0" bIns="0" rtlCol="0" anchor="ctr"/>
-          <a:lstStyle/>
-          <a:p>
-            <a:pPr algn="ctr" indent="0" marL="0">
-              <a:buNone/>
-            </a:pPr>
-            <a:r>
-              <a:rPr lang="en-US" sz="2000" b="1" dirty="0">
-                <a:solidFill>
-                  <a:srgbClr val="F97316"/>
-                </a:solidFill>
-                <a:latin typeface="Malgun Gothic" pitchFamily="34" charset="0"/>
-                <a:ea typeface="Malgun Gothic" pitchFamily="34" charset="-122"/>
-                <a:cs typeface="Malgun Gothic" pitchFamily="34" charset="-120"/>
-              </a:rPr>
-              <a:t>1명</a:t>
-            </a:r>
-            <a:endParaRPr lang="en-US" sz="2000" dirty="0"/>
-          </a:p>
-        </p:txBody>
-      </p:sp>
-      <p:sp>
-        <p:nvSpPr>
-          <p:cNvPr id="7" name="Text 5"/>
-          <p:cNvSpPr txBox="1"/>
-          <p:nvPr/>
-        </p:nvSpPr>
-        <p:spPr>
-          <a:xfrm>
-            <a:off x="411480" y="1481328"/>
-            <a:ext cx="1664208" cy="182880"/>
+          <p:cNvPr id="7" name="Text 4"/>
+          <p:cNvSpPr txBox="1"/>
+          <p:nvPr/>
+        </p:nvSpPr>
+        <p:spPr>
+          <a:xfrm>
+            <a:off x="548640" y="4828032"/>
+            <a:ext cx="2743200" cy="182880"/>
           </a:xfrm>
           <a:prstGeom prst="rect">
             <a:avLst/>
@@ -31693,739 +32242,23 @@
           <a:bodyPr wrap="square" lIns="0" tIns="0" rIns="0" bIns="0" rtlCol="0" anchor="t"/>
           <a:lstStyle/>
           <a:p>
-            <a:pPr algn="ctr" indent="0" marL="0">
-              <a:buNone/>
-            </a:pPr>
-            <a:r>
-              <a:rPr lang="en-US" sz="750" dirty="0">
-                <a:solidFill>
-                  <a:srgbClr val="52525B"/>
-                </a:solidFill>
-                <a:latin typeface="Malgun Gothic" pitchFamily="34" charset="0"/>
-                <a:ea typeface="Malgun Gothic" pitchFamily="34" charset="-122"/>
-                <a:cs typeface="Malgun Gothic" pitchFamily="34" charset="-120"/>
-              </a:rPr>
-              <a:t>풀스택 개발</a:t>
-            </a:r>
-            <a:endParaRPr lang="en-US" sz="750" dirty="0"/>
-          </a:p>
-        </p:txBody>
-      </p:sp>
-      <p:sp>
-        <p:nvSpPr>
-          <p:cNvPr id="8" name="Text 6"/>
-          <p:cNvSpPr txBox="1"/>
-          <p:nvPr/>
-        </p:nvSpPr>
-        <p:spPr>
-          <a:xfrm>
-            <a:off x="2075688" y="1078992"/>
-            <a:ext cx="1664208" cy="384048"/>
-          </a:xfrm>
-          <a:prstGeom prst="rect">
-            <a:avLst/>
-          </a:prstGeom>
-          <a:noFill/>
-          <a:ln/>
-        </p:spPr>
-        <p:txBody>
-          <a:bodyPr wrap="square" lIns="0" tIns="0" rIns="0" bIns="0" rtlCol="0" anchor="ctr"/>
-          <a:lstStyle/>
-          <a:p>
-            <a:pPr algn="ctr" indent="0" marL="0">
-              <a:buNone/>
-            </a:pPr>
-            <a:r>
-              <a:rPr lang="en-US" sz="2000" b="1" dirty="0">
-                <a:solidFill>
-                  <a:srgbClr val="F97316"/>
-                </a:solidFill>
-                <a:latin typeface="Malgun Gothic" pitchFamily="34" charset="0"/>
-                <a:ea typeface="Malgun Gothic" pitchFamily="34" charset="-122"/>
-                <a:cs typeface="Malgun Gothic" pitchFamily="34" charset="-120"/>
-              </a:rPr>
-              <a:t>19일</a:t>
-            </a:r>
-            <a:endParaRPr lang="en-US" sz="2000" dirty="0"/>
-          </a:p>
-        </p:txBody>
-      </p:sp>
-      <p:sp>
-        <p:nvSpPr>
-          <p:cNvPr id="9" name="Text 7"/>
-          <p:cNvSpPr txBox="1"/>
-          <p:nvPr/>
-        </p:nvSpPr>
-        <p:spPr>
-          <a:xfrm>
-            <a:off x="2075688" y="1481328"/>
-            <a:ext cx="1664208" cy="182880"/>
-          </a:xfrm>
-          <a:prstGeom prst="rect">
-            <a:avLst/>
-          </a:prstGeom>
-          <a:noFill/>
-          <a:ln/>
-        </p:spPr>
-        <p:txBody>
-          <a:bodyPr wrap="square" lIns="0" tIns="0" rIns="0" bIns="0" rtlCol="0" anchor="t"/>
-          <a:lstStyle/>
-          <a:p>
-            <a:pPr algn="ctr" indent="0" marL="0">
-              <a:buNone/>
-            </a:pPr>
-            <a:r>
-              <a:rPr lang="en-US" sz="750" dirty="0">
-                <a:solidFill>
-                  <a:srgbClr val="52525B"/>
-                </a:solidFill>
-                <a:latin typeface="Malgun Gothic" pitchFamily="34" charset="0"/>
-                <a:ea typeface="Malgun Gothic" pitchFamily="34" charset="-122"/>
-                <a:cs typeface="Malgun Gothic" pitchFamily="34" charset="-120"/>
-              </a:rPr>
-              <a:t>개발 기간</a:t>
-            </a:r>
-            <a:endParaRPr lang="en-US" sz="750" dirty="0"/>
-          </a:p>
-        </p:txBody>
-      </p:sp>
-      <p:sp>
-        <p:nvSpPr>
-          <p:cNvPr id="10" name="Text 8"/>
-          <p:cNvSpPr txBox="1"/>
-          <p:nvPr/>
-        </p:nvSpPr>
-        <p:spPr>
-          <a:xfrm>
-            <a:off x="3739896" y="1078992"/>
-            <a:ext cx="1664208" cy="384048"/>
-          </a:xfrm>
-          <a:prstGeom prst="rect">
-            <a:avLst/>
-          </a:prstGeom>
-          <a:noFill/>
-          <a:ln/>
-        </p:spPr>
-        <p:txBody>
-          <a:bodyPr wrap="square" lIns="0" tIns="0" rIns="0" bIns="0" rtlCol="0" anchor="ctr"/>
-          <a:lstStyle/>
-          <a:p>
-            <a:pPr algn="ctr" indent="0" marL="0">
-              <a:buNone/>
-            </a:pPr>
-            <a:r>
-              <a:rPr lang="en-US" sz="2000" b="1" dirty="0">
-                <a:solidFill>
-                  <a:srgbClr val="F97316"/>
-                </a:solidFill>
-                <a:latin typeface="Malgun Gothic" pitchFamily="34" charset="0"/>
-                <a:ea typeface="Malgun Gothic" pitchFamily="34" charset="-122"/>
-                <a:cs typeface="Malgun Gothic" pitchFamily="34" charset="-120"/>
-              </a:rPr>
-              <a:t>2.8만 줄</a:t>
-            </a:r>
-            <a:endParaRPr lang="en-US" sz="2000" dirty="0"/>
-          </a:p>
-        </p:txBody>
-      </p:sp>
-      <p:sp>
-        <p:nvSpPr>
-          <p:cNvPr id="11" name="Text 9"/>
-          <p:cNvSpPr txBox="1"/>
-          <p:nvPr/>
-        </p:nvSpPr>
-        <p:spPr>
-          <a:xfrm>
-            <a:off x="3739896" y="1481328"/>
-            <a:ext cx="1664208" cy="182880"/>
-          </a:xfrm>
-          <a:prstGeom prst="rect">
-            <a:avLst/>
-          </a:prstGeom>
-          <a:noFill/>
-          <a:ln/>
-        </p:spPr>
-        <p:txBody>
-          <a:bodyPr wrap="square" lIns="0" tIns="0" rIns="0" bIns="0" rtlCol="0" anchor="t"/>
-          <a:lstStyle/>
-          <a:p>
-            <a:pPr algn="ctr" indent="0" marL="0">
-              <a:buNone/>
-            </a:pPr>
-            <a:r>
-              <a:rPr lang="en-US" sz="750" dirty="0">
-                <a:solidFill>
-                  <a:srgbClr val="52525B"/>
-                </a:solidFill>
-                <a:latin typeface="Malgun Gothic" pitchFamily="34" charset="0"/>
-                <a:ea typeface="Malgun Gothic" pitchFamily="34" charset="-122"/>
-                <a:cs typeface="Malgun Gothic" pitchFamily="34" charset="-120"/>
-              </a:rPr>
-              <a:t>직접 작성한 코드</a:t>
-            </a:r>
-            <a:endParaRPr lang="en-US" sz="750" dirty="0"/>
-          </a:p>
-        </p:txBody>
-      </p:sp>
-      <p:sp>
-        <p:nvSpPr>
-          <p:cNvPr id="12" name="Text 10"/>
-          <p:cNvSpPr txBox="1"/>
-          <p:nvPr/>
-        </p:nvSpPr>
-        <p:spPr>
-          <a:xfrm>
-            <a:off x="5404104" y="1078992"/>
-            <a:ext cx="1664208" cy="384048"/>
-          </a:xfrm>
-          <a:prstGeom prst="rect">
-            <a:avLst/>
-          </a:prstGeom>
-          <a:noFill/>
-          <a:ln/>
-        </p:spPr>
-        <p:txBody>
-          <a:bodyPr wrap="square" lIns="0" tIns="0" rIns="0" bIns="0" rtlCol="0" anchor="ctr"/>
-          <a:lstStyle/>
-          <a:p>
-            <a:pPr algn="ctr" indent="0" marL="0">
-              <a:buNone/>
-            </a:pPr>
-            <a:r>
-              <a:rPr lang="en-US" sz="2000" b="1" dirty="0">
-                <a:solidFill>
-                  <a:srgbClr val="F97316"/>
-                </a:solidFill>
-                <a:latin typeface="Malgun Gothic" pitchFamily="34" charset="0"/>
-                <a:ea typeface="Malgun Gothic" pitchFamily="34" charset="-122"/>
-                <a:cs typeface="Malgun Gothic" pitchFamily="34" charset="-120"/>
-              </a:rPr>
-              <a:t>319개</a:t>
-            </a:r>
-            <a:endParaRPr lang="en-US" sz="2000" dirty="0"/>
-          </a:p>
-        </p:txBody>
-      </p:sp>
-      <p:sp>
-        <p:nvSpPr>
-          <p:cNvPr id="13" name="Text 11"/>
-          <p:cNvSpPr txBox="1"/>
-          <p:nvPr/>
-        </p:nvSpPr>
-        <p:spPr>
-          <a:xfrm>
-            <a:off x="5404104" y="1481328"/>
-            <a:ext cx="1664208" cy="182880"/>
-          </a:xfrm>
-          <a:prstGeom prst="rect">
-            <a:avLst/>
-          </a:prstGeom>
-          <a:noFill/>
-          <a:ln/>
-        </p:spPr>
-        <p:txBody>
-          <a:bodyPr wrap="square" lIns="0" tIns="0" rIns="0" bIns="0" rtlCol="0" anchor="t"/>
-          <a:lstStyle/>
-          <a:p>
-            <a:pPr algn="ctr" indent="0" marL="0">
-              <a:buNone/>
-            </a:pPr>
-            <a:r>
-              <a:rPr lang="en-US" sz="750" dirty="0">
-                <a:solidFill>
-                  <a:srgbClr val="52525B"/>
-                </a:solidFill>
-                <a:latin typeface="Malgun Gothic" pitchFamily="34" charset="0"/>
-                <a:ea typeface="Malgun Gothic" pitchFamily="34" charset="-122"/>
-                <a:cs typeface="Malgun Gothic" pitchFamily="34" charset="-120"/>
-              </a:rPr>
-              <a:t>자동화 테스트</a:t>
-            </a:r>
-            <a:endParaRPr lang="en-US" sz="750" dirty="0"/>
-          </a:p>
-        </p:txBody>
-      </p:sp>
-      <p:sp>
-        <p:nvSpPr>
-          <p:cNvPr id="14" name="Text 12"/>
-          <p:cNvSpPr txBox="1"/>
-          <p:nvPr/>
-        </p:nvSpPr>
-        <p:spPr>
-          <a:xfrm>
-            <a:off x="7068312" y="1078992"/>
-            <a:ext cx="1664208" cy="384048"/>
-          </a:xfrm>
-          <a:prstGeom prst="rect">
-            <a:avLst/>
-          </a:prstGeom>
-          <a:noFill/>
-          <a:ln/>
-        </p:spPr>
-        <p:txBody>
-          <a:bodyPr wrap="square" lIns="0" tIns="0" rIns="0" bIns="0" rtlCol="0" anchor="ctr"/>
-          <a:lstStyle/>
-          <a:p>
-            <a:pPr algn="ctr" indent="0" marL="0">
-              <a:buNone/>
-            </a:pPr>
-            <a:r>
-              <a:rPr lang="en-US" sz="2000" b="1" dirty="0">
-                <a:solidFill>
-                  <a:srgbClr val="F97316"/>
-                </a:solidFill>
-                <a:latin typeface="Malgun Gothic" pitchFamily="34" charset="0"/>
-                <a:ea typeface="Malgun Gothic" pitchFamily="34" charset="-122"/>
-                <a:cs typeface="Malgun Gothic" pitchFamily="34" charset="-120"/>
-              </a:rPr>
-              <a:t>51건</a:t>
-            </a:r>
-            <a:endParaRPr lang="en-US" sz="2000" dirty="0"/>
-          </a:p>
-        </p:txBody>
-      </p:sp>
-      <p:sp>
-        <p:nvSpPr>
-          <p:cNvPr id="15" name="Text 13"/>
-          <p:cNvSpPr txBox="1"/>
-          <p:nvPr/>
-        </p:nvSpPr>
-        <p:spPr>
-          <a:xfrm>
-            <a:off x="7068312" y="1481328"/>
-            <a:ext cx="1664208" cy="182880"/>
-          </a:xfrm>
-          <a:prstGeom prst="rect">
-            <a:avLst/>
-          </a:prstGeom>
-          <a:noFill/>
-          <a:ln/>
-        </p:spPr>
-        <p:txBody>
-          <a:bodyPr wrap="square" lIns="0" tIns="0" rIns="0" bIns="0" rtlCol="0" anchor="t"/>
-          <a:lstStyle/>
-          <a:p>
-            <a:pPr algn="ctr" indent="0" marL="0">
-              <a:buNone/>
-            </a:pPr>
-            <a:r>
-              <a:rPr lang="en-US" sz="750" dirty="0">
-                <a:solidFill>
-                  <a:srgbClr val="52525B"/>
-                </a:solidFill>
-                <a:latin typeface="Malgun Gothic" pitchFamily="34" charset="0"/>
-                <a:ea typeface="Malgun Gothic" pitchFamily="34" charset="-122"/>
-                <a:cs typeface="Malgun Gothic" pitchFamily="34" charset="-120"/>
-              </a:rPr>
-              <a:t>기록한 설계 결정</a:t>
-            </a:r>
-            <a:endParaRPr lang="en-US" sz="750" dirty="0"/>
-          </a:p>
-        </p:txBody>
-      </p:sp>
-      <p:sp>
-        <p:nvSpPr>
-          <p:cNvPr id="16" name="Text 14"/>
-          <p:cNvSpPr txBox="1"/>
-          <p:nvPr/>
-        </p:nvSpPr>
-        <p:spPr>
-          <a:xfrm>
-            <a:off x="548640" y="2057400"/>
-            <a:ext cx="731520" cy="365760"/>
-          </a:xfrm>
-          <a:prstGeom prst="rect">
-            <a:avLst/>
-          </a:prstGeom>
-          <a:noFill/>
-          <a:ln/>
-        </p:spPr>
-        <p:txBody>
-          <a:bodyPr wrap="square" lIns="0" tIns="0" rIns="0" bIns="0" rtlCol="0" anchor="ctr"/>
-          <a:lstStyle/>
-          <a:p>
-            <a:pPr indent="0" marL="0">
-              <a:buNone/>
-            </a:pPr>
-            <a:r>
-              <a:rPr lang="en-US" sz="1100" b="1" dirty="0">
-                <a:solidFill>
-                  <a:srgbClr val="F97316"/>
-                </a:solidFill>
-                <a:latin typeface="Malgun Gothic" pitchFamily="34" charset="0"/>
-                <a:ea typeface="Malgun Gothic" pitchFamily="34" charset="-122"/>
-                <a:cs typeface="Malgun Gothic" pitchFamily="34" charset="-120"/>
-              </a:rPr>
-              <a:t>성과</a:t>
-            </a:r>
-            <a:endParaRPr lang="en-US" sz="1100" dirty="0"/>
-          </a:p>
-        </p:txBody>
-      </p:sp>
-      <p:sp>
-        <p:nvSpPr>
-          <p:cNvPr id="17" name="Text 15"/>
-          <p:cNvSpPr txBox="1"/>
-          <p:nvPr/>
-        </p:nvSpPr>
-        <p:spPr>
-          <a:xfrm>
-            <a:off x="1371600" y="2057400"/>
-            <a:ext cx="7315200" cy="365760"/>
-          </a:xfrm>
-          <a:prstGeom prst="rect">
-            <a:avLst/>
-          </a:prstGeom>
-          <a:noFill/>
-          <a:ln/>
-        </p:spPr>
-        <p:txBody>
-          <a:bodyPr wrap="square" lIns="0" tIns="0" rIns="0" bIns="0" rtlCol="0" anchor="ctr"/>
-          <a:lstStyle/>
-          <a:p>
-            <a:pPr indent="0" marL="0">
-              <a:buNone/>
-            </a:pPr>
-            <a:r>
-              <a:rPr lang="en-US" sz="950" dirty="0">
-                <a:solidFill>
-                  <a:srgbClr val="18181B"/>
-                </a:solidFill>
-                <a:latin typeface="Malgun Gothic" pitchFamily="34" charset="0"/>
-                <a:ea typeface="Malgun Gothic" pitchFamily="34" charset="-122"/>
-                <a:cs typeface="Malgun Gothic" pitchFamily="34" charset="-120"/>
-              </a:rPr>
-              <a:t>등기부 판독부터 위험 신호, 변호사 상담, 결제, 관리자 운영까지 웹·앱으로 이어지는 서비스를 혼자 완성</a:t>
-            </a:r>
-            <a:endParaRPr lang="en-US" sz="950" dirty="0"/>
-          </a:p>
-        </p:txBody>
-      </p:sp>
-      <p:sp>
-        <p:nvSpPr>
-          <p:cNvPr id="18" name="Shape 16"/>
-          <p:cNvSpPr/>
-          <p:nvPr/>
-        </p:nvSpPr>
-        <p:spPr>
-          <a:xfrm>
-            <a:off x="548640" y="2514600"/>
-            <a:ext cx="8138160" cy="0"/>
-          </a:xfrm>
-          <a:prstGeom prst="line">
-            <a:avLst/>
-          </a:prstGeom>
-          <a:noFill/>
-          <a:ln w="9525">
-            <a:solidFill>
-              <a:srgbClr val="E4E4E7"/>
-            </a:solidFill>
-            <a:prstDash val="solid"/>
-          </a:ln>
-        </p:spPr>
-      </p:sp>
-      <p:sp>
-        <p:nvSpPr>
-          <p:cNvPr id="19" name="Text 17"/>
-          <p:cNvSpPr txBox="1"/>
-          <p:nvPr/>
-        </p:nvSpPr>
-        <p:spPr>
-          <a:xfrm>
-            <a:off x="548640" y="2606040"/>
-            <a:ext cx="731520" cy="365760"/>
-          </a:xfrm>
-          <a:prstGeom prst="rect">
-            <a:avLst/>
-          </a:prstGeom>
-          <a:noFill/>
-          <a:ln/>
-        </p:spPr>
-        <p:txBody>
-          <a:bodyPr wrap="square" lIns="0" tIns="0" rIns="0" bIns="0" rtlCol="0" anchor="ctr"/>
-          <a:lstStyle/>
-          <a:p>
-            <a:pPr indent="0" marL="0">
-              <a:buNone/>
-            </a:pPr>
-            <a:r>
-              <a:rPr lang="en-US" sz="1100" b="1" dirty="0">
-                <a:solidFill>
-                  <a:srgbClr val="F97316"/>
-                </a:solidFill>
-                <a:latin typeface="Malgun Gothic" pitchFamily="34" charset="0"/>
-                <a:ea typeface="Malgun Gothic" pitchFamily="34" charset="-122"/>
-                <a:cs typeface="Malgun Gothic" pitchFamily="34" charset="-120"/>
-              </a:rPr>
-              <a:t>기술</a:t>
-            </a:r>
-            <a:endParaRPr lang="en-US" sz="1100" dirty="0"/>
-          </a:p>
-        </p:txBody>
-      </p:sp>
-      <p:sp>
-        <p:nvSpPr>
-          <p:cNvPr id="20" name="Text 18"/>
-          <p:cNvSpPr txBox="1"/>
-          <p:nvPr/>
-        </p:nvSpPr>
-        <p:spPr>
-          <a:xfrm>
-            <a:off x="1371600" y="2606040"/>
-            <a:ext cx="7315200" cy="365760"/>
-          </a:xfrm>
-          <a:prstGeom prst="rect">
-            <a:avLst/>
-          </a:prstGeom>
-          <a:noFill/>
-          <a:ln/>
-        </p:spPr>
-        <p:txBody>
-          <a:bodyPr wrap="square" lIns="0" tIns="0" rIns="0" bIns="0" rtlCol="0" anchor="ctr"/>
-          <a:lstStyle/>
-          <a:p>
-            <a:pPr indent="0" marL="0">
-              <a:buNone/>
-            </a:pPr>
-            <a:r>
-              <a:rPr lang="en-US" sz="950" dirty="0">
-                <a:solidFill>
-                  <a:srgbClr val="18181B"/>
-                </a:solidFill>
-                <a:latin typeface="Malgun Gothic" pitchFamily="34" charset="0"/>
-                <a:ea typeface="Malgun Gothic" pitchFamily="34" charset="-122"/>
-                <a:cs typeface="Malgun Gothic" pitchFamily="34" charset="-120"/>
-              </a:rPr>
-              <a:t>규칙 엔진(15개) · 공공 API 5종 연동 · WebSocket · PKCE · 토스 결제를 직접 설계하고 테스트 319개로 검증</a:t>
-            </a:r>
-            <a:endParaRPr lang="en-US" sz="950" dirty="0"/>
-          </a:p>
-        </p:txBody>
-      </p:sp>
-      <p:sp>
-        <p:nvSpPr>
-          <p:cNvPr id="21" name="Shape 19"/>
-          <p:cNvSpPr/>
-          <p:nvPr/>
-        </p:nvSpPr>
-        <p:spPr>
-          <a:xfrm>
-            <a:off x="548640" y="3063240"/>
-            <a:ext cx="8138160" cy="0"/>
-          </a:xfrm>
-          <a:prstGeom prst="line">
-            <a:avLst/>
-          </a:prstGeom>
-          <a:noFill/>
-          <a:ln w="9525">
-            <a:solidFill>
-              <a:srgbClr val="E4E4E7"/>
-            </a:solidFill>
-            <a:prstDash val="solid"/>
-          </a:ln>
-        </p:spPr>
-      </p:sp>
-      <p:sp>
-        <p:nvSpPr>
-          <p:cNvPr id="22" name="Text 20"/>
-          <p:cNvSpPr txBox="1"/>
-          <p:nvPr/>
-        </p:nvSpPr>
-        <p:spPr>
-          <a:xfrm>
-            <a:off x="548640" y="3154680"/>
-            <a:ext cx="731520" cy="365760"/>
-          </a:xfrm>
-          <a:prstGeom prst="rect">
-            <a:avLst/>
-          </a:prstGeom>
-          <a:noFill/>
-          <a:ln/>
-        </p:spPr>
-        <p:txBody>
-          <a:bodyPr wrap="square" lIns="0" tIns="0" rIns="0" bIns="0" rtlCol="0" anchor="ctr"/>
-          <a:lstStyle/>
-          <a:p>
-            <a:pPr indent="0" marL="0">
-              <a:buNone/>
-            </a:pPr>
-            <a:r>
-              <a:rPr lang="en-US" sz="1100" b="1" dirty="0">
-                <a:solidFill>
-                  <a:srgbClr val="F97316"/>
-                </a:solidFill>
-                <a:latin typeface="Malgun Gothic" pitchFamily="34" charset="0"/>
-                <a:ea typeface="Malgun Gothic" pitchFamily="34" charset="-122"/>
-                <a:cs typeface="Malgun Gothic" pitchFamily="34" charset="-120"/>
-              </a:rPr>
-              <a:t>원칙</a:t>
-            </a:r>
-            <a:endParaRPr lang="en-US" sz="1100" dirty="0"/>
-          </a:p>
-        </p:txBody>
-      </p:sp>
-      <p:sp>
-        <p:nvSpPr>
-          <p:cNvPr id="23" name="Text 21"/>
-          <p:cNvSpPr txBox="1"/>
-          <p:nvPr/>
-        </p:nvSpPr>
-        <p:spPr>
-          <a:xfrm>
-            <a:off x="1371600" y="3154680"/>
-            <a:ext cx="7315200" cy="365760"/>
-          </a:xfrm>
-          <a:prstGeom prst="rect">
-            <a:avLst/>
-          </a:prstGeom>
-          <a:noFill/>
-          <a:ln/>
-        </p:spPr>
-        <p:txBody>
-          <a:bodyPr wrap="square" lIns="0" tIns="0" rIns="0" bIns="0" rtlCol="0" anchor="ctr"/>
-          <a:lstStyle/>
-          <a:p>
-            <a:pPr indent="0" marL="0">
-              <a:buNone/>
-            </a:pPr>
-            <a:r>
-              <a:rPr lang="en-US" sz="950" dirty="0">
-                <a:solidFill>
-                  <a:srgbClr val="18181B"/>
-                </a:solidFill>
-                <a:latin typeface="Malgun Gothic" pitchFamily="34" charset="0"/>
-                <a:ea typeface="Malgun Gothic" pitchFamily="34" charset="-122"/>
-                <a:cs typeface="Malgun Gothic" pitchFamily="34" charset="-120"/>
-              </a:rPr>
-              <a:t>근거 없이 단정하지 않기 — 모든 신호에 출처를 달고, 확인할 수 없는 집은 '안전' 판정을 보류</a:t>
-            </a:r>
-            <a:endParaRPr lang="en-US" sz="950" dirty="0"/>
-          </a:p>
-        </p:txBody>
-      </p:sp>
-      <p:sp>
-        <p:nvSpPr>
-          <p:cNvPr id="24" name="Shape 22"/>
-          <p:cNvSpPr/>
-          <p:nvPr/>
-        </p:nvSpPr>
-        <p:spPr>
-          <a:xfrm>
-            <a:off x="548640" y="3611880"/>
-            <a:ext cx="8138160" cy="0"/>
-          </a:xfrm>
-          <a:prstGeom prst="line">
-            <a:avLst/>
-          </a:prstGeom>
-          <a:noFill/>
-          <a:ln w="9525">
-            <a:solidFill>
-              <a:srgbClr val="E4E4E7"/>
-            </a:solidFill>
-            <a:prstDash val="solid"/>
-          </a:ln>
-        </p:spPr>
-      </p:sp>
-      <p:sp>
-        <p:nvSpPr>
-          <p:cNvPr id="25" name="Text 23"/>
-          <p:cNvSpPr txBox="1"/>
-          <p:nvPr/>
-        </p:nvSpPr>
-        <p:spPr>
-          <a:xfrm>
-            <a:off x="548640" y="3703320"/>
-            <a:ext cx="731520" cy="365760"/>
-          </a:xfrm>
-          <a:prstGeom prst="rect">
-            <a:avLst/>
-          </a:prstGeom>
-          <a:noFill/>
-          <a:ln/>
-        </p:spPr>
-        <p:txBody>
-          <a:bodyPr wrap="square" lIns="0" tIns="0" rIns="0" bIns="0" rtlCol="0" anchor="ctr"/>
-          <a:lstStyle/>
-          <a:p>
-            <a:pPr indent="0" marL="0">
-              <a:buNone/>
-            </a:pPr>
-            <a:r>
-              <a:rPr lang="en-US" sz="1100" b="1" dirty="0">
-                <a:solidFill>
-                  <a:srgbClr val="F97316"/>
-                </a:solidFill>
-                <a:latin typeface="Malgun Gothic" pitchFamily="34" charset="0"/>
-                <a:ea typeface="Malgun Gothic" pitchFamily="34" charset="-122"/>
-                <a:cs typeface="Malgun Gothic" pitchFamily="34" charset="-120"/>
-              </a:rPr>
-              <a:t>방식</a:t>
-            </a:r>
-            <a:endParaRPr lang="en-US" sz="1100" dirty="0"/>
-          </a:p>
-        </p:txBody>
-      </p:sp>
-      <p:sp>
-        <p:nvSpPr>
-          <p:cNvPr id="26" name="Text 24"/>
-          <p:cNvSpPr txBox="1"/>
-          <p:nvPr/>
-        </p:nvSpPr>
-        <p:spPr>
-          <a:xfrm>
-            <a:off x="1371600" y="3703320"/>
-            <a:ext cx="7315200" cy="365760"/>
-          </a:xfrm>
-          <a:prstGeom prst="rect">
-            <a:avLst/>
-          </a:prstGeom>
-          <a:noFill/>
-          <a:ln/>
-        </p:spPr>
-        <p:txBody>
-          <a:bodyPr wrap="square" lIns="0" tIns="0" rIns="0" bIns="0" rtlCol="0" anchor="ctr"/>
-          <a:lstStyle/>
-          <a:p>
-            <a:pPr indent="0" marL="0">
-              <a:buNone/>
-            </a:pPr>
-            <a:r>
-              <a:rPr lang="en-US" sz="950" dirty="0">
-                <a:solidFill>
-                  <a:srgbClr val="18181B"/>
-                </a:solidFill>
-                <a:latin typeface="Malgun Gothic" pitchFamily="34" charset="0"/>
-                <a:ea typeface="Malgun Gothic" pitchFamily="34" charset="-122"/>
-                <a:cs typeface="Malgun Gothic" pitchFamily="34" charset="-120"/>
-              </a:rPr>
-              <a:t>AI 도구(Claude Code)로 구현 속도를 높이고, 설계 결정 · 원인 분석 · 검증은 직접 — 결정 51건을 문서로 남김</a:t>
-            </a:r>
-            <a:endParaRPr lang="en-US" sz="950" dirty="0"/>
-          </a:p>
-        </p:txBody>
-      </p:sp>
-      <p:sp>
-        <p:nvSpPr>
-          <p:cNvPr id="27" name="Shape 25"/>
-          <p:cNvSpPr/>
-          <p:nvPr/>
-        </p:nvSpPr>
-        <p:spPr>
-          <a:xfrm>
-            <a:off x="548640" y="4160520"/>
-            <a:ext cx="8138160" cy="0"/>
-          </a:xfrm>
-          <a:prstGeom prst="line">
-            <a:avLst/>
-          </a:prstGeom>
-          <a:noFill/>
-          <a:ln w="9525">
-            <a:solidFill>
-              <a:srgbClr val="E4E4E7"/>
-            </a:solidFill>
-            <a:prstDash val="solid"/>
-          </a:ln>
-        </p:spPr>
+            <a:pPr indent="0" marL="0">
+              <a:buNone/>
+            </a:pPr>
+            <a:r>
+              <a:rPr lang="en-US" sz="650" b="1" spc="100" kern="0" dirty="0">
+                <a:solidFill>
+                  <a:srgbClr val="5A5A60"/>
+                </a:solidFill>
+                <a:latin typeface="Malgun Gothic" pitchFamily="34" charset="0"/>
+                <a:ea typeface="Malgun Gothic" pitchFamily="34" charset="-122"/>
+                <a:cs typeface="Malgun Gothic" pitchFamily="34" charset="-120"/>
+              </a:rPr>
+              <a:t>RETROSPECTIVE</a:t>
+            </a:r>
+            <a:endParaRPr lang="en-US" sz="650" dirty="0"/>
+          </a:p>
+        </p:txBody>
       </p:sp>
       <p:sp>
         <p:nvSpPr>
@@ -32457,7 +32290,7 @@
             <a:lvl1pPr>
               <a:defRPr sz="700">
                 <a:solidFill>
-                  <a:srgbClr val="8A8A93"/>
+                  <a:srgbClr val="5A5A60"/>
                 </a:solidFill>
                 <a:latin typeface="Malgun Gothic"/>
                 <a:ea typeface="Malgun Gothic"/>
@@ -32572,7 +32405,7 @@
                 <a:ea typeface="Malgun Gothic" pitchFamily="34" charset="-122"/>
                 <a:cs typeface="Malgun Gothic" pitchFamily="34" charset="-120"/>
               </a:rPr>
-              <a:t>배포 준비 현황</a:t>
+              <a:t>프로젝트 평가</a:t>
             </a:r>
             <a:endParaRPr lang="en-US" sz="2100" dirty="0"/>
           </a:p>
@@ -32580,123 +32413,57 @@
       </p:sp>
       <p:sp>
         <p:nvSpPr>
-          <p:cNvPr id="4" name="Shape 2"/>
+          <p:cNvPr id="4" name="Text 2"/>
+          <p:cNvSpPr txBox="1"/>
+          <p:nvPr/>
+        </p:nvSpPr>
+        <p:spPr>
+          <a:xfrm>
+            <a:off x="411480" y="4828032"/>
+            <a:ext cx="2743200" cy="182880"/>
+          </a:xfrm>
+          <a:prstGeom prst="rect">
+            <a:avLst/>
+          </a:prstGeom>
+          <a:noFill/>
+          <a:ln/>
+        </p:spPr>
+        <p:txBody>
+          <a:bodyPr wrap="square" lIns="0" tIns="0" rIns="0" bIns="0" rtlCol="0" anchor="t"/>
+          <a:lstStyle/>
+          <a:p>
+            <a:pPr indent="0" marL="0">
+              <a:buNone/>
+            </a:pPr>
+            <a:r>
+              <a:rPr lang="en-US" sz="650" b="1" spc="100" kern="0" dirty="0">
+                <a:solidFill>
+                  <a:srgbClr val="8A8A93"/>
+                </a:solidFill>
+                <a:latin typeface="Malgun Gothic" pitchFamily="34" charset="0"/>
+                <a:ea typeface="Malgun Gothic" pitchFamily="34" charset="-122"/>
+                <a:cs typeface="Malgun Gothic" pitchFamily="34" charset="-120"/>
+              </a:rPr>
+              <a:t>RETROSPECTIVE</a:t>
+            </a:r>
+            <a:endParaRPr lang="en-US" sz="650" dirty="0"/>
+          </a:p>
+        </p:txBody>
+      </p:sp>
+      <p:sp>
+        <p:nvSpPr>
+          <p:cNvPr id="5" name="Shape 3"/>
           <p:cNvSpPr/>
           <p:nvPr/>
         </p:nvSpPr>
         <p:spPr>
           <a:xfrm>
-            <a:off x="7447788" y="329184"/>
-            <a:ext cx="1284732" cy="219456"/>
+            <a:off x="411480" y="1005840"/>
+            <a:ext cx="8321040" cy="822960"/>
           </a:xfrm>
           <a:prstGeom prst="roundRect">
             <a:avLst>
-              <a:gd name="adj" fmla="val 50000"/>
-            </a:avLst>
-          </a:prstGeom>
-          <a:solidFill>
-            <a:srgbClr val="FFEDD5"/>
-          </a:solidFill>
-          <a:ln w="6350">
-            <a:solidFill>
-              <a:srgbClr val="FFEDD5"/>
-            </a:solidFill>
-            <a:prstDash val="solid"/>
-          </a:ln>
-        </p:spPr>
-      </p:sp>
-      <p:sp>
-        <p:nvSpPr>
-          <p:cNvPr id="5" name="Text 3"/>
-          <p:cNvSpPr txBox="1"/>
-          <p:nvPr/>
-        </p:nvSpPr>
-        <p:spPr>
-          <a:xfrm>
-            <a:off x="7447788" y="329184"/>
-            <a:ext cx="1284732" cy="219456"/>
-          </a:xfrm>
-          <a:prstGeom prst="rect">
-            <a:avLst/>
-          </a:prstGeom>
-          <a:noFill/>
-          <a:ln/>
-        </p:spPr>
-        <p:txBody>
-          <a:bodyPr wrap="square" lIns="0" tIns="0" rIns="0" bIns="0" rtlCol="0" anchor="ctr"/>
-          <a:lstStyle/>
-          <a:p>
-            <a:pPr algn="ctr" indent="0" marL="0">
-              <a:buNone/>
-            </a:pPr>
-            <a:r>
-              <a:rPr lang="en-US" sz="700" b="1" dirty="0">
-                <a:solidFill>
-                  <a:srgbClr val="EA580C"/>
-                </a:solidFill>
-                <a:latin typeface="Malgun Gothic" pitchFamily="34" charset="0"/>
-                <a:ea typeface="Malgun Gothic" pitchFamily="34" charset="-122"/>
-                <a:cs typeface="Malgun Gothic" pitchFamily="34" charset="-120"/>
-              </a:rPr>
-              <a:t>개발 완료 · 배포 직전</a:t>
-            </a:r>
-            <a:endParaRPr lang="en-US" sz="700" dirty="0"/>
-          </a:p>
-        </p:txBody>
-      </p:sp>
-      <p:sp>
-        <p:nvSpPr>
-          <p:cNvPr id="6" name="Text 4"/>
-          <p:cNvSpPr txBox="1"/>
-          <p:nvPr/>
-        </p:nvSpPr>
-        <p:spPr>
-          <a:xfrm>
-            <a:off x="411480" y="4828032"/>
-            <a:ext cx="2743200" cy="182880"/>
-          </a:xfrm>
-          <a:prstGeom prst="rect">
-            <a:avLst/>
-          </a:prstGeom>
-          <a:noFill/>
-          <a:ln/>
-        </p:spPr>
-        <p:txBody>
-          <a:bodyPr wrap="square" lIns="0" tIns="0" rIns="0" bIns="0" rtlCol="0" anchor="t"/>
-          <a:lstStyle/>
-          <a:p>
-            <a:pPr indent="0" marL="0">
-              <a:buNone/>
-            </a:pPr>
-            <a:r>
-              <a:rPr lang="en-US" sz="650" b="1" spc="100" kern="0" dirty="0">
-                <a:solidFill>
-                  <a:srgbClr val="8A8A93"/>
-                </a:solidFill>
-                <a:latin typeface="Malgun Gothic" pitchFamily="34" charset="0"/>
-                <a:ea typeface="Malgun Gothic" pitchFamily="34" charset="-122"/>
-                <a:cs typeface="Malgun Gothic" pitchFamily="34" charset="-120"/>
-              </a:rPr>
-              <a:t>RETROSPECTIVE</a:t>
-            </a:r>
-            <a:endParaRPr lang="en-US" sz="650" dirty="0"/>
-          </a:p>
-        </p:txBody>
-      </p:sp>
-      <p:sp>
-        <p:nvSpPr>
-          <p:cNvPr id="7" name="Shape 5"/>
-          <p:cNvSpPr/>
-          <p:nvPr/>
-        </p:nvSpPr>
-        <p:spPr>
-          <a:xfrm>
-            <a:off x="411480" y="1005840"/>
-            <a:ext cx="4069080" cy="3291840"/>
-          </a:xfrm>
-          <a:prstGeom prst="roundRect">
-            <a:avLst>
-              <a:gd name="adj" fmla="val 1667"/>
+              <a:gd name="adj" fmla="val 6667"/>
             </a:avLst>
           </a:prstGeom>
           <a:solidFill>
@@ -32710,40 +32477,55 @@
           </a:ln>
         </p:spPr>
       </p:sp>
-      <p:pic>
-        <p:nvPicPr>
-          <p:cNvPr id="8" name="Image 0" descr="preencoded.png">    </p:cNvPr>
-          <p:cNvPicPr>
-            <a:picLocks noChangeAspect="1"/>
-          </p:cNvPicPr>
-          <p:nvPr/>
-        </p:nvPicPr>
-        <p:blipFill>
-          <a:blip r:embed="rId1"/>
-          <a:stretch>
-            <a:fillRect/>
-          </a:stretch>
-        </p:blipFill>
-        <p:spPr>
-          <a:xfrm>
-            <a:off x="594360" y="1170432"/>
-            <a:ext cx="256032" cy="256032"/>
-          </a:xfrm>
-          <a:prstGeom prst="rect">
-            <a:avLst/>
-          </a:prstGeom>
-        </p:spPr>
-      </p:pic>
-      <p:sp>
-        <p:nvSpPr>
-          <p:cNvPr id="9" name="Text 6"/>
-          <p:cNvSpPr txBox="1"/>
-          <p:nvPr/>
-        </p:nvSpPr>
-        <p:spPr>
-          <a:xfrm>
-            <a:off x="941832" y="1170432"/>
-            <a:ext cx="2743200" cy="256032"/>
+      <p:sp>
+        <p:nvSpPr>
+          <p:cNvPr id="6" name="Text 4"/>
+          <p:cNvSpPr txBox="1"/>
+          <p:nvPr/>
+        </p:nvSpPr>
+        <p:spPr>
+          <a:xfrm>
+            <a:off x="411480" y="1078992"/>
+            <a:ext cx="1664208" cy="384048"/>
+          </a:xfrm>
+          <a:prstGeom prst="rect">
+            <a:avLst/>
+          </a:prstGeom>
+          <a:noFill/>
+          <a:ln/>
+        </p:spPr>
+        <p:txBody>
+          <a:bodyPr wrap="square" lIns="0" tIns="0" rIns="0" bIns="0" rtlCol="0" anchor="ctr"/>
+          <a:lstStyle/>
+          <a:p>
+            <a:pPr algn="ctr" indent="0" marL="0">
+              <a:buNone/>
+            </a:pPr>
+            <a:r>
+              <a:rPr lang="en-US" sz="2000" b="1" dirty="0">
+                <a:solidFill>
+                  <a:srgbClr val="F97316"/>
+                </a:solidFill>
+                <a:latin typeface="Malgun Gothic" pitchFamily="34" charset="0"/>
+                <a:ea typeface="Malgun Gothic" pitchFamily="34" charset="-122"/>
+                <a:cs typeface="Malgun Gothic" pitchFamily="34" charset="-120"/>
+              </a:rPr>
+              <a:t>1명</a:t>
+            </a:r>
+            <a:endParaRPr lang="en-US" sz="2000" dirty="0"/>
+          </a:p>
+        </p:txBody>
+      </p:sp>
+      <p:sp>
+        <p:nvSpPr>
+          <p:cNvPr id="7" name="Text 5"/>
+          <p:cNvSpPr txBox="1"/>
+          <p:nvPr/>
+        </p:nvSpPr>
+        <p:spPr>
+          <a:xfrm>
+            <a:off x="411480" y="1481328"/>
+            <a:ext cx="1664208" cy="182880"/>
           </a:xfrm>
           <a:prstGeom prst="rect">
             <a:avLst/>
@@ -32755,484 +32537,456 @@
           <a:bodyPr wrap="square" lIns="0" tIns="0" rIns="0" bIns="0" rtlCol="0" anchor="t"/>
           <a:lstStyle/>
           <a:p>
+            <a:pPr algn="ctr" indent="0" marL="0">
+              <a:buNone/>
+            </a:pPr>
+            <a:r>
+              <a:rPr lang="en-US" sz="750" dirty="0">
+                <a:solidFill>
+                  <a:srgbClr val="52525B"/>
+                </a:solidFill>
+                <a:latin typeface="Malgun Gothic" pitchFamily="34" charset="0"/>
+                <a:ea typeface="Malgun Gothic" pitchFamily="34" charset="-122"/>
+                <a:cs typeface="Malgun Gothic" pitchFamily="34" charset="-120"/>
+              </a:rPr>
+              <a:t>풀스택 개발</a:t>
+            </a:r>
+            <a:endParaRPr lang="en-US" sz="750" dirty="0"/>
+          </a:p>
+        </p:txBody>
+      </p:sp>
+      <p:sp>
+        <p:nvSpPr>
+          <p:cNvPr id="8" name="Text 6"/>
+          <p:cNvSpPr txBox="1"/>
+          <p:nvPr/>
+        </p:nvSpPr>
+        <p:spPr>
+          <a:xfrm>
+            <a:off x="2075688" y="1078992"/>
+            <a:ext cx="1664208" cy="384048"/>
+          </a:xfrm>
+          <a:prstGeom prst="rect">
+            <a:avLst/>
+          </a:prstGeom>
+          <a:noFill/>
+          <a:ln/>
+        </p:spPr>
+        <p:txBody>
+          <a:bodyPr wrap="square" lIns="0" tIns="0" rIns="0" bIns="0" rtlCol="0" anchor="ctr"/>
+          <a:lstStyle/>
+          <a:p>
+            <a:pPr algn="ctr" indent="0" marL="0">
+              <a:buNone/>
+            </a:pPr>
+            <a:r>
+              <a:rPr lang="en-US" sz="2000" b="1" dirty="0">
+                <a:solidFill>
+                  <a:srgbClr val="F97316"/>
+                </a:solidFill>
+                <a:latin typeface="Malgun Gothic" pitchFamily="34" charset="0"/>
+                <a:ea typeface="Malgun Gothic" pitchFamily="34" charset="-122"/>
+                <a:cs typeface="Malgun Gothic" pitchFamily="34" charset="-120"/>
+              </a:rPr>
+              <a:t>19일</a:t>
+            </a:r>
+            <a:endParaRPr lang="en-US" sz="2000" dirty="0"/>
+          </a:p>
+        </p:txBody>
+      </p:sp>
+      <p:sp>
+        <p:nvSpPr>
+          <p:cNvPr id="9" name="Text 7"/>
+          <p:cNvSpPr txBox="1"/>
+          <p:nvPr/>
+        </p:nvSpPr>
+        <p:spPr>
+          <a:xfrm>
+            <a:off x="2075688" y="1481328"/>
+            <a:ext cx="1664208" cy="182880"/>
+          </a:xfrm>
+          <a:prstGeom prst="rect">
+            <a:avLst/>
+          </a:prstGeom>
+          <a:noFill/>
+          <a:ln/>
+        </p:spPr>
+        <p:txBody>
+          <a:bodyPr wrap="square" lIns="0" tIns="0" rIns="0" bIns="0" rtlCol="0" anchor="t"/>
+          <a:lstStyle/>
+          <a:p>
+            <a:pPr algn="ctr" indent="0" marL="0">
+              <a:buNone/>
+            </a:pPr>
+            <a:r>
+              <a:rPr lang="en-US" sz="750" dirty="0">
+                <a:solidFill>
+                  <a:srgbClr val="52525B"/>
+                </a:solidFill>
+                <a:latin typeface="Malgun Gothic" pitchFamily="34" charset="0"/>
+                <a:ea typeface="Malgun Gothic" pitchFamily="34" charset="-122"/>
+                <a:cs typeface="Malgun Gothic" pitchFamily="34" charset="-120"/>
+              </a:rPr>
+              <a:t>개발 기간</a:t>
+            </a:r>
+            <a:endParaRPr lang="en-US" sz="750" dirty="0"/>
+          </a:p>
+        </p:txBody>
+      </p:sp>
+      <p:sp>
+        <p:nvSpPr>
+          <p:cNvPr id="10" name="Text 8"/>
+          <p:cNvSpPr txBox="1"/>
+          <p:nvPr/>
+        </p:nvSpPr>
+        <p:spPr>
+          <a:xfrm>
+            <a:off x="3739896" y="1078992"/>
+            <a:ext cx="1664208" cy="384048"/>
+          </a:xfrm>
+          <a:prstGeom prst="rect">
+            <a:avLst/>
+          </a:prstGeom>
+          <a:noFill/>
+          <a:ln/>
+        </p:spPr>
+        <p:txBody>
+          <a:bodyPr wrap="square" lIns="0" tIns="0" rIns="0" bIns="0" rtlCol="0" anchor="ctr"/>
+          <a:lstStyle/>
+          <a:p>
+            <a:pPr algn="ctr" indent="0" marL="0">
+              <a:buNone/>
+            </a:pPr>
+            <a:r>
+              <a:rPr lang="en-US" sz="2000" b="1" dirty="0">
+                <a:solidFill>
+                  <a:srgbClr val="F97316"/>
+                </a:solidFill>
+                <a:latin typeface="Malgun Gothic" pitchFamily="34" charset="0"/>
+                <a:ea typeface="Malgun Gothic" pitchFamily="34" charset="-122"/>
+                <a:cs typeface="Malgun Gothic" pitchFamily="34" charset="-120"/>
+              </a:rPr>
+              <a:t>2.8만 줄</a:t>
+            </a:r>
+            <a:endParaRPr lang="en-US" sz="2000" dirty="0"/>
+          </a:p>
+        </p:txBody>
+      </p:sp>
+      <p:sp>
+        <p:nvSpPr>
+          <p:cNvPr id="11" name="Text 9"/>
+          <p:cNvSpPr txBox="1"/>
+          <p:nvPr/>
+        </p:nvSpPr>
+        <p:spPr>
+          <a:xfrm>
+            <a:off x="3739896" y="1481328"/>
+            <a:ext cx="1664208" cy="182880"/>
+          </a:xfrm>
+          <a:prstGeom prst="rect">
+            <a:avLst/>
+          </a:prstGeom>
+          <a:noFill/>
+          <a:ln/>
+        </p:spPr>
+        <p:txBody>
+          <a:bodyPr wrap="square" lIns="0" tIns="0" rIns="0" bIns="0" rtlCol="0" anchor="t"/>
+          <a:lstStyle/>
+          <a:p>
+            <a:pPr algn="ctr" indent="0" marL="0">
+              <a:buNone/>
+            </a:pPr>
+            <a:r>
+              <a:rPr lang="en-US" sz="750" dirty="0">
+                <a:solidFill>
+                  <a:srgbClr val="52525B"/>
+                </a:solidFill>
+                <a:latin typeface="Malgun Gothic" pitchFamily="34" charset="0"/>
+                <a:ea typeface="Malgun Gothic" pitchFamily="34" charset="-122"/>
+                <a:cs typeface="Malgun Gothic" pitchFamily="34" charset="-120"/>
+              </a:rPr>
+              <a:t>직접 작성한 코드</a:t>
+            </a:r>
+            <a:endParaRPr lang="en-US" sz="750" dirty="0"/>
+          </a:p>
+        </p:txBody>
+      </p:sp>
+      <p:sp>
+        <p:nvSpPr>
+          <p:cNvPr id="12" name="Text 10"/>
+          <p:cNvSpPr txBox="1"/>
+          <p:nvPr/>
+        </p:nvSpPr>
+        <p:spPr>
+          <a:xfrm>
+            <a:off x="5404104" y="1078992"/>
+            <a:ext cx="1664208" cy="384048"/>
+          </a:xfrm>
+          <a:prstGeom prst="rect">
+            <a:avLst/>
+          </a:prstGeom>
+          <a:noFill/>
+          <a:ln/>
+        </p:spPr>
+        <p:txBody>
+          <a:bodyPr wrap="square" lIns="0" tIns="0" rIns="0" bIns="0" rtlCol="0" anchor="ctr"/>
+          <a:lstStyle/>
+          <a:p>
+            <a:pPr algn="ctr" indent="0" marL="0">
+              <a:buNone/>
+            </a:pPr>
+            <a:r>
+              <a:rPr lang="en-US" sz="2000" b="1" dirty="0">
+                <a:solidFill>
+                  <a:srgbClr val="F97316"/>
+                </a:solidFill>
+                <a:latin typeface="Malgun Gothic" pitchFamily="34" charset="0"/>
+                <a:ea typeface="Malgun Gothic" pitchFamily="34" charset="-122"/>
+                <a:cs typeface="Malgun Gothic" pitchFamily="34" charset="-120"/>
+              </a:rPr>
+              <a:t>328개</a:t>
+            </a:r>
+            <a:endParaRPr lang="en-US" sz="2000" dirty="0"/>
+          </a:p>
+        </p:txBody>
+      </p:sp>
+      <p:sp>
+        <p:nvSpPr>
+          <p:cNvPr id="13" name="Text 11"/>
+          <p:cNvSpPr txBox="1"/>
+          <p:nvPr/>
+        </p:nvSpPr>
+        <p:spPr>
+          <a:xfrm>
+            <a:off x="5404104" y="1481328"/>
+            <a:ext cx="1664208" cy="182880"/>
+          </a:xfrm>
+          <a:prstGeom prst="rect">
+            <a:avLst/>
+          </a:prstGeom>
+          <a:noFill/>
+          <a:ln/>
+        </p:spPr>
+        <p:txBody>
+          <a:bodyPr wrap="square" lIns="0" tIns="0" rIns="0" bIns="0" rtlCol="0" anchor="t"/>
+          <a:lstStyle/>
+          <a:p>
+            <a:pPr algn="ctr" indent="0" marL="0">
+              <a:buNone/>
+            </a:pPr>
+            <a:r>
+              <a:rPr lang="en-US" sz="750" dirty="0">
+                <a:solidFill>
+                  <a:srgbClr val="52525B"/>
+                </a:solidFill>
+                <a:latin typeface="Malgun Gothic" pitchFamily="34" charset="0"/>
+                <a:ea typeface="Malgun Gothic" pitchFamily="34" charset="-122"/>
+                <a:cs typeface="Malgun Gothic" pitchFamily="34" charset="-120"/>
+              </a:rPr>
+              <a:t>자동화 테스트</a:t>
+            </a:r>
+            <a:endParaRPr lang="en-US" sz="750" dirty="0"/>
+          </a:p>
+        </p:txBody>
+      </p:sp>
+      <p:sp>
+        <p:nvSpPr>
+          <p:cNvPr id="14" name="Text 12"/>
+          <p:cNvSpPr txBox="1"/>
+          <p:nvPr/>
+        </p:nvSpPr>
+        <p:spPr>
+          <a:xfrm>
+            <a:off x="7068312" y="1078992"/>
+            <a:ext cx="1664208" cy="384048"/>
+          </a:xfrm>
+          <a:prstGeom prst="rect">
+            <a:avLst/>
+          </a:prstGeom>
+          <a:noFill/>
+          <a:ln/>
+        </p:spPr>
+        <p:txBody>
+          <a:bodyPr wrap="square" lIns="0" tIns="0" rIns="0" bIns="0" rtlCol="0" anchor="ctr"/>
+          <a:lstStyle/>
+          <a:p>
+            <a:pPr algn="ctr" indent="0" marL="0">
+              <a:buNone/>
+            </a:pPr>
+            <a:r>
+              <a:rPr lang="en-US" sz="2000" b="1" dirty="0">
+                <a:solidFill>
+                  <a:srgbClr val="F97316"/>
+                </a:solidFill>
+                <a:latin typeface="Malgun Gothic" pitchFamily="34" charset="0"/>
+                <a:ea typeface="Malgun Gothic" pitchFamily="34" charset="-122"/>
+                <a:cs typeface="Malgun Gothic" pitchFamily="34" charset="-120"/>
+              </a:rPr>
+              <a:t>54건</a:t>
+            </a:r>
+            <a:endParaRPr lang="en-US" sz="2000" dirty="0"/>
+          </a:p>
+        </p:txBody>
+      </p:sp>
+      <p:sp>
+        <p:nvSpPr>
+          <p:cNvPr id="15" name="Text 13"/>
+          <p:cNvSpPr txBox="1"/>
+          <p:nvPr/>
+        </p:nvSpPr>
+        <p:spPr>
+          <a:xfrm>
+            <a:off x="7068312" y="1481328"/>
+            <a:ext cx="1664208" cy="182880"/>
+          </a:xfrm>
+          <a:prstGeom prst="rect">
+            <a:avLst/>
+          </a:prstGeom>
+          <a:noFill/>
+          <a:ln/>
+        </p:spPr>
+        <p:txBody>
+          <a:bodyPr wrap="square" lIns="0" tIns="0" rIns="0" bIns="0" rtlCol="0" anchor="t"/>
+          <a:lstStyle/>
+          <a:p>
+            <a:pPr algn="ctr" indent="0" marL="0">
+              <a:buNone/>
+            </a:pPr>
+            <a:r>
+              <a:rPr lang="en-US" sz="750" dirty="0">
+                <a:solidFill>
+                  <a:srgbClr val="52525B"/>
+                </a:solidFill>
+                <a:latin typeface="Malgun Gothic" pitchFamily="34" charset="0"/>
+                <a:ea typeface="Malgun Gothic" pitchFamily="34" charset="-122"/>
+                <a:cs typeface="Malgun Gothic" pitchFamily="34" charset="-120"/>
+              </a:rPr>
+              <a:t>기록한 설계 결정</a:t>
+            </a:r>
+            <a:endParaRPr lang="en-US" sz="750" dirty="0"/>
+          </a:p>
+        </p:txBody>
+      </p:sp>
+      <p:sp>
+        <p:nvSpPr>
+          <p:cNvPr id="16" name="Text 14"/>
+          <p:cNvSpPr txBox="1"/>
+          <p:nvPr/>
+        </p:nvSpPr>
+        <p:spPr>
+          <a:xfrm>
+            <a:off x="548640" y="2057400"/>
+            <a:ext cx="731520" cy="365760"/>
+          </a:xfrm>
+          <a:prstGeom prst="rect">
+            <a:avLst/>
+          </a:prstGeom>
+          <a:noFill/>
+          <a:ln/>
+        </p:spPr>
+        <p:txBody>
+          <a:bodyPr wrap="square" lIns="0" tIns="0" rIns="0" bIns="0" rtlCol="0" anchor="ctr"/>
+          <a:lstStyle/>
+          <a:p>
             <a:pPr indent="0" marL="0">
               <a:buNone/>
             </a:pPr>
             <a:r>
               <a:rPr lang="en-US" sz="1100" b="1" dirty="0">
                 <a:solidFill>
+                  <a:srgbClr val="F97316"/>
+                </a:solidFill>
+                <a:latin typeface="Malgun Gothic" pitchFamily="34" charset="0"/>
+                <a:ea typeface="Malgun Gothic" pitchFamily="34" charset="-122"/>
+                <a:cs typeface="Malgun Gothic" pitchFamily="34" charset="-120"/>
+              </a:rPr>
+              <a:t>성과</a:t>
+            </a:r>
+            <a:endParaRPr lang="en-US" sz="1100" dirty="0"/>
+          </a:p>
+        </p:txBody>
+      </p:sp>
+      <p:sp>
+        <p:nvSpPr>
+          <p:cNvPr id="17" name="Text 15"/>
+          <p:cNvSpPr txBox="1"/>
+          <p:nvPr/>
+        </p:nvSpPr>
+        <p:spPr>
+          <a:xfrm>
+            <a:off x="1371600" y="2057400"/>
+            <a:ext cx="7315200" cy="365760"/>
+          </a:xfrm>
+          <a:prstGeom prst="rect">
+            <a:avLst/>
+          </a:prstGeom>
+          <a:noFill/>
+          <a:ln/>
+        </p:spPr>
+        <p:txBody>
+          <a:bodyPr wrap="square" lIns="0" tIns="0" rIns="0" bIns="0" rtlCol="0" anchor="ctr"/>
+          <a:lstStyle/>
+          <a:p>
+            <a:pPr indent="0" marL="0">
+              <a:buNone/>
+            </a:pPr>
+            <a:r>
+              <a:rPr lang="en-US" sz="950" dirty="0">
+                <a:solidFill>
                   <a:srgbClr val="18181B"/>
                 </a:solidFill>
                 <a:latin typeface="Malgun Gothic" pitchFamily="34" charset="0"/>
                 <a:ea typeface="Malgun Gothic" pitchFamily="34" charset="-122"/>
                 <a:cs typeface="Malgun Gothic" pitchFamily="34" charset="-120"/>
               </a:rPr>
-              <a:t>이미 준비된 것</a:t>
-            </a:r>
-            <a:endParaRPr lang="en-US" sz="1100" dirty="0"/>
-          </a:p>
-        </p:txBody>
-      </p:sp>
-      <p:sp>
-        <p:nvSpPr>
-          <p:cNvPr id="10" name="Text 7"/>
-          <p:cNvSpPr txBox="1"/>
-          <p:nvPr/>
-        </p:nvSpPr>
-        <p:spPr>
-          <a:xfrm>
-            <a:off x="621792" y="1572768"/>
-            <a:ext cx="182880" cy="274320"/>
-          </a:xfrm>
-          <a:prstGeom prst="rect">
-            <a:avLst/>
-          </a:prstGeom>
-          <a:noFill/>
-          <a:ln/>
-        </p:spPr>
-        <p:txBody>
-          <a:bodyPr wrap="square" lIns="0" tIns="0" rIns="0" bIns="0" rtlCol="0" anchor="t"/>
-          <a:lstStyle/>
-          <a:p>
-            <a:pPr indent="0" marL="0">
-              <a:buNone/>
-            </a:pPr>
-            <a:r>
-              <a:rPr lang="en-US" sz="1000" b="1" dirty="0">
-                <a:solidFill>
-                  <a:srgbClr val="16A34A"/>
-                </a:solidFill>
-                <a:latin typeface="Malgun Gothic" pitchFamily="34" charset="0"/>
-                <a:ea typeface="Malgun Gothic" pitchFamily="34" charset="-122"/>
-                <a:cs typeface="Malgun Gothic" pitchFamily="34" charset="-120"/>
-              </a:rPr>
-              <a:t>✓</a:t>
-            </a:r>
-            <a:endParaRPr lang="en-US" sz="1000" dirty="0"/>
-          </a:p>
-        </p:txBody>
-      </p:sp>
-      <p:sp>
-        <p:nvSpPr>
-          <p:cNvPr id="11" name="Text 8"/>
-          <p:cNvSpPr txBox="1"/>
-          <p:nvPr/>
-        </p:nvSpPr>
-        <p:spPr>
-          <a:xfrm>
-            <a:off x="841248" y="1572768"/>
-            <a:ext cx="3520440" cy="475488"/>
-          </a:xfrm>
-          <a:prstGeom prst="rect">
-            <a:avLst/>
-          </a:prstGeom>
-          <a:noFill/>
-          <a:ln/>
-        </p:spPr>
-        <p:txBody>
-          <a:bodyPr wrap="square" lIns="0" tIns="0" rIns="0" bIns="0" rtlCol="0" anchor="t"/>
-          <a:lstStyle/>
-          <a:p>
-            <a:pPr indent="0" marL="0">
-              <a:buNone/>
-            </a:pPr>
-            <a:r>
-              <a:rPr lang="en-US" sz="830" dirty="0">
-                <a:solidFill>
-                  <a:srgbClr val="52525B"/>
-                </a:solidFill>
-                <a:latin typeface="Malgun Gothic" pitchFamily="34" charset="0"/>
-                <a:ea typeface="Malgun Gothic" pitchFamily="34" charset="-122"/>
-                <a:cs typeface="Malgun Gothic" pitchFamily="34" charset="-120"/>
-              </a:rPr>
-              <a:t>운영 DB 드라이버(PostgreSQL) 포함, DB 주소·DDL 설정을 환경변수로 분리 (운영은 validate)</a:t>
-            </a:r>
-            <a:endParaRPr lang="en-US" sz="830" dirty="0"/>
-          </a:p>
-        </p:txBody>
-      </p:sp>
-      <p:sp>
-        <p:nvSpPr>
-          <p:cNvPr id="12" name="Text 9"/>
-          <p:cNvSpPr txBox="1"/>
-          <p:nvPr/>
-        </p:nvSpPr>
-        <p:spPr>
-          <a:xfrm>
-            <a:off x="621792" y="2103120"/>
-            <a:ext cx="182880" cy="274320"/>
-          </a:xfrm>
-          <a:prstGeom prst="rect">
-            <a:avLst/>
-          </a:prstGeom>
-          <a:noFill/>
-          <a:ln/>
-        </p:spPr>
-        <p:txBody>
-          <a:bodyPr wrap="square" lIns="0" tIns="0" rIns="0" bIns="0" rtlCol="0" anchor="t"/>
-          <a:lstStyle/>
-          <a:p>
-            <a:pPr indent="0" marL="0">
-              <a:buNone/>
-            </a:pPr>
-            <a:r>
-              <a:rPr lang="en-US" sz="1000" b="1" dirty="0">
-                <a:solidFill>
-                  <a:srgbClr val="16A34A"/>
-                </a:solidFill>
-                <a:latin typeface="Malgun Gothic" pitchFamily="34" charset="0"/>
-                <a:ea typeface="Malgun Gothic" pitchFamily="34" charset="-122"/>
-                <a:cs typeface="Malgun Gothic" pitchFamily="34" charset="-120"/>
-              </a:rPr>
-              <a:t>✓</a:t>
-            </a:r>
-            <a:endParaRPr lang="en-US" sz="1000" dirty="0"/>
-          </a:p>
-        </p:txBody>
-      </p:sp>
-      <p:sp>
-        <p:nvSpPr>
-          <p:cNvPr id="13" name="Text 10"/>
-          <p:cNvSpPr txBox="1"/>
-          <p:nvPr/>
-        </p:nvSpPr>
-        <p:spPr>
-          <a:xfrm>
-            <a:off x="841248" y="2103120"/>
-            <a:ext cx="3520440" cy="475488"/>
-          </a:xfrm>
-          <a:prstGeom prst="rect">
-            <a:avLst/>
-          </a:prstGeom>
-          <a:noFill/>
-          <a:ln/>
-        </p:spPr>
-        <p:txBody>
-          <a:bodyPr wrap="square" lIns="0" tIns="0" rIns="0" bIns="0" rtlCol="0" anchor="t"/>
-          <a:lstStyle/>
-          <a:p>
-            <a:pPr indent="0" marL="0">
-              <a:buNone/>
-            </a:pPr>
-            <a:r>
-              <a:rPr lang="en-US" sz="830" dirty="0">
-                <a:solidFill>
-                  <a:srgbClr val="52525B"/>
-                </a:solidFill>
-                <a:latin typeface="Malgun Gothic" pitchFamily="34" charset="0"/>
-                <a:ea typeface="Malgun Gothic" pitchFamily="34" charset="-122"/>
-                <a:cs typeface="Malgun Gothic" pitchFamily="34" charset="-120"/>
-              </a:rPr>
-              <a:t>운영 환경에서 secure 쿠키 · 보안 헤더 · H2 콘솔 차단</a:t>
-            </a:r>
-            <a:endParaRPr lang="en-US" sz="830" dirty="0"/>
-          </a:p>
-        </p:txBody>
-      </p:sp>
-      <p:sp>
-        <p:nvSpPr>
-          <p:cNvPr id="14" name="Text 11"/>
-          <p:cNvSpPr txBox="1"/>
-          <p:nvPr/>
-        </p:nvSpPr>
-        <p:spPr>
-          <a:xfrm>
-            <a:off x="621792" y="2633472"/>
-            <a:ext cx="182880" cy="274320"/>
-          </a:xfrm>
-          <a:prstGeom prst="rect">
-            <a:avLst/>
-          </a:prstGeom>
-          <a:noFill/>
-          <a:ln/>
-        </p:spPr>
-        <p:txBody>
-          <a:bodyPr wrap="square" lIns="0" tIns="0" rIns="0" bIns="0" rtlCol="0" anchor="t"/>
-          <a:lstStyle/>
-          <a:p>
-            <a:pPr indent="0" marL="0">
-              <a:buNone/>
-            </a:pPr>
-            <a:r>
-              <a:rPr lang="en-US" sz="1000" b="1" dirty="0">
-                <a:solidFill>
-                  <a:srgbClr val="16A34A"/>
-                </a:solidFill>
-                <a:latin typeface="Malgun Gothic" pitchFamily="34" charset="0"/>
-                <a:ea typeface="Malgun Gothic" pitchFamily="34" charset="-122"/>
-                <a:cs typeface="Malgun Gothic" pitchFamily="34" charset="-120"/>
-              </a:rPr>
-              <a:t>✓</a:t>
-            </a:r>
-            <a:endParaRPr lang="en-US" sz="1000" dirty="0"/>
-          </a:p>
-        </p:txBody>
-      </p:sp>
-      <p:sp>
-        <p:nvSpPr>
-          <p:cNvPr id="15" name="Text 12"/>
-          <p:cNvSpPr txBox="1"/>
-          <p:nvPr/>
-        </p:nvSpPr>
-        <p:spPr>
-          <a:xfrm>
-            <a:off x="841248" y="2633472"/>
-            <a:ext cx="3520440" cy="475488"/>
-          </a:xfrm>
-          <a:prstGeom prst="rect">
-            <a:avLst/>
-          </a:prstGeom>
-          <a:noFill/>
-          <a:ln/>
-        </p:spPr>
-        <p:txBody>
-          <a:bodyPr wrap="square" lIns="0" tIns="0" rIns="0" bIns="0" rtlCol="0" anchor="t"/>
-          <a:lstStyle/>
-          <a:p>
-            <a:pPr indent="0" marL="0">
-              <a:buNone/>
-            </a:pPr>
-            <a:r>
-              <a:rPr lang="en-US" sz="830" dirty="0">
-                <a:solidFill>
-                  <a:srgbClr val="52525B"/>
-                </a:solidFill>
-                <a:latin typeface="Malgun Gothic" pitchFamily="34" charset="0"/>
-                <a:ea typeface="Malgun Gothic" pitchFamily="34" charset="-122"/>
-                <a:cs typeface="Malgun Gothic" pitchFamily="34" charset="-120"/>
-              </a:rPr>
-              <a:t>WebSocket 허용 Origin과 메일 링크 주소를 FRONTEND_ORIGIN 한 곳에서 관리</a:t>
-            </a:r>
-            <a:endParaRPr lang="en-US" sz="830" dirty="0"/>
-          </a:p>
-        </p:txBody>
-      </p:sp>
-      <p:sp>
-        <p:nvSpPr>
-          <p:cNvPr id="16" name="Text 13"/>
-          <p:cNvSpPr txBox="1"/>
-          <p:nvPr/>
-        </p:nvSpPr>
-        <p:spPr>
-          <a:xfrm>
-            <a:off x="621792" y="3163824"/>
-            <a:ext cx="182880" cy="274320"/>
-          </a:xfrm>
-          <a:prstGeom prst="rect">
-            <a:avLst/>
-          </a:prstGeom>
-          <a:noFill/>
-          <a:ln/>
-        </p:spPr>
-        <p:txBody>
-          <a:bodyPr wrap="square" lIns="0" tIns="0" rIns="0" bIns="0" rtlCol="0" anchor="t"/>
-          <a:lstStyle/>
-          <a:p>
-            <a:pPr indent="0" marL="0">
-              <a:buNone/>
-            </a:pPr>
-            <a:r>
-              <a:rPr lang="en-US" sz="1000" b="1" dirty="0">
-                <a:solidFill>
-                  <a:srgbClr val="16A34A"/>
-                </a:solidFill>
-                <a:latin typeface="Malgun Gothic" pitchFamily="34" charset="0"/>
-                <a:ea typeface="Malgun Gothic" pitchFamily="34" charset="-122"/>
-                <a:cs typeface="Malgun Gothic" pitchFamily="34" charset="-120"/>
-              </a:rPr>
-              <a:t>✓</a:t>
-            </a:r>
-            <a:endParaRPr lang="en-US" sz="1000" dirty="0"/>
-          </a:p>
-        </p:txBody>
-      </p:sp>
-      <p:sp>
-        <p:nvSpPr>
-          <p:cNvPr id="17" name="Text 14"/>
-          <p:cNvSpPr txBox="1"/>
-          <p:nvPr/>
-        </p:nvSpPr>
-        <p:spPr>
-          <a:xfrm>
-            <a:off x="841248" y="3163824"/>
-            <a:ext cx="3520440" cy="475488"/>
-          </a:xfrm>
-          <a:prstGeom prst="rect">
-            <a:avLst/>
-          </a:prstGeom>
-          <a:noFill/>
-          <a:ln/>
-        </p:spPr>
-        <p:txBody>
-          <a:bodyPr wrap="square" lIns="0" tIns="0" rIns="0" bIns="0" rtlCol="0" anchor="t"/>
-          <a:lstStyle/>
-          <a:p>
-            <a:pPr indent="0" marL="0">
-              <a:buNone/>
-            </a:pPr>
-            <a:r>
-              <a:rPr lang="en-US" sz="830" dirty="0">
-                <a:solidFill>
-                  <a:srgbClr val="52525B"/>
-                </a:solidFill>
-                <a:latin typeface="Malgun Gothic" pitchFamily="34" charset="0"/>
-                <a:ea typeface="Malgun Gothic" pitchFamily="34" charset="-122"/>
-                <a:cs typeface="Malgun Gothic" pitchFamily="34" charset="-120"/>
-              </a:rPr>
-              <a:t>모든 외부 키를 .env로 분리, 키가 없으면 해당 조회만 건너뛰고 분석은 동작</a:t>
-            </a:r>
-            <a:endParaRPr lang="en-US" sz="830" dirty="0"/>
-          </a:p>
-        </p:txBody>
-      </p:sp>
-      <p:sp>
-        <p:nvSpPr>
-          <p:cNvPr id="18" name="Text 15"/>
-          <p:cNvSpPr txBox="1"/>
-          <p:nvPr/>
-        </p:nvSpPr>
-        <p:spPr>
-          <a:xfrm>
-            <a:off x="621792" y="3694176"/>
-            <a:ext cx="182880" cy="274320"/>
-          </a:xfrm>
-          <a:prstGeom prst="rect">
-            <a:avLst/>
-          </a:prstGeom>
-          <a:noFill/>
-          <a:ln/>
-        </p:spPr>
-        <p:txBody>
-          <a:bodyPr wrap="square" lIns="0" tIns="0" rIns="0" bIns="0" rtlCol="0" anchor="t"/>
-          <a:lstStyle/>
-          <a:p>
-            <a:pPr indent="0" marL="0">
-              <a:buNone/>
-            </a:pPr>
-            <a:r>
-              <a:rPr lang="en-US" sz="1000" b="1" dirty="0">
-                <a:solidFill>
-                  <a:srgbClr val="16A34A"/>
-                </a:solidFill>
-                <a:latin typeface="Malgun Gothic" pitchFamily="34" charset="0"/>
-                <a:ea typeface="Malgun Gothic" pitchFamily="34" charset="-122"/>
-                <a:cs typeface="Malgun Gothic" pitchFamily="34" charset="-120"/>
-              </a:rPr>
-              <a:t>✓</a:t>
-            </a:r>
-            <a:endParaRPr lang="en-US" sz="1000" dirty="0"/>
-          </a:p>
-        </p:txBody>
-      </p:sp>
-      <p:sp>
-        <p:nvSpPr>
-          <p:cNvPr id="19" name="Text 16"/>
-          <p:cNvSpPr txBox="1"/>
-          <p:nvPr/>
-        </p:nvSpPr>
-        <p:spPr>
-          <a:xfrm>
-            <a:off x="841248" y="3694176"/>
-            <a:ext cx="3520440" cy="475488"/>
-          </a:xfrm>
-          <a:prstGeom prst="rect">
-            <a:avLst/>
-          </a:prstGeom>
-          <a:noFill/>
-          <a:ln/>
-        </p:spPr>
-        <p:txBody>
-          <a:bodyPr wrap="square" lIns="0" tIns="0" rIns="0" bIns="0" rtlCol="0" anchor="t"/>
-          <a:lstStyle/>
-          <a:p>
-            <a:pPr indent="0" marL="0">
-              <a:buNone/>
-            </a:pPr>
-            <a:r>
-              <a:rPr lang="en-US" sz="830" dirty="0">
-                <a:solidFill>
-                  <a:srgbClr val="52525B"/>
-                </a:solidFill>
-                <a:latin typeface="Malgun Gothic" pitchFamily="34" charset="0"/>
-                <a:ea typeface="Malgun Gothic" pitchFamily="34" charset="-122"/>
-                <a:cs typeface="Malgun Gothic" pitchFamily="34" charset="-120"/>
-              </a:rPr>
-              <a:t>자동화 테스트 319개 작성 (백엔드 290 · e2e 22 · 앱 7)</a:t>
-            </a:r>
-            <a:endParaRPr lang="en-US" sz="830" dirty="0"/>
-          </a:p>
-        </p:txBody>
-      </p:sp>
-      <p:sp>
-        <p:nvSpPr>
-          <p:cNvPr id="20" name="Shape 17"/>
+              <a:t>등기부 판독부터 위험 신호, 변호사 상담, 결제, 관리자 운영까지 웹·앱으로 이어지는 서비스를 혼자 완성</a:t>
+            </a:r>
+            <a:endParaRPr lang="en-US" sz="950" dirty="0"/>
+          </a:p>
+        </p:txBody>
+      </p:sp>
+      <p:sp>
+        <p:nvSpPr>
+          <p:cNvPr id="18" name="Shape 16"/>
           <p:cNvSpPr/>
           <p:nvPr/>
         </p:nvSpPr>
         <p:spPr>
           <a:xfrm>
-            <a:off x="4663440" y="1005840"/>
-            <a:ext cx="4069080" cy="3291840"/>
-          </a:xfrm>
-          <a:prstGeom prst="roundRect">
-            <a:avLst>
-              <a:gd name="adj" fmla="val 1667"/>
-            </a:avLst>
-          </a:prstGeom>
-          <a:solidFill>
-            <a:srgbClr val="18181A"/>
-          </a:solidFill>
+            <a:off x="548640" y="2514600"/>
+            <a:ext cx="8138160" cy="0"/>
+          </a:xfrm>
+          <a:prstGeom prst="line">
+            <a:avLst/>
+          </a:prstGeom>
+          <a:noFill/>
           <a:ln w="9525">
             <a:solidFill>
-              <a:srgbClr val="18181A"/>
+              <a:srgbClr val="E4E4E7"/>
             </a:solidFill>
             <a:prstDash val="solid"/>
           </a:ln>
         </p:spPr>
       </p:sp>
-      <p:pic>
-        <p:nvPicPr>
-          <p:cNvPr id="21" name="Image 1" descr="preencoded.png">    </p:cNvPr>
-          <p:cNvPicPr>
-            <a:picLocks noChangeAspect="1"/>
-          </p:cNvPicPr>
-          <p:nvPr/>
-        </p:nvPicPr>
-        <p:blipFill>
-          <a:blip r:embed="rId2"/>
-          <a:stretch>
-            <a:fillRect/>
-          </a:stretch>
-        </p:blipFill>
-        <p:spPr>
-          <a:xfrm>
-            <a:off x="4846320" y="1170432"/>
-            <a:ext cx="256032" cy="256032"/>
-          </a:xfrm>
-          <a:prstGeom prst="rect">
-            <a:avLst/>
-          </a:prstGeom>
-        </p:spPr>
-      </p:pic>
-      <p:sp>
-        <p:nvSpPr>
-          <p:cNvPr id="22" name="Text 18"/>
-          <p:cNvSpPr txBox="1"/>
-          <p:nvPr/>
-        </p:nvSpPr>
-        <p:spPr>
-          <a:xfrm>
-            <a:off x="5193792" y="1170432"/>
-            <a:ext cx="2743200" cy="256032"/>
-          </a:xfrm>
-          <a:prstGeom prst="rect">
-            <a:avLst/>
-          </a:prstGeom>
-          <a:noFill/>
-          <a:ln/>
-        </p:spPr>
-        <p:txBody>
-          <a:bodyPr wrap="square" lIns="0" tIns="0" rIns="0" bIns="0" rtlCol="0" anchor="t"/>
+      <p:sp>
+        <p:nvSpPr>
+          <p:cNvPr id="19" name="Text 17"/>
+          <p:cNvSpPr txBox="1"/>
+          <p:nvPr/>
+        </p:nvSpPr>
+        <p:spPr>
+          <a:xfrm>
+            <a:off x="548640" y="2606040"/>
+            <a:ext cx="731520" cy="365760"/>
+          </a:xfrm>
+          <a:prstGeom prst="rect">
+            <a:avLst/>
+          </a:prstGeom>
+          <a:noFill/>
+          <a:ln/>
+        </p:spPr>
+        <p:txBody>
+          <a:bodyPr wrap="square" lIns="0" tIns="0" rIns="0" bIns="0" rtlCol="0" anchor="ctr"/>
           <a:lstStyle/>
           <a:p>
             <a:pPr indent="0" marL="0">
@@ -33241,13 +32995,13 @@
             <a:r>
               <a:rPr lang="en-US" sz="1100" b="1" dirty="0">
                 <a:solidFill>
-                  <a:srgbClr val="FFFFFF"/>
-                </a:solidFill>
-                <a:latin typeface="Malgun Gothic" pitchFamily="34" charset="0"/>
-                <a:ea typeface="Malgun Gothic" pitchFamily="34" charset="-122"/>
-                <a:cs typeface="Malgun Gothic" pitchFamily="34" charset="-120"/>
-              </a:rPr>
-              <a:t>배포할 때 할 일</a:t>
+                  <a:srgbClr val="F97316"/>
+                </a:solidFill>
+                <a:latin typeface="Malgun Gothic" pitchFamily="34" charset="0"/>
+                <a:ea typeface="Malgun Gothic" pitchFamily="34" charset="-122"/>
+                <a:cs typeface="Malgun Gothic" pitchFamily="34" charset="-120"/>
+              </a:rPr>
+              <a:t>기술</a:t>
             </a:r>
             <a:endParaRPr lang="en-US" sz="1100" dirty="0"/>
           </a:p>
@@ -33255,26 +33009,61 @@
       </p:sp>
       <p:sp>
         <p:nvSpPr>
-          <p:cNvPr id="23" name="Shape 19"/>
+          <p:cNvPr id="20" name="Text 18"/>
+          <p:cNvSpPr txBox="1"/>
+          <p:nvPr/>
+        </p:nvSpPr>
+        <p:spPr>
+          <a:xfrm>
+            <a:off x="1371600" y="2606040"/>
+            <a:ext cx="7315200" cy="365760"/>
+          </a:xfrm>
+          <a:prstGeom prst="rect">
+            <a:avLst/>
+          </a:prstGeom>
+          <a:noFill/>
+          <a:ln/>
+        </p:spPr>
+        <p:txBody>
+          <a:bodyPr wrap="square" lIns="0" tIns="0" rIns="0" bIns="0" rtlCol="0" anchor="ctr"/>
+          <a:lstStyle/>
+          <a:p>
+            <a:pPr indent="0" marL="0">
+              <a:buNone/>
+            </a:pPr>
+            <a:r>
+              <a:rPr lang="en-US" sz="950" dirty="0">
+                <a:solidFill>
+                  <a:srgbClr val="18181B"/>
+                </a:solidFill>
+                <a:latin typeface="Malgun Gothic" pitchFamily="34" charset="0"/>
+                <a:ea typeface="Malgun Gothic" pitchFamily="34" charset="-122"/>
+                <a:cs typeface="Malgun Gothic" pitchFamily="34" charset="-120"/>
+              </a:rPr>
+              <a:t>규칙 엔진(15개) · 공공 API 5종 연동 · WebSocket · PKCE · 토스 결제를 직접 설계하고 테스트 328개 · CI로 검증</a:t>
+            </a:r>
+            <a:endParaRPr lang="en-US" sz="950" dirty="0"/>
+          </a:p>
+        </p:txBody>
+      </p:sp>
+      <p:sp>
+        <p:nvSpPr>
+          <p:cNvPr id="21" name="Shape 19"/>
           <p:cNvSpPr/>
           <p:nvPr/>
         </p:nvSpPr>
         <p:spPr>
           <a:xfrm>
-            <a:off x="4846320" y="1591056"/>
-            <a:ext cx="502920" cy="219456"/>
-          </a:xfrm>
-          <a:prstGeom prst="roundRect">
-            <a:avLst>
-              <a:gd name="adj" fmla="val 20833"/>
-            </a:avLst>
-          </a:prstGeom>
-          <a:solidFill>
-            <a:srgbClr val="232326"/>
-          </a:solidFill>
-          <a:ln w="6350">
+            <a:off x="548640" y="3063240"/>
+            <a:ext cx="8138160" cy="0"/>
+          </a:xfrm>
+          <a:prstGeom prst="line">
+            <a:avLst/>
+          </a:prstGeom>
+          <a:noFill/>
+          <a:ln w="9525">
             <a:solidFill>
-              <a:srgbClr val="3F3F46"/>
+              <a:srgbClr val="E4E4E7"/>
             </a:solidFill>
             <a:prstDash val="solid"/>
           </a:ln>
@@ -33282,14 +33071,14 @@
       </p:sp>
       <p:sp>
         <p:nvSpPr>
-          <p:cNvPr id="24" name="Text 20"/>
-          <p:cNvSpPr txBox="1"/>
-          <p:nvPr/>
-        </p:nvSpPr>
-        <p:spPr>
-          <a:xfrm>
-            <a:off x="4846320" y="1591056"/>
-            <a:ext cx="502920" cy="219456"/>
+          <p:cNvPr id="22" name="Text 20"/>
+          <p:cNvSpPr txBox="1"/>
+          <p:nvPr/>
+        </p:nvSpPr>
+        <p:spPr>
+          <a:xfrm>
+            <a:off x="548640" y="3154680"/>
+            <a:ext cx="731520" cy="365760"/>
           </a:xfrm>
           <a:prstGeom prst="rect">
             <a:avLst/>
@@ -33301,11 +33090,11 @@
           <a:bodyPr wrap="square" lIns="0" tIns="0" rIns="0" bIns="0" rtlCol="0" anchor="ctr"/>
           <a:lstStyle/>
           <a:p>
-            <a:pPr algn="ctr" indent="0" marL="0">
-              <a:buNone/>
-            </a:pPr>
-            <a:r>
-              <a:rPr lang="en-US" sz="750" b="1" dirty="0">
+            <a:pPr indent="0" marL="0">
+              <a:buNone/>
+            </a:pPr>
+            <a:r>
+              <a:rPr lang="en-US" sz="1100" b="1" dirty="0">
                 <a:solidFill>
                   <a:srgbClr val="F97316"/>
                 </a:solidFill>
@@ -33313,73 +33102,69 @@
                 <a:ea typeface="Malgun Gothic" pitchFamily="34" charset="-122"/>
                 <a:cs typeface="Malgun Gothic" pitchFamily="34" charset="-120"/>
               </a:rPr>
-              <a:t>서버</a:t>
-            </a:r>
-            <a:endParaRPr lang="en-US" sz="750" dirty="0"/>
-          </a:p>
-        </p:txBody>
-      </p:sp>
-      <p:sp>
-        <p:nvSpPr>
-          <p:cNvPr id="25" name="Text 21"/>
-          <p:cNvSpPr txBox="1"/>
-          <p:nvPr/>
-        </p:nvSpPr>
-        <p:spPr>
-          <a:xfrm>
-            <a:off x="5468112" y="1572768"/>
-            <a:ext cx="3154680" cy="475488"/>
-          </a:xfrm>
-          <a:prstGeom prst="rect">
-            <a:avLst/>
-          </a:prstGeom>
-          <a:noFill/>
-          <a:ln/>
-        </p:spPr>
-        <p:txBody>
-          <a:bodyPr wrap="square" lIns="0" tIns="0" rIns="0" bIns="0" rtlCol="0" anchor="t"/>
-          <a:lstStyle/>
-          <a:p>
-            <a:pPr indent="0" marL="0">
-              <a:buNone/>
-            </a:pPr>
-            <a:r>
-              <a:rPr lang="en-US" sz="830" dirty="0">
-                <a:solidFill>
-                  <a:srgbClr val="D4D4D8"/>
-                </a:solidFill>
-                <a:latin typeface="Malgun Gothic" pitchFamily="34" charset="0"/>
-                <a:ea typeface="Malgun Gothic" pitchFamily="34" charset="-122"/>
-                <a:cs typeface="Malgun Gothic" pitchFamily="34" charset="-120"/>
-              </a:rPr>
-              <a:t>웹 Vercel · 백엔드 Render/Fly.io · DB PostgreSQL</a:t>
-            </a:r>
-            <a:endParaRPr lang="en-US" sz="830" dirty="0"/>
-          </a:p>
-        </p:txBody>
-      </p:sp>
-      <p:sp>
-        <p:nvSpPr>
-          <p:cNvPr id="26" name="Shape 22"/>
+              <a:t>원칙</a:t>
+            </a:r>
+            <a:endParaRPr lang="en-US" sz="1100" dirty="0"/>
+          </a:p>
+        </p:txBody>
+      </p:sp>
+      <p:sp>
+        <p:nvSpPr>
+          <p:cNvPr id="23" name="Text 21"/>
+          <p:cNvSpPr txBox="1"/>
+          <p:nvPr/>
+        </p:nvSpPr>
+        <p:spPr>
+          <a:xfrm>
+            <a:off x="1371600" y="3154680"/>
+            <a:ext cx="7315200" cy="365760"/>
+          </a:xfrm>
+          <a:prstGeom prst="rect">
+            <a:avLst/>
+          </a:prstGeom>
+          <a:noFill/>
+          <a:ln/>
+        </p:spPr>
+        <p:txBody>
+          <a:bodyPr wrap="square" lIns="0" tIns="0" rIns="0" bIns="0" rtlCol="0" anchor="ctr"/>
+          <a:lstStyle/>
+          <a:p>
+            <a:pPr indent="0" marL="0">
+              <a:buNone/>
+            </a:pPr>
+            <a:r>
+              <a:rPr lang="en-US" sz="950" dirty="0">
+                <a:solidFill>
+                  <a:srgbClr val="18181B"/>
+                </a:solidFill>
+                <a:latin typeface="Malgun Gothic" pitchFamily="34" charset="0"/>
+                <a:ea typeface="Malgun Gothic" pitchFamily="34" charset="-122"/>
+                <a:cs typeface="Malgun Gothic" pitchFamily="34" charset="-120"/>
+              </a:rPr>
+              <a:t>근거 없이 단정하지 않기 — 모든 신호에 출처를 달고, 확인할 수 없는 집은 '안전' 판정을 보류</a:t>
+            </a:r>
+            <a:endParaRPr lang="en-US" sz="950" dirty="0"/>
+          </a:p>
+        </p:txBody>
+      </p:sp>
+      <p:sp>
+        <p:nvSpPr>
+          <p:cNvPr id="24" name="Shape 22"/>
           <p:cNvSpPr/>
           <p:nvPr/>
         </p:nvSpPr>
         <p:spPr>
           <a:xfrm>
-            <a:off x="4846320" y="2121408"/>
-            <a:ext cx="502920" cy="219456"/>
-          </a:xfrm>
-          <a:prstGeom prst="roundRect">
-            <a:avLst>
-              <a:gd name="adj" fmla="val 20833"/>
-            </a:avLst>
-          </a:prstGeom>
-          <a:solidFill>
-            <a:srgbClr val="232326"/>
-          </a:solidFill>
-          <a:ln w="6350">
+            <a:off x="548640" y="3611880"/>
+            <a:ext cx="8138160" cy="0"/>
+          </a:xfrm>
+          <a:prstGeom prst="line">
+            <a:avLst/>
+          </a:prstGeom>
+          <a:noFill/>
+          <a:ln w="9525">
             <a:solidFill>
-              <a:srgbClr val="3F3F46"/>
+              <a:srgbClr val="E4E4E7"/>
             </a:solidFill>
             <a:prstDash val="solid"/>
           </a:ln>
@@ -33387,14 +33172,14 @@
       </p:sp>
       <p:sp>
         <p:nvSpPr>
-          <p:cNvPr id="27" name="Text 23"/>
-          <p:cNvSpPr txBox="1"/>
-          <p:nvPr/>
-        </p:nvSpPr>
-        <p:spPr>
-          <a:xfrm>
-            <a:off x="4846320" y="2121408"/>
-            <a:ext cx="502920" cy="219456"/>
+          <p:cNvPr id="25" name="Text 23"/>
+          <p:cNvSpPr txBox="1"/>
+          <p:nvPr/>
+        </p:nvSpPr>
+        <p:spPr>
+          <a:xfrm>
+            <a:off x="548640" y="3703320"/>
+            <a:ext cx="731520" cy="365760"/>
           </a:xfrm>
           <a:prstGeom prst="rect">
             <a:avLst/>
@@ -33406,11 +33191,11 @@
           <a:bodyPr wrap="square" lIns="0" tIns="0" rIns="0" bIns="0" rtlCol="0" anchor="ctr"/>
           <a:lstStyle/>
           <a:p>
-            <a:pPr algn="ctr" indent="0" marL="0">
-              <a:buNone/>
-            </a:pPr>
-            <a:r>
-              <a:rPr lang="en-US" sz="750" b="1" dirty="0">
+            <a:pPr indent="0" marL="0">
+              <a:buNone/>
+            </a:pPr>
+            <a:r>
+              <a:rPr lang="en-US" sz="1100" b="1" dirty="0">
                 <a:solidFill>
                   <a:srgbClr val="F97316"/>
                 </a:solidFill>
@@ -33418,404 +33203,73 @@
                 <a:ea typeface="Malgun Gothic" pitchFamily="34" charset="-122"/>
                 <a:cs typeface="Malgun Gothic" pitchFamily="34" charset="-120"/>
               </a:rPr>
-              <a:t>DB</a:t>
-            </a:r>
-            <a:endParaRPr lang="en-US" sz="750" dirty="0"/>
-          </a:p>
-        </p:txBody>
-      </p:sp>
-      <p:sp>
-        <p:nvSpPr>
-          <p:cNvPr id="28" name="Text 24"/>
-          <p:cNvSpPr txBox="1"/>
-          <p:nvPr/>
-        </p:nvSpPr>
-        <p:spPr>
-          <a:xfrm>
-            <a:off x="5468112" y="2103120"/>
-            <a:ext cx="3154680" cy="475488"/>
-          </a:xfrm>
-          <a:prstGeom prst="rect">
-            <a:avLst/>
-          </a:prstGeom>
-          <a:noFill/>
-          <a:ln/>
-        </p:spPr>
-        <p:txBody>
-          <a:bodyPr wrap="square" lIns="0" tIns="0" rIns="0" bIns="0" rtlCol="0" anchor="t"/>
-          <a:lstStyle/>
-          <a:p>
-            <a:pPr indent="0" marL="0">
-              <a:buNone/>
-            </a:pPr>
-            <a:r>
-              <a:rPr lang="en-US" sz="830" dirty="0">
-                <a:solidFill>
-                  <a:srgbClr val="D4D4D8"/>
-                </a:solidFill>
-                <a:latin typeface="Malgun Gothic" pitchFamily="34" charset="0"/>
-                <a:ea typeface="Malgun Gothic" pitchFamily="34" charset="-122"/>
-                <a:cs typeface="Malgun Gothic" pitchFamily="34" charset="-120"/>
-              </a:rPr>
-              <a:t>Flyway 마이그레이션 도입 후 DDL_AUTO=validate</a:t>
-            </a:r>
-            <a:endParaRPr lang="en-US" sz="830" dirty="0"/>
-          </a:p>
-        </p:txBody>
-      </p:sp>
-      <p:sp>
-        <p:nvSpPr>
-          <p:cNvPr id="29" name="Shape 25"/>
+              <a:t>방식</a:t>
+            </a:r>
+            <a:endParaRPr lang="en-US" sz="1100" dirty="0"/>
+          </a:p>
+        </p:txBody>
+      </p:sp>
+      <p:sp>
+        <p:nvSpPr>
+          <p:cNvPr id="26" name="Text 24"/>
+          <p:cNvSpPr txBox="1"/>
+          <p:nvPr/>
+        </p:nvSpPr>
+        <p:spPr>
+          <a:xfrm>
+            <a:off x="1371600" y="3703320"/>
+            <a:ext cx="7315200" cy="365760"/>
+          </a:xfrm>
+          <a:prstGeom prst="rect">
+            <a:avLst/>
+          </a:prstGeom>
+          <a:noFill/>
+          <a:ln/>
+        </p:spPr>
+        <p:txBody>
+          <a:bodyPr wrap="square" lIns="0" tIns="0" rIns="0" bIns="0" rtlCol="0" anchor="ctr"/>
+          <a:lstStyle/>
+          <a:p>
+            <a:pPr indent="0" marL="0">
+              <a:buNone/>
+            </a:pPr>
+            <a:r>
+              <a:rPr lang="en-US" sz="950" dirty="0">
+                <a:solidFill>
+                  <a:srgbClr val="18181B"/>
+                </a:solidFill>
+                <a:latin typeface="Malgun Gothic" pitchFamily="34" charset="0"/>
+                <a:ea typeface="Malgun Gothic" pitchFamily="34" charset="-122"/>
+                <a:cs typeface="Malgun Gothic" pitchFamily="34" charset="-120"/>
+              </a:rPr>
+              <a:t>AI 도구(Claude Code)로 구현 속도를 높이고, 설계 결정 · 원인 분석 · 검증은 직접 — 결정 54건을 문서로 남김</a:t>
+            </a:r>
+            <a:endParaRPr lang="en-US" sz="950" dirty="0"/>
+          </a:p>
+        </p:txBody>
+      </p:sp>
+      <p:sp>
+        <p:nvSpPr>
+          <p:cNvPr id="27" name="Shape 25"/>
           <p:cNvSpPr/>
           <p:nvPr/>
         </p:nvSpPr>
         <p:spPr>
           <a:xfrm>
-            <a:off x="4846320" y="2651760"/>
-            <a:ext cx="502920" cy="219456"/>
-          </a:xfrm>
-          <a:prstGeom prst="roundRect">
-            <a:avLst>
-              <a:gd name="adj" fmla="val 20833"/>
-            </a:avLst>
-          </a:prstGeom>
-          <a:solidFill>
-            <a:srgbClr val="232326"/>
-          </a:solidFill>
-          <a:ln w="6350">
+            <a:off x="548640" y="4160520"/>
+            <a:ext cx="8138160" cy="0"/>
+          </a:xfrm>
+          <a:prstGeom prst="line">
+            <a:avLst/>
+          </a:prstGeom>
+          <a:noFill/>
+          <a:ln w="9525">
             <a:solidFill>
-              <a:srgbClr val="3F3F46"/>
+              <a:srgbClr val="E4E4E7"/>
             </a:solidFill>
             <a:prstDash val="solid"/>
           </a:ln>
         </p:spPr>
-      </p:sp>
-      <p:sp>
-        <p:nvSpPr>
-          <p:cNvPr id="30" name="Text 26"/>
-          <p:cNvSpPr txBox="1"/>
-          <p:nvPr/>
-        </p:nvSpPr>
-        <p:spPr>
-          <a:xfrm>
-            <a:off x="4846320" y="2651760"/>
-            <a:ext cx="502920" cy="219456"/>
-          </a:xfrm>
-          <a:prstGeom prst="rect">
-            <a:avLst/>
-          </a:prstGeom>
-          <a:noFill/>
-          <a:ln/>
-        </p:spPr>
-        <p:txBody>
-          <a:bodyPr wrap="square" lIns="0" tIns="0" rIns="0" bIns="0" rtlCol="0" anchor="ctr"/>
-          <a:lstStyle/>
-          <a:p>
-            <a:pPr algn="ctr" indent="0" marL="0">
-              <a:buNone/>
-            </a:pPr>
-            <a:r>
-              <a:rPr lang="en-US" sz="750" b="1" dirty="0">
-                <a:solidFill>
-                  <a:srgbClr val="F97316"/>
-                </a:solidFill>
-                <a:latin typeface="Malgun Gothic" pitchFamily="34" charset="0"/>
-                <a:ea typeface="Malgun Gothic" pitchFamily="34" charset="-122"/>
-                <a:cs typeface="Malgun Gothic" pitchFamily="34" charset="-120"/>
-              </a:rPr>
-              <a:t>주소</a:t>
-            </a:r>
-            <a:endParaRPr lang="en-US" sz="750" dirty="0"/>
-          </a:p>
-        </p:txBody>
-      </p:sp>
-      <p:sp>
-        <p:nvSpPr>
-          <p:cNvPr id="31" name="Text 27"/>
-          <p:cNvSpPr txBox="1"/>
-          <p:nvPr/>
-        </p:nvSpPr>
-        <p:spPr>
-          <a:xfrm>
-            <a:off x="5468112" y="2633472"/>
-            <a:ext cx="3154680" cy="475488"/>
-          </a:xfrm>
-          <a:prstGeom prst="rect">
-            <a:avLst/>
-          </a:prstGeom>
-          <a:noFill/>
-          <a:ln/>
-        </p:spPr>
-        <p:txBody>
-          <a:bodyPr wrap="square" lIns="0" tIns="0" rIns="0" bIns="0" rtlCol="0" anchor="t"/>
-          <a:lstStyle/>
-          <a:p>
-            <a:pPr indent="0" marL="0">
-              <a:buNone/>
-            </a:pPr>
-            <a:r>
-              <a:rPr lang="en-US" sz="830" dirty="0">
-                <a:solidFill>
-                  <a:srgbClr val="D4D4D8"/>
-                </a:solidFill>
-                <a:latin typeface="Malgun Gothic" pitchFamily="34" charset="0"/>
-                <a:ea typeface="Malgun Gothic" pitchFamily="34" charset="-122"/>
-                <a:cs typeface="Malgun Gothic" pitchFamily="34" charset="-120"/>
-              </a:rPr>
-              <a:t>FRONTEND_ORIGIN · OAuth 리다이렉트 URI · 브이월드 도메인 · wss 교체</a:t>
-            </a:r>
-            <a:endParaRPr lang="en-US" sz="830" dirty="0"/>
-          </a:p>
-        </p:txBody>
-      </p:sp>
-      <p:sp>
-        <p:nvSpPr>
-          <p:cNvPr id="32" name="Shape 28"/>
-          <p:cNvSpPr/>
-          <p:nvPr/>
-        </p:nvSpPr>
-        <p:spPr>
-          <a:xfrm>
-            <a:off x="4846320" y="3182112"/>
-            <a:ext cx="502920" cy="219456"/>
-          </a:xfrm>
-          <a:prstGeom prst="roundRect">
-            <a:avLst>
-              <a:gd name="adj" fmla="val 20833"/>
-            </a:avLst>
-          </a:prstGeom>
-          <a:solidFill>
-            <a:srgbClr val="232326"/>
-          </a:solidFill>
-          <a:ln w="6350">
-            <a:solidFill>
-              <a:srgbClr val="3F3F46"/>
-            </a:solidFill>
-            <a:prstDash val="solid"/>
-          </a:ln>
-        </p:spPr>
-      </p:sp>
-      <p:sp>
-        <p:nvSpPr>
-          <p:cNvPr id="33" name="Text 29"/>
-          <p:cNvSpPr txBox="1"/>
-          <p:nvPr/>
-        </p:nvSpPr>
-        <p:spPr>
-          <a:xfrm>
-            <a:off x="4846320" y="3182112"/>
-            <a:ext cx="502920" cy="219456"/>
-          </a:xfrm>
-          <a:prstGeom prst="rect">
-            <a:avLst/>
-          </a:prstGeom>
-          <a:noFill/>
-          <a:ln/>
-        </p:spPr>
-        <p:txBody>
-          <a:bodyPr wrap="square" lIns="0" tIns="0" rIns="0" bIns="0" rtlCol="0" anchor="ctr"/>
-          <a:lstStyle/>
-          <a:p>
-            <a:pPr algn="ctr" indent="0" marL="0">
-              <a:buNone/>
-            </a:pPr>
-            <a:r>
-              <a:rPr lang="en-US" sz="750" b="1" dirty="0">
-                <a:solidFill>
-                  <a:srgbClr val="F97316"/>
-                </a:solidFill>
-                <a:latin typeface="Malgun Gothic" pitchFamily="34" charset="0"/>
-                <a:ea typeface="Malgun Gothic" pitchFamily="34" charset="-122"/>
-                <a:cs typeface="Malgun Gothic" pitchFamily="34" charset="-120"/>
-              </a:rPr>
-              <a:t>키</a:t>
-            </a:r>
-            <a:endParaRPr lang="en-US" sz="750" dirty="0"/>
-          </a:p>
-        </p:txBody>
-      </p:sp>
-      <p:sp>
-        <p:nvSpPr>
-          <p:cNvPr id="34" name="Text 30"/>
-          <p:cNvSpPr txBox="1"/>
-          <p:nvPr/>
-        </p:nvSpPr>
-        <p:spPr>
-          <a:xfrm>
-            <a:off x="5468112" y="3163824"/>
-            <a:ext cx="3154680" cy="475488"/>
-          </a:xfrm>
-          <a:prstGeom prst="rect">
-            <a:avLst/>
-          </a:prstGeom>
-          <a:noFill/>
-          <a:ln/>
-        </p:spPr>
-        <p:txBody>
-          <a:bodyPr wrap="square" lIns="0" tIns="0" rIns="0" bIns="0" rtlCol="0" anchor="t"/>
-          <a:lstStyle/>
-          <a:p>
-            <a:pPr indent="0" marL="0">
-              <a:buNone/>
-            </a:pPr>
-            <a:r>
-              <a:rPr lang="en-US" sz="830" dirty="0">
-                <a:solidFill>
-                  <a:srgbClr val="D4D4D8"/>
-                </a:solidFill>
-                <a:latin typeface="Malgun Gothic" pitchFamily="34" charset="0"/>
-                <a:ea typeface="Malgun Gothic" pitchFamily="34" charset="-122"/>
-                <a:cs typeface="Malgun Gothic" pitchFamily="34" charset="-120"/>
-              </a:rPr>
-              <a:t>토스 라이브 키 · FCM · VAPID · 메일 계정 등록</a:t>
-            </a:r>
-            <a:endParaRPr lang="en-US" sz="830" dirty="0"/>
-          </a:p>
-        </p:txBody>
-      </p:sp>
-      <p:sp>
-        <p:nvSpPr>
-          <p:cNvPr id="35" name="Shape 31"/>
-          <p:cNvSpPr/>
-          <p:nvPr/>
-        </p:nvSpPr>
-        <p:spPr>
-          <a:xfrm>
-            <a:off x="4846320" y="3712464"/>
-            <a:ext cx="502920" cy="219456"/>
-          </a:xfrm>
-          <a:prstGeom prst="roundRect">
-            <a:avLst>
-              <a:gd name="adj" fmla="val 20833"/>
-            </a:avLst>
-          </a:prstGeom>
-          <a:solidFill>
-            <a:srgbClr val="232326"/>
-          </a:solidFill>
-          <a:ln w="6350">
-            <a:solidFill>
-              <a:srgbClr val="3F3F46"/>
-            </a:solidFill>
-            <a:prstDash val="solid"/>
-          </a:ln>
-        </p:spPr>
-      </p:sp>
-      <p:sp>
-        <p:nvSpPr>
-          <p:cNvPr id="36" name="Text 32"/>
-          <p:cNvSpPr txBox="1"/>
-          <p:nvPr/>
-        </p:nvSpPr>
-        <p:spPr>
-          <a:xfrm>
-            <a:off x="4846320" y="3712464"/>
-            <a:ext cx="502920" cy="219456"/>
-          </a:xfrm>
-          <a:prstGeom prst="rect">
-            <a:avLst/>
-          </a:prstGeom>
-          <a:noFill/>
-          <a:ln/>
-        </p:spPr>
-        <p:txBody>
-          <a:bodyPr wrap="square" lIns="0" tIns="0" rIns="0" bIns="0" rtlCol="0" anchor="ctr"/>
-          <a:lstStyle/>
-          <a:p>
-            <a:pPr algn="ctr" indent="0" marL="0">
-              <a:buNone/>
-            </a:pPr>
-            <a:r>
-              <a:rPr lang="en-US" sz="750" b="1" dirty="0">
-                <a:solidFill>
-                  <a:srgbClr val="F97316"/>
-                </a:solidFill>
-                <a:latin typeface="Malgun Gothic" pitchFamily="34" charset="0"/>
-                <a:ea typeface="Malgun Gothic" pitchFamily="34" charset="-122"/>
-                <a:cs typeface="Malgun Gothic" pitchFamily="34" charset="-120"/>
-              </a:rPr>
-              <a:t>확인</a:t>
-            </a:r>
-            <a:endParaRPr lang="en-US" sz="750" dirty="0"/>
-          </a:p>
-        </p:txBody>
-      </p:sp>
-      <p:sp>
-        <p:nvSpPr>
-          <p:cNvPr id="37" name="Text 33"/>
-          <p:cNvSpPr txBox="1"/>
-          <p:nvPr/>
-        </p:nvSpPr>
-        <p:spPr>
-          <a:xfrm>
-            <a:off x="5468112" y="3694176"/>
-            <a:ext cx="3154680" cy="475488"/>
-          </a:xfrm>
-          <a:prstGeom prst="rect">
-            <a:avLst/>
-          </a:prstGeom>
-          <a:noFill/>
-          <a:ln/>
-        </p:spPr>
-        <p:txBody>
-          <a:bodyPr wrap="square" lIns="0" tIns="0" rIns="0" bIns="0" rtlCol="0" anchor="t"/>
-          <a:lstStyle/>
-          <a:p>
-            <a:pPr indent="0" marL="0">
-              <a:buNone/>
-            </a:pPr>
-            <a:r>
-              <a:rPr lang="en-US" sz="830" dirty="0">
-                <a:solidFill>
-                  <a:srgbClr val="D4D4D8"/>
-                </a:solidFill>
-                <a:latin typeface="Malgun Gothic" pitchFamily="34" charset="0"/>
-                <a:ea typeface="Malgun Gothic" pitchFamily="34" charset="-122"/>
-                <a:cs typeface="Malgun Gothic" pitchFamily="34" charset="-120"/>
-              </a:rPr>
-              <a:t>배포 후 실제 화면 캡처, 실기기 푸시 검증</a:t>
-            </a:r>
-            <a:endParaRPr lang="en-US" sz="830" dirty="0"/>
-          </a:p>
-        </p:txBody>
-      </p:sp>
-      <p:sp>
-        <p:nvSpPr>
-          <p:cNvPr id="38" name="Text 34"/>
-          <p:cNvSpPr txBox="1"/>
-          <p:nvPr/>
-        </p:nvSpPr>
-        <p:spPr>
-          <a:xfrm>
-            <a:off x="411480" y="4434840"/>
-            <a:ext cx="8321040" cy="228600"/>
-          </a:xfrm>
-          <a:prstGeom prst="rect">
-            <a:avLst/>
-          </a:prstGeom>
-          <a:noFill/>
-          <a:ln/>
-        </p:spPr>
-        <p:txBody>
-          <a:bodyPr wrap="square" lIns="0" tIns="0" rIns="0" bIns="0" rtlCol="0" anchor="t"/>
-          <a:lstStyle/>
-          <a:p>
-            <a:pPr algn="ctr" indent="0" marL="0">
-              <a:buNone/>
-            </a:pPr>
-            <a:r>
-              <a:rPr lang="en-US" sz="950" b="1" dirty="0">
-                <a:solidFill>
-                  <a:srgbClr val="18181B"/>
-                </a:solidFill>
-                <a:latin typeface="Malgun Gothic" pitchFamily="34" charset="0"/>
-                <a:ea typeface="Malgun Gothic" pitchFamily="34" charset="-122"/>
-                <a:cs typeface="Malgun Gothic" pitchFamily="34" charset="-120"/>
-              </a:rPr>
-              <a:t>코드는 완성 — 남은 것은 운영 환경 값과 인프라 구성</a:t>
-            </a:r>
-            <a:endParaRPr lang="en-US" sz="950" dirty="0"/>
-          </a:p>
-        </p:txBody>
       </p:sp>
       <p:sp>
         <p:nvSpPr>
@@ -33962,7 +33416,7 @@
                 <a:ea typeface="Malgun Gothic" pitchFamily="34" charset="-122"/>
                 <a:cs typeface="Malgun Gothic" pitchFamily="34" charset="-120"/>
               </a:rPr>
-              <a:t>다음 개선 과제</a:t>
+              <a:t>배포 준비 현황</a:t>
             </a:r>
             <a:endParaRPr lang="en-US" sz="2100" dirty="0"/>
           </a:p>
@@ -33970,7 +33424,73 @@
       </p:sp>
       <p:sp>
         <p:nvSpPr>
-          <p:cNvPr id="4" name="Text 2"/>
+          <p:cNvPr id="4" name="Shape 2"/>
+          <p:cNvSpPr/>
+          <p:nvPr/>
+        </p:nvSpPr>
+        <p:spPr>
+          <a:xfrm>
+            <a:off x="7447788" y="329184"/>
+            <a:ext cx="1284732" cy="219456"/>
+          </a:xfrm>
+          <a:prstGeom prst="roundRect">
+            <a:avLst>
+              <a:gd name="adj" fmla="val 50000"/>
+            </a:avLst>
+          </a:prstGeom>
+          <a:solidFill>
+            <a:srgbClr val="FFEDD5"/>
+          </a:solidFill>
+          <a:ln w="6350">
+            <a:solidFill>
+              <a:srgbClr val="FFEDD5"/>
+            </a:solidFill>
+            <a:prstDash val="solid"/>
+          </a:ln>
+        </p:spPr>
+      </p:sp>
+      <p:sp>
+        <p:nvSpPr>
+          <p:cNvPr id="5" name="Text 3"/>
+          <p:cNvSpPr txBox="1"/>
+          <p:nvPr/>
+        </p:nvSpPr>
+        <p:spPr>
+          <a:xfrm>
+            <a:off x="7447788" y="329184"/>
+            <a:ext cx="1284732" cy="219456"/>
+          </a:xfrm>
+          <a:prstGeom prst="rect">
+            <a:avLst/>
+          </a:prstGeom>
+          <a:noFill/>
+          <a:ln/>
+        </p:spPr>
+        <p:txBody>
+          <a:bodyPr wrap="square" lIns="0" tIns="0" rIns="0" bIns="0" rtlCol="0" anchor="ctr"/>
+          <a:lstStyle/>
+          <a:p>
+            <a:pPr algn="ctr" indent="0" marL="0">
+              <a:buNone/>
+            </a:pPr>
+            <a:r>
+              <a:rPr lang="en-US" sz="700" b="1" dirty="0">
+                <a:solidFill>
+                  <a:srgbClr val="EA580C"/>
+                </a:solidFill>
+                <a:latin typeface="Malgun Gothic" pitchFamily="34" charset="0"/>
+                <a:ea typeface="Malgun Gothic" pitchFamily="34" charset="-122"/>
+                <a:cs typeface="Malgun Gothic" pitchFamily="34" charset="-120"/>
+              </a:rPr>
+              <a:t>개발 완료 · 배포 직전</a:t>
+            </a:r>
+            <a:endParaRPr lang="en-US" sz="700" dirty="0"/>
+          </a:p>
+        </p:txBody>
+      </p:sp>
+      <p:sp>
+        <p:nvSpPr>
+          <p:cNvPr id="6" name="Text 4"/>
           <p:cNvSpPr txBox="1"/>
           <p:nvPr/>
         </p:nvSpPr>
@@ -34009,136 +33529,23 @@
       </p:sp>
       <p:sp>
         <p:nvSpPr>
-          <p:cNvPr id="5" name="Text 3"/>
-          <p:cNvSpPr txBox="1"/>
-          <p:nvPr/>
-        </p:nvSpPr>
-        <p:spPr>
-          <a:xfrm>
-            <a:off x="548640" y="1143000"/>
-            <a:ext cx="548640" cy="411480"/>
-          </a:xfrm>
-          <a:prstGeom prst="rect">
-            <a:avLst/>
-          </a:prstGeom>
-          <a:noFill/>
-          <a:ln/>
-        </p:spPr>
-        <p:txBody>
-          <a:bodyPr wrap="square" lIns="0" tIns="0" rIns="0" bIns="0" rtlCol="0" anchor="ctr"/>
-          <a:lstStyle/>
-          <a:p>
-            <a:pPr indent="0" marL="0">
-              <a:buNone/>
-            </a:pPr>
-            <a:r>
-              <a:rPr lang="en-US" sz="1300" b="1" dirty="0">
-                <a:solidFill>
-                  <a:srgbClr val="F97316"/>
-                </a:solidFill>
-                <a:latin typeface="Malgun Gothic" pitchFamily="34" charset="0"/>
-                <a:ea typeface="Malgun Gothic" pitchFamily="34" charset="-122"/>
-                <a:cs typeface="Malgun Gothic" pitchFamily="34" charset="-120"/>
-              </a:rPr>
-              <a:t>01</a:t>
-            </a:r>
-            <a:endParaRPr lang="en-US" sz="1300" dirty="0"/>
-          </a:p>
-        </p:txBody>
-      </p:sp>
-      <p:sp>
-        <p:nvSpPr>
-          <p:cNvPr id="6" name="Text 4"/>
-          <p:cNvSpPr txBox="1"/>
-          <p:nvPr/>
-        </p:nvSpPr>
-        <p:spPr>
-          <a:xfrm>
-            <a:off x="1188720" y="1143000"/>
-            <a:ext cx="1737360" cy="411480"/>
-          </a:xfrm>
-          <a:prstGeom prst="rect">
-            <a:avLst/>
-          </a:prstGeom>
-          <a:noFill/>
-          <a:ln/>
-        </p:spPr>
-        <p:txBody>
-          <a:bodyPr wrap="square" lIns="0" tIns="0" rIns="0" bIns="0" rtlCol="0" anchor="ctr"/>
-          <a:lstStyle/>
-          <a:p>
-            <a:pPr indent="0" marL="0">
-              <a:buNone/>
-            </a:pPr>
-            <a:r>
-              <a:rPr lang="en-US" sz="1200" b="1" dirty="0">
-                <a:solidFill>
-                  <a:srgbClr val="18181B"/>
-                </a:solidFill>
-                <a:latin typeface="Malgun Gothic" pitchFamily="34" charset="0"/>
-                <a:ea typeface="Malgun Gothic" pitchFamily="34" charset="-122"/>
-                <a:cs typeface="Malgun Gothic" pitchFamily="34" charset="-120"/>
-              </a:rPr>
-              <a:t>운영 배포</a:t>
-            </a:r>
-            <a:endParaRPr lang="en-US" sz="1200" dirty="0"/>
-          </a:p>
-        </p:txBody>
-      </p:sp>
-      <p:sp>
-        <p:nvSpPr>
-          <p:cNvPr id="7" name="Text 5"/>
-          <p:cNvSpPr txBox="1"/>
-          <p:nvPr/>
-        </p:nvSpPr>
-        <p:spPr>
-          <a:xfrm>
-            <a:off x="3017520" y="1143000"/>
-            <a:ext cx="5669280" cy="411480"/>
-          </a:xfrm>
-          <a:prstGeom prst="rect">
-            <a:avLst/>
-          </a:prstGeom>
-          <a:noFill/>
-          <a:ln/>
-        </p:spPr>
-        <p:txBody>
-          <a:bodyPr wrap="square" lIns="0" tIns="0" rIns="0" bIns="0" rtlCol="0" anchor="ctr"/>
-          <a:lstStyle/>
-          <a:p>
-            <a:pPr indent="0" marL="0">
-              <a:buNone/>
-            </a:pPr>
-            <a:r>
-              <a:rPr lang="en-US" sz="950" dirty="0">
-                <a:solidFill>
-                  <a:srgbClr val="52525B"/>
-                </a:solidFill>
-                <a:latin typeface="Malgun Gothic" pitchFamily="34" charset="0"/>
-                <a:ea typeface="Malgun Gothic" pitchFamily="34" charset="-122"/>
-                <a:cs typeface="Malgun Gothic" pitchFamily="34" charset="-120"/>
-              </a:rPr>
-              <a:t>배포 후 모니터링 · 오류 알림 구성, 실제 화면 캡처를 포트폴리오에 반영</a:t>
-            </a:r>
-            <a:endParaRPr lang="en-US" sz="950" dirty="0"/>
-          </a:p>
-        </p:txBody>
-      </p:sp>
-      <p:sp>
-        <p:nvSpPr>
-          <p:cNvPr id="8" name="Shape 6"/>
+          <p:cNvPr id="7" name="Shape 5"/>
           <p:cNvSpPr/>
           <p:nvPr/>
         </p:nvSpPr>
         <p:spPr>
           <a:xfrm>
-            <a:off x="548640" y="1709928"/>
-            <a:ext cx="8138160" cy="0"/>
-          </a:xfrm>
-          <a:prstGeom prst="line">
-            <a:avLst/>
-          </a:prstGeom>
-          <a:noFill/>
+            <a:off x="411480" y="1005840"/>
+            <a:ext cx="4069080" cy="3291840"/>
+          </a:xfrm>
+          <a:prstGeom prst="roundRect">
+            <a:avLst>
+              <a:gd name="adj" fmla="val 1667"/>
+            </a:avLst>
+          </a:prstGeom>
+          <a:solidFill>
+            <a:srgbClr val="FFFFFF"/>
+          </a:solidFill>
           <a:ln w="9525">
             <a:solidFill>
               <a:srgbClr val="E4E4E7"/>
@@ -34147,71 +33554,56 @@
           </a:ln>
         </p:spPr>
       </p:sp>
-      <p:sp>
-        <p:nvSpPr>
-          <p:cNvPr id="9" name="Text 7"/>
-          <p:cNvSpPr txBox="1"/>
-          <p:nvPr/>
-        </p:nvSpPr>
-        <p:spPr>
-          <a:xfrm>
-            <a:off x="548640" y="1920240"/>
-            <a:ext cx="548640" cy="411480"/>
-          </a:xfrm>
-          <a:prstGeom prst="rect">
-            <a:avLst/>
-          </a:prstGeom>
-          <a:noFill/>
-          <a:ln/>
-        </p:spPr>
-        <p:txBody>
-          <a:bodyPr wrap="square" lIns="0" tIns="0" rIns="0" bIns="0" rtlCol="0" anchor="ctr"/>
-          <a:lstStyle/>
-          <a:p>
-            <a:pPr indent="0" marL="0">
-              <a:buNone/>
-            </a:pPr>
-            <a:r>
-              <a:rPr lang="en-US" sz="1300" b="1" dirty="0">
-                <a:solidFill>
-                  <a:srgbClr val="F97316"/>
-                </a:solidFill>
-                <a:latin typeface="Malgun Gothic" pitchFamily="34" charset="0"/>
-                <a:ea typeface="Malgun Gothic" pitchFamily="34" charset="-122"/>
-                <a:cs typeface="Malgun Gothic" pitchFamily="34" charset="-120"/>
-              </a:rPr>
-              <a:t>02</a:t>
-            </a:r>
-            <a:endParaRPr lang="en-US" sz="1300" dirty="0"/>
-          </a:p>
-        </p:txBody>
-      </p:sp>
-      <p:sp>
-        <p:nvSpPr>
-          <p:cNvPr id="10" name="Text 8"/>
-          <p:cNvSpPr txBox="1"/>
-          <p:nvPr/>
-        </p:nvSpPr>
-        <p:spPr>
-          <a:xfrm>
-            <a:off x="1188720" y="1920240"/>
-            <a:ext cx="1737360" cy="411480"/>
-          </a:xfrm>
-          <a:prstGeom prst="rect">
-            <a:avLst/>
-          </a:prstGeom>
-          <a:noFill/>
-          <a:ln/>
-        </p:spPr>
-        <p:txBody>
-          <a:bodyPr wrap="square" lIns="0" tIns="0" rIns="0" bIns="0" rtlCol="0" anchor="ctr"/>
-          <a:lstStyle/>
-          <a:p>
-            <a:pPr indent="0" marL="0">
-              <a:buNone/>
-            </a:pPr>
-            <a:r>
-              <a:rPr lang="en-US" sz="1200" b="1" dirty="0">
+      <p:pic>
+        <p:nvPicPr>
+          <p:cNvPr id="8" name="Image 0" descr="preencoded.png">    </p:cNvPr>
+          <p:cNvPicPr>
+            <a:picLocks noChangeAspect="1"/>
+          </p:cNvPicPr>
+          <p:nvPr/>
+        </p:nvPicPr>
+        <p:blipFill>
+          <a:blip r:embed="rId1"/>
+          <a:stretch>
+            <a:fillRect/>
+          </a:stretch>
+        </p:blipFill>
+        <p:spPr>
+          <a:xfrm>
+            <a:off x="594360" y="1170432"/>
+            <a:ext cx="256032" cy="256032"/>
+          </a:xfrm>
+          <a:prstGeom prst="rect">
+            <a:avLst/>
+          </a:prstGeom>
+        </p:spPr>
+      </p:pic>
+      <p:sp>
+        <p:nvSpPr>
+          <p:cNvPr id="9" name="Text 6"/>
+          <p:cNvSpPr txBox="1"/>
+          <p:nvPr/>
+        </p:nvSpPr>
+        <p:spPr>
+          <a:xfrm>
+            <a:off x="941832" y="1170432"/>
+            <a:ext cx="2743200" cy="256032"/>
+          </a:xfrm>
+          <a:prstGeom prst="rect">
+            <a:avLst/>
+          </a:prstGeom>
+          <a:noFill/>
+          <a:ln/>
+        </p:spPr>
+        <p:txBody>
+          <a:bodyPr wrap="square" lIns="0" tIns="0" rIns="0" bIns="0" rtlCol="0" anchor="t"/>
+          <a:lstStyle/>
+          <a:p>
+            <a:pPr indent="0" marL="0">
+              <a:buNone/>
+            </a:pPr>
+            <a:r>
+              <a:rPr lang="en-US" sz="1100" b="1" dirty="0">
                 <a:solidFill>
                   <a:srgbClr val="18181B"/>
                 </a:solidFill>
@@ -34219,38 +33611,77 @@
                 <a:ea typeface="Malgun Gothic" pitchFamily="34" charset="-122"/>
                 <a:cs typeface="Malgun Gothic" pitchFamily="34" charset="-120"/>
               </a:rPr>
-              <a:t>기준표 DB화</a:t>
-            </a:r>
-            <a:endParaRPr lang="en-US" sz="1200" dirty="0"/>
-          </a:p>
-        </p:txBody>
-      </p:sp>
-      <p:sp>
-        <p:nvSpPr>
-          <p:cNvPr id="11" name="Text 9"/>
-          <p:cNvSpPr txBox="1"/>
-          <p:nvPr/>
-        </p:nvSpPr>
-        <p:spPr>
-          <a:xfrm>
-            <a:off x="3017520" y="1920240"/>
-            <a:ext cx="5669280" cy="411480"/>
-          </a:xfrm>
-          <a:prstGeom prst="rect">
-            <a:avLst/>
-          </a:prstGeom>
-          <a:noFill/>
-          <a:ln/>
-        </p:spPr>
-        <p:txBody>
-          <a:bodyPr wrap="square" lIns="0" tIns="0" rIns="0" bIns="0" rtlCol="0" anchor="ctr"/>
-          <a:lstStyle/>
-          <a:p>
-            <a:pPr indent="0" marL="0">
-              <a:buNone/>
-            </a:pPr>
-            <a:r>
-              <a:rPr lang="en-US" sz="950" dirty="0">
+              <a:t>이미 준비된 것</a:t>
+            </a:r>
+            <a:endParaRPr lang="en-US" sz="1100" dirty="0"/>
+          </a:p>
+        </p:txBody>
+      </p:sp>
+      <p:sp>
+        <p:nvSpPr>
+          <p:cNvPr id="10" name="Text 7"/>
+          <p:cNvSpPr txBox="1"/>
+          <p:nvPr/>
+        </p:nvSpPr>
+        <p:spPr>
+          <a:xfrm>
+            <a:off x="621792" y="1572768"/>
+            <a:ext cx="182880" cy="274320"/>
+          </a:xfrm>
+          <a:prstGeom prst="rect">
+            <a:avLst/>
+          </a:prstGeom>
+          <a:noFill/>
+          <a:ln/>
+        </p:spPr>
+        <p:txBody>
+          <a:bodyPr wrap="square" lIns="0" tIns="0" rIns="0" bIns="0" rtlCol="0" anchor="t"/>
+          <a:lstStyle/>
+          <a:p>
+            <a:pPr indent="0" marL="0">
+              <a:buNone/>
+            </a:pPr>
+            <a:r>
+              <a:rPr lang="en-US" sz="1000" b="1" dirty="0">
+                <a:solidFill>
+                  <a:srgbClr val="16A34A"/>
+                </a:solidFill>
+                <a:latin typeface="Malgun Gothic" pitchFamily="34" charset="0"/>
+                <a:ea typeface="Malgun Gothic" pitchFamily="34" charset="-122"/>
+                <a:cs typeface="Malgun Gothic" pitchFamily="34" charset="-120"/>
+              </a:rPr>
+              <a:t>✓</a:t>
+            </a:r>
+            <a:endParaRPr lang="en-US" sz="1000" dirty="0"/>
+          </a:p>
+        </p:txBody>
+      </p:sp>
+      <p:sp>
+        <p:nvSpPr>
+          <p:cNvPr id="11" name="Text 8"/>
+          <p:cNvSpPr txBox="1"/>
+          <p:nvPr/>
+        </p:nvSpPr>
+        <p:spPr>
+          <a:xfrm>
+            <a:off x="841248" y="1572768"/>
+            <a:ext cx="3520440" cy="475488"/>
+          </a:xfrm>
+          <a:prstGeom prst="rect">
+            <a:avLst/>
+          </a:prstGeom>
+          <a:noFill/>
+          <a:ln/>
+        </p:spPr>
+        <p:txBody>
+          <a:bodyPr wrap="square" lIns="0" tIns="0" rIns="0" bIns="0" rtlCol="0" anchor="t"/>
+          <a:lstStyle/>
+          <a:p>
+            <a:pPr indent="0" marL="0">
+              <a:buNone/>
+            </a:pPr>
+            <a:r>
+              <a:rPr lang="en-US" sz="830" dirty="0">
                 <a:solidFill>
                   <a:srgbClr val="52525B"/>
                 </a:solidFill>
@@ -34258,170 +33689,436 @@
                 <a:ea typeface="Malgun Gothic" pitchFamily="34" charset="-122"/>
                 <a:cs typeface="Malgun Gothic" pitchFamily="34" charset="-120"/>
               </a:rPr>
-              <a:t>상수로 관리 중인 위험 기준(RiskThresholds)을 DB 기준표로 옮겨 기준금리 · HUG 기준 변경에 대응</a:t>
-            </a:r>
-            <a:endParaRPr lang="en-US" sz="950" dirty="0"/>
-          </a:p>
-        </p:txBody>
-      </p:sp>
-      <p:sp>
-        <p:nvSpPr>
-          <p:cNvPr id="12" name="Shape 10"/>
+              <a:t>운영 DB 드라이버(PostgreSQL) 포함, DB 주소·DDL 설정을 환경변수로 분리 (운영은 validate)</a:t>
+            </a:r>
+            <a:endParaRPr lang="en-US" sz="830" dirty="0"/>
+          </a:p>
+        </p:txBody>
+      </p:sp>
+      <p:sp>
+        <p:nvSpPr>
+          <p:cNvPr id="12" name="Text 9"/>
+          <p:cNvSpPr txBox="1"/>
+          <p:nvPr/>
+        </p:nvSpPr>
+        <p:spPr>
+          <a:xfrm>
+            <a:off x="621792" y="2103120"/>
+            <a:ext cx="182880" cy="274320"/>
+          </a:xfrm>
+          <a:prstGeom prst="rect">
+            <a:avLst/>
+          </a:prstGeom>
+          <a:noFill/>
+          <a:ln/>
+        </p:spPr>
+        <p:txBody>
+          <a:bodyPr wrap="square" lIns="0" tIns="0" rIns="0" bIns="0" rtlCol="0" anchor="t"/>
+          <a:lstStyle/>
+          <a:p>
+            <a:pPr indent="0" marL="0">
+              <a:buNone/>
+            </a:pPr>
+            <a:r>
+              <a:rPr lang="en-US" sz="1000" b="1" dirty="0">
+                <a:solidFill>
+                  <a:srgbClr val="16A34A"/>
+                </a:solidFill>
+                <a:latin typeface="Malgun Gothic" pitchFamily="34" charset="0"/>
+                <a:ea typeface="Malgun Gothic" pitchFamily="34" charset="-122"/>
+                <a:cs typeface="Malgun Gothic" pitchFamily="34" charset="-120"/>
+              </a:rPr>
+              <a:t>✓</a:t>
+            </a:r>
+            <a:endParaRPr lang="en-US" sz="1000" dirty="0"/>
+          </a:p>
+        </p:txBody>
+      </p:sp>
+      <p:sp>
+        <p:nvSpPr>
+          <p:cNvPr id="13" name="Text 10"/>
+          <p:cNvSpPr txBox="1"/>
+          <p:nvPr/>
+        </p:nvSpPr>
+        <p:spPr>
+          <a:xfrm>
+            <a:off x="841248" y="2103120"/>
+            <a:ext cx="3520440" cy="475488"/>
+          </a:xfrm>
+          <a:prstGeom prst="rect">
+            <a:avLst/>
+          </a:prstGeom>
+          <a:noFill/>
+          <a:ln/>
+        </p:spPr>
+        <p:txBody>
+          <a:bodyPr wrap="square" lIns="0" tIns="0" rIns="0" bIns="0" rtlCol="0" anchor="t"/>
+          <a:lstStyle/>
+          <a:p>
+            <a:pPr indent="0" marL="0">
+              <a:buNone/>
+            </a:pPr>
+            <a:r>
+              <a:rPr lang="en-US" sz="830" dirty="0">
+                <a:solidFill>
+                  <a:srgbClr val="52525B"/>
+                </a:solidFill>
+                <a:latin typeface="Malgun Gothic" pitchFamily="34" charset="0"/>
+                <a:ea typeface="Malgun Gothic" pitchFamily="34" charset="-122"/>
+                <a:cs typeface="Malgun Gothic" pitchFamily="34" charset="-120"/>
+              </a:rPr>
+              <a:t>운영 환경에서 secure 쿠키 · 보안 헤더 · H2 콘솔 차단</a:t>
+            </a:r>
+            <a:endParaRPr lang="en-US" sz="830" dirty="0"/>
+          </a:p>
+        </p:txBody>
+      </p:sp>
+      <p:sp>
+        <p:nvSpPr>
+          <p:cNvPr id="14" name="Text 11"/>
+          <p:cNvSpPr txBox="1"/>
+          <p:nvPr/>
+        </p:nvSpPr>
+        <p:spPr>
+          <a:xfrm>
+            <a:off x="621792" y="2633472"/>
+            <a:ext cx="182880" cy="274320"/>
+          </a:xfrm>
+          <a:prstGeom prst="rect">
+            <a:avLst/>
+          </a:prstGeom>
+          <a:noFill/>
+          <a:ln/>
+        </p:spPr>
+        <p:txBody>
+          <a:bodyPr wrap="square" lIns="0" tIns="0" rIns="0" bIns="0" rtlCol="0" anchor="t"/>
+          <a:lstStyle/>
+          <a:p>
+            <a:pPr indent="0" marL="0">
+              <a:buNone/>
+            </a:pPr>
+            <a:r>
+              <a:rPr lang="en-US" sz="1000" b="1" dirty="0">
+                <a:solidFill>
+                  <a:srgbClr val="16A34A"/>
+                </a:solidFill>
+                <a:latin typeface="Malgun Gothic" pitchFamily="34" charset="0"/>
+                <a:ea typeface="Malgun Gothic" pitchFamily="34" charset="-122"/>
+                <a:cs typeface="Malgun Gothic" pitchFamily="34" charset="-120"/>
+              </a:rPr>
+              <a:t>✓</a:t>
+            </a:r>
+            <a:endParaRPr lang="en-US" sz="1000" dirty="0"/>
+          </a:p>
+        </p:txBody>
+      </p:sp>
+      <p:sp>
+        <p:nvSpPr>
+          <p:cNvPr id="15" name="Text 12"/>
+          <p:cNvSpPr txBox="1"/>
+          <p:nvPr/>
+        </p:nvSpPr>
+        <p:spPr>
+          <a:xfrm>
+            <a:off x="841248" y="2633472"/>
+            <a:ext cx="3520440" cy="475488"/>
+          </a:xfrm>
+          <a:prstGeom prst="rect">
+            <a:avLst/>
+          </a:prstGeom>
+          <a:noFill/>
+          <a:ln/>
+        </p:spPr>
+        <p:txBody>
+          <a:bodyPr wrap="square" lIns="0" tIns="0" rIns="0" bIns="0" rtlCol="0" anchor="t"/>
+          <a:lstStyle/>
+          <a:p>
+            <a:pPr indent="0" marL="0">
+              <a:buNone/>
+            </a:pPr>
+            <a:r>
+              <a:rPr lang="en-US" sz="830" dirty="0">
+                <a:solidFill>
+                  <a:srgbClr val="52525B"/>
+                </a:solidFill>
+                <a:latin typeface="Malgun Gothic" pitchFamily="34" charset="0"/>
+                <a:ea typeface="Malgun Gothic" pitchFamily="34" charset="-122"/>
+                <a:cs typeface="Malgun Gothic" pitchFamily="34" charset="-120"/>
+              </a:rPr>
+              <a:t>WebSocket 허용 Origin과 메일 링크 주소를 FRONTEND_ORIGIN 한 곳에서 관리</a:t>
+            </a:r>
+            <a:endParaRPr lang="en-US" sz="830" dirty="0"/>
+          </a:p>
+        </p:txBody>
+      </p:sp>
+      <p:sp>
+        <p:nvSpPr>
+          <p:cNvPr id="16" name="Text 13"/>
+          <p:cNvSpPr txBox="1"/>
+          <p:nvPr/>
+        </p:nvSpPr>
+        <p:spPr>
+          <a:xfrm>
+            <a:off x="621792" y="3163824"/>
+            <a:ext cx="182880" cy="274320"/>
+          </a:xfrm>
+          <a:prstGeom prst="rect">
+            <a:avLst/>
+          </a:prstGeom>
+          <a:noFill/>
+          <a:ln/>
+        </p:spPr>
+        <p:txBody>
+          <a:bodyPr wrap="square" lIns="0" tIns="0" rIns="0" bIns="0" rtlCol="0" anchor="t"/>
+          <a:lstStyle/>
+          <a:p>
+            <a:pPr indent="0" marL="0">
+              <a:buNone/>
+            </a:pPr>
+            <a:r>
+              <a:rPr lang="en-US" sz="1000" b="1" dirty="0">
+                <a:solidFill>
+                  <a:srgbClr val="16A34A"/>
+                </a:solidFill>
+                <a:latin typeface="Malgun Gothic" pitchFamily="34" charset="0"/>
+                <a:ea typeface="Malgun Gothic" pitchFamily="34" charset="-122"/>
+                <a:cs typeface="Malgun Gothic" pitchFamily="34" charset="-120"/>
+              </a:rPr>
+              <a:t>✓</a:t>
+            </a:r>
+            <a:endParaRPr lang="en-US" sz="1000" dirty="0"/>
+          </a:p>
+        </p:txBody>
+      </p:sp>
+      <p:sp>
+        <p:nvSpPr>
+          <p:cNvPr id="17" name="Text 14"/>
+          <p:cNvSpPr txBox="1"/>
+          <p:nvPr/>
+        </p:nvSpPr>
+        <p:spPr>
+          <a:xfrm>
+            <a:off x="841248" y="3163824"/>
+            <a:ext cx="3520440" cy="475488"/>
+          </a:xfrm>
+          <a:prstGeom prst="rect">
+            <a:avLst/>
+          </a:prstGeom>
+          <a:noFill/>
+          <a:ln/>
+        </p:spPr>
+        <p:txBody>
+          <a:bodyPr wrap="square" lIns="0" tIns="0" rIns="0" bIns="0" rtlCol="0" anchor="t"/>
+          <a:lstStyle/>
+          <a:p>
+            <a:pPr indent="0" marL="0">
+              <a:buNone/>
+            </a:pPr>
+            <a:r>
+              <a:rPr lang="en-US" sz="830" dirty="0">
+                <a:solidFill>
+                  <a:srgbClr val="52525B"/>
+                </a:solidFill>
+                <a:latin typeface="Malgun Gothic" pitchFamily="34" charset="0"/>
+                <a:ea typeface="Malgun Gothic" pitchFamily="34" charset="-122"/>
+                <a:cs typeface="Malgun Gothic" pitchFamily="34" charset="-120"/>
+              </a:rPr>
+              <a:t>모든 외부 키를 .env로 분리, 키가 없으면 해당 조회만 건너뛰고 분석은 동작</a:t>
+            </a:r>
+            <a:endParaRPr lang="en-US" sz="830" dirty="0"/>
+          </a:p>
+        </p:txBody>
+      </p:sp>
+      <p:sp>
+        <p:nvSpPr>
+          <p:cNvPr id="18" name="Text 15"/>
+          <p:cNvSpPr txBox="1"/>
+          <p:nvPr/>
+        </p:nvSpPr>
+        <p:spPr>
+          <a:xfrm>
+            <a:off x="621792" y="3694176"/>
+            <a:ext cx="182880" cy="274320"/>
+          </a:xfrm>
+          <a:prstGeom prst="rect">
+            <a:avLst/>
+          </a:prstGeom>
+          <a:noFill/>
+          <a:ln/>
+        </p:spPr>
+        <p:txBody>
+          <a:bodyPr wrap="square" lIns="0" tIns="0" rIns="0" bIns="0" rtlCol="0" anchor="t"/>
+          <a:lstStyle/>
+          <a:p>
+            <a:pPr indent="0" marL="0">
+              <a:buNone/>
+            </a:pPr>
+            <a:r>
+              <a:rPr lang="en-US" sz="1000" b="1" dirty="0">
+                <a:solidFill>
+                  <a:srgbClr val="16A34A"/>
+                </a:solidFill>
+                <a:latin typeface="Malgun Gothic" pitchFamily="34" charset="0"/>
+                <a:ea typeface="Malgun Gothic" pitchFamily="34" charset="-122"/>
+                <a:cs typeface="Malgun Gothic" pitchFamily="34" charset="-120"/>
+              </a:rPr>
+              <a:t>✓</a:t>
+            </a:r>
+            <a:endParaRPr lang="en-US" sz="1000" dirty="0"/>
+          </a:p>
+        </p:txBody>
+      </p:sp>
+      <p:sp>
+        <p:nvSpPr>
+          <p:cNvPr id="19" name="Text 16"/>
+          <p:cNvSpPr txBox="1"/>
+          <p:nvPr/>
+        </p:nvSpPr>
+        <p:spPr>
+          <a:xfrm>
+            <a:off x="841248" y="3694176"/>
+            <a:ext cx="3520440" cy="475488"/>
+          </a:xfrm>
+          <a:prstGeom prst="rect">
+            <a:avLst/>
+          </a:prstGeom>
+          <a:noFill/>
+          <a:ln/>
+        </p:spPr>
+        <p:txBody>
+          <a:bodyPr wrap="square" lIns="0" tIns="0" rIns="0" bIns="0" rtlCol="0" anchor="t"/>
+          <a:lstStyle/>
+          <a:p>
+            <a:pPr indent="0" marL="0">
+              <a:buNone/>
+            </a:pPr>
+            <a:r>
+              <a:rPr lang="en-US" sz="830" dirty="0">
+                <a:solidFill>
+                  <a:srgbClr val="52525B"/>
+                </a:solidFill>
+                <a:latin typeface="Malgun Gothic" pitchFamily="34" charset="0"/>
+                <a:ea typeface="Malgun Gothic" pitchFamily="34" charset="-122"/>
+                <a:cs typeface="Malgun Gothic" pitchFamily="34" charset="-120"/>
+              </a:rPr>
+              <a:t>GitHub Actions CI — 백엔드 테스트 · 웹 lint·타입·빌드·audit · 앱 analyze·test 자동 실행 (테스트 328개)</a:t>
+            </a:r>
+            <a:endParaRPr lang="en-US" sz="830" dirty="0"/>
+          </a:p>
+        </p:txBody>
+      </p:sp>
+      <p:sp>
+        <p:nvSpPr>
+          <p:cNvPr id="20" name="Shape 17"/>
           <p:cNvSpPr/>
           <p:nvPr/>
         </p:nvSpPr>
         <p:spPr>
           <a:xfrm>
-            <a:off x="548640" y="2487168"/>
-            <a:ext cx="8138160" cy="0"/>
-          </a:xfrm>
-          <a:prstGeom prst="line">
-            <a:avLst/>
-          </a:prstGeom>
-          <a:noFill/>
+            <a:off x="4663440" y="1005840"/>
+            <a:ext cx="4069080" cy="3291840"/>
+          </a:xfrm>
+          <a:prstGeom prst="roundRect">
+            <a:avLst>
+              <a:gd name="adj" fmla="val 1667"/>
+            </a:avLst>
+          </a:prstGeom>
+          <a:solidFill>
+            <a:srgbClr val="18181A"/>
+          </a:solidFill>
           <a:ln w="9525">
             <a:solidFill>
-              <a:srgbClr val="E4E4E7"/>
+              <a:srgbClr val="18181A"/>
             </a:solidFill>
             <a:prstDash val="solid"/>
           </a:ln>
         </p:spPr>
       </p:sp>
-      <p:sp>
-        <p:nvSpPr>
-          <p:cNvPr id="13" name="Text 11"/>
-          <p:cNvSpPr txBox="1"/>
-          <p:nvPr/>
-        </p:nvSpPr>
-        <p:spPr>
-          <a:xfrm>
-            <a:off x="548640" y="2697480"/>
-            <a:ext cx="548640" cy="411480"/>
-          </a:xfrm>
-          <a:prstGeom prst="rect">
-            <a:avLst/>
-          </a:prstGeom>
-          <a:noFill/>
-          <a:ln/>
-        </p:spPr>
-        <p:txBody>
-          <a:bodyPr wrap="square" lIns="0" tIns="0" rIns="0" bIns="0" rtlCol="0" anchor="ctr"/>
-          <a:lstStyle/>
-          <a:p>
-            <a:pPr indent="0" marL="0">
-              <a:buNone/>
-            </a:pPr>
-            <a:r>
-              <a:rPr lang="en-US" sz="1300" b="1" dirty="0">
-                <a:solidFill>
-                  <a:srgbClr val="F97316"/>
-                </a:solidFill>
-                <a:latin typeface="Malgun Gothic" pitchFamily="34" charset="0"/>
-                <a:ea typeface="Malgun Gothic" pitchFamily="34" charset="-122"/>
-                <a:cs typeface="Malgun Gothic" pitchFamily="34" charset="-120"/>
-              </a:rPr>
-              <a:t>03</a:t>
-            </a:r>
-            <a:endParaRPr lang="en-US" sz="1300" dirty="0"/>
-          </a:p>
-        </p:txBody>
-      </p:sp>
-      <p:sp>
-        <p:nvSpPr>
-          <p:cNvPr id="14" name="Text 12"/>
-          <p:cNvSpPr txBox="1"/>
-          <p:nvPr/>
-        </p:nvSpPr>
-        <p:spPr>
-          <a:xfrm>
-            <a:off x="1188720" y="2697480"/>
-            <a:ext cx="1737360" cy="411480"/>
-          </a:xfrm>
-          <a:prstGeom prst="rect">
-            <a:avLst/>
-          </a:prstGeom>
-          <a:noFill/>
-          <a:ln/>
-        </p:spPr>
-        <p:txBody>
-          <a:bodyPr wrap="square" lIns="0" tIns="0" rIns="0" bIns="0" rtlCol="0" anchor="ctr"/>
-          <a:lstStyle/>
-          <a:p>
-            <a:pPr indent="0" marL="0">
-              <a:buNone/>
-            </a:pPr>
-            <a:r>
-              <a:rPr lang="en-US" sz="1200" b="1" dirty="0">
-                <a:solidFill>
-                  <a:srgbClr val="18181B"/>
-                </a:solidFill>
-                <a:latin typeface="Malgun Gothic" pitchFamily="34" charset="0"/>
-                <a:ea typeface="Malgun Gothic" pitchFamily="34" charset="-122"/>
-                <a:cs typeface="Malgun Gothic" pitchFamily="34" charset="-120"/>
-              </a:rPr>
-              <a:t>앱 출시 준비</a:t>
-            </a:r>
-            <a:endParaRPr lang="en-US" sz="1200" dirty="0"/>
-          </a:p>
-        </p:txBody>
-      </p:sp>
-      <p:sp>
-        <p:nvSpPr>
-          <p:cNvPr id="15" name="Text 13"/>
-          <p:cNvSpPr txBox="1"/>
-          <p:nvPr/>
-        </p:nvSpPr>
-        <p:spPr>
-          <a:xfrm>
-            <a:off x="3017520" y="2697480"/>
-            <a:ext cx="5669280" cy="411480"/>
-          </a:xfrm>
-          <a:prstGeom prst="rect">
-            <a:avLst/>
-          </a:prstGeom>
-          <a:noFill/>
-          <a:ln/>
-        </p:spPr>
-        <p:txBody>
-          <a:bodyPr wrap="square" lIns="0" tIns="0" rIns="0" bIns="0" rtlCol="0" anchor="ctr"/>
-          <a:lstStyle/>
-          <a:p>
-            <a:pPr indent="0" marL="0">
-              <a:buNone/>
-            </a:pPr>
-            <a:r>
-              <a:rPr lang="en-US" sz="950" dirty="0">
-                <a:solidFill>
-                  <a:srgbClr val="52525B"/>
-                </a:solidFill>
-                <a:latin typeface="Malgun Gothic" pitchFamily="34" charset="0"/>
-                <a:ea typeface="Malgun Gothic" pitchFamily="34" charset="-122"/>
-                <a:cs typeface="Malgun Gothic" pitchFamily="34" charset="-120"/>
-              </a:rPr>
-              <a:t>iOS 푸시 실기기 검증, 다가구 · 토지 등기부 실제 샘플로 파서 추가 검증</a:t>
-            </a:r>
-            <a:endParaRPr lang="en-US" sz="950" dirty="0"/>
-          </a:p>
-        </p:txBody>
-      </p:sp>
-      <p:sp>
-        <p:nvSpPr>
-          <p:cNvPr id="16" name="Shape 14"/>
+      <p:pic>
+        <p:nvPicPr>
+          <p:cNvPr id="21" name="Image 1" descr="preencoded.png">    </p:cNvPr>
+          <p:cNvPicPr>
+            <a:picLocks noChangeAspect="1"/>
+          </p:cNvPicPr>
+          <p:nvPr/>
+        </p:nvPicPr>
+        <p:blipFill>
+          <a:blip r:embed="rId2"/>
+          <a:stretch>
+            <a:fillRect/>
+          </a:stretch>
+        </p:blipFill>
+        <p:spPr>
+          <a:xfrm>
+            <a:off x="4846320" y="1170432"/>
+            <a:ext cx="256032" cy="256032"/>
+          </a:xfrm>
+          <a:prstGeom prst="rect">
+            <a:avLst/>
+          </a:prstGeom>
+        </p:spPr>
+      </p:pic>
+      <p:sp>
+        <p:nvSpPr>
+          <p:cNvPr id="22" name="Text 18"/>
+          <p:cNvSpPr txBox="1"/>
+          <p:nvPr/>
+        </p:nvSpPr>
+        <p:spPr>
+          <a:xfrm>
+            <a:off x="5193792" y="1170432"/>
+            <a:ext cx="2743200" cy="256032"/>
+          </a:xfrm>
+          <a:prstGeom prst="rect">
+            <a:avLst/>
+          </a:prstGeom>
+          <a:noFill/>
+          <a:ln/>
+        </p:spPr>
+        <p:txBody>
+          <a:bodyPr wrap="square" lIns="0" tIns="0" rIns="0" bIns="0" rtlCol="0" anchor="t"/>
+          <a:lstStyle/>
+          <a:p>
+            <a:pPr indent="0" marL="0">
+              <a:buNone/>
+            </a:pPr>
+            <a:r>
+              <a:rPr lang="en-US" sz="1100" b="1" dirty="0">
+                <a:solidFill>
+                  <a:srgbClr val="FFFFFF"/>
+                </a:solidFill>
+                <a:latin typeface="Malgun Gothic" pitchFamily="34" charset="0"/>
+                <a:ea typeface="Malgun Gothic" pitchFamily="34" charset="-122"/>
+                <a:cs typeface="Malgun Gothic" pitchFamily="34" charset="-120"/>
+              </a:rPr>
+              <a:t>배포할 때 할 일</a:t>
+            </a:r>
+            <a:endParaRPr lang="en-US" sz="1100" dirty="0"/>
+          </a:p>
+        </p:txBody>
+      </p:sp>
+      <p:sp>
+        <p:nvSpPr>
+          <p:cNvPr id="23" name="Shape 19"/>
           <p:cNvSpPr/>
           <p:nvPr/>
         </p:nvSpPr>
         <p:spPr>
           <a:xfrm>
-            <a:off x="548640" y="3264408"/>
-            <a:ext cx="8138160" cy="0"/>
-          </a:xfrm>
-          <a:prstGeom prst="line">
-            <a:avLst/>
-          </a:prstGeom>
-          <a:noFill/>
-          <a:ln w="9525">
+            <a:off x="4846320" y="1591056"/>
+            <a:ext cx="502920" cy="219456"/>
+          </a:xfrm>
+          <a:prstGeom prst="roundRect">
+            <a:avLst>
+              <a:gd name="adj" fmla="val 20833"/>
+            </a:avLst>
+          </a:prstGeom>
+          <a:solidFill>
+            <a:srgbClr val="232326"/>
+          </a:solidFill>
+          <a:ln w="6350">
             <a:solidFill>
-              <a:srgbClr val="E4E4E7"/>
+              <a:srgbClr val="3F3F46"/>
             </a:solidFill>
             <a:prstDash val="solid"/>
           </a:ln>
@@ -34429,14 +34126,14 @@
       </p:sp>
       <p:sp>
         <p:nvSpPr>
-          <p:cNvPr id="17" name="Text 15"/>
-          <p:cNvSpPr txBox="1"/>
-          <p:nvPr/>
-        </p:nvSpPr>
-        <p:spPr>
-          <a:xfrm>
-            <a:off x="548640" y="3474720"/>
-            <a:ext cx="548640" cy="411480"/>
+          <p:cNvPr id="24" name="Text 20"/>
+          <p:cNvSpPr txBox="1"/>
+          <p:nvPr/>
+        </p:nvSpPr>
+        <p:spPr>
+          <a:xfrm>
+            <a:off x="4846320" y="1591056"/>
+            <a:ext cx="502920" cy="219456"/>
           </a:xfrm>
           <a:prstGeom prst="rect">
             <a:avLst/>
@@ -34448,11 +34145,11 @@
           <a:bodyPr wrap="square" lIns="0" tIns="0" rIns="0" bIns="0" rtlCol="0" anchor="ctr"/>
           <a:lstStyle/>
           <a:p>
-            <a:pPr indent="0" marL="0">
-              <a:buNone/>
-            </a:pPr>
-            <a:r>
-              <a:rPr lang="en-US" sz="1300" b="1" dirty="0">
+            <a:pPr algn="ctr" indent="0" marL="0">
+              <a:buNone/>
+            </a:pPr>
+            <a:r>
+              <a:rPr lang="en-US" sz="750" b="1" dirty="0">
                 <a:solidFill>
                   <a:srgbClr val="F97316"/>
                 </a:solidFill>
@@ -34460,112 +34157,509 @@
                 <a:ea typeface="Malgun Gothic" pitchFamily="34" charset="-122"/>
                 <a:cs typeface="Malgun Gothic" pitchFamily="34" charset="-120"/>
               </a:rPr>
-              <a:t>04</a:t>
-            </a:r>
-            <a:endParaRPr lang="en-US" sz="1300" dirty="0"/>
-          </a:p>
-        </p:txBody>
-      </p:sp>
-      <p:sp>
-        <p:nvSpPr>
-          <p:cNvPr id="18" name="Text 16"/>
-          <p:cNvSpPr txBox="1"/>
-          <p:nvPr/>
-        </p:nvSpPr>
-        <p:spPr>
-          <a:xfrm>
-            <a:off x="1188720" y="3474720"/>
-            <a:ext cx="1737360" cy="411480"/>
-          </a:xfrm>
-          <a:prstGeom prst="rect">
-            <a:avLst/>
-          </a:prstGeom>
-          <a:noFill/>
-          <a:ln/>
-        </p:spPr>
-        <p:txBody>
-          <a:bodyPr wrap="square" lIns="0" tIns="0" rIns="0" bIns="0" rtlCol="0" anchor="ctr"/>
-          <a:lstStyle/>
-          <a:p>
-            <a:pPr indent="0" marL="0">
-              <a:buNone/>
-            </a:pPr>
-            <a:r>
-              <a:rPr lang="en-US" sz="1200" b="1" dirty="0">
-                <a:solidFill>
-                  <a:srgbClr val="18181B"/>
-                </a:solidFill>
-                <a:latin typeface="Malgun Gothic" pitchFamily="34" charset="0"/>
-                <a:ea typeface="Malgun Gothic" pitchFamily="34" charset="-122"/>
-                <a:cs typeface="Malgun Gothic" pitchFamily="34" charset="-120"/>
-              </a:rPr>
-              <a:t>법률 검토</a:t>
-            </a:r>
-            <a:endParaRPr lang="en-US" sz="1200" dirty="0"/>
-          </a:p>
-        </p:txBody>
-      </p:sp>
-      <p:sp>
-        <p:nvSpPr>
-          <p:cNvPr id="19" name="Text 17"/>
-          <p:cNvSpPr txBox="1"/>
-          <p:nvPr/>
-        </p:nvSpPr>
-        <p:spPr>
-          <a:xfrm>
-            <a:off x="3017520" y="3474720"/>
-            <a:ext cx="5669280" cy="411480"/>
-          </a:xfrm>
-          <a:prstGeom prst="rect">
-            <a:avLst/>
-          </a:prstGeom>
-          <a:noFill/>
-          <a:ln/>
-        </p:spPr>
-        <p:txBody>
-          <a:bodyPr wrap="square" lIns="0" tIns="0" rIns="0" bIns="0" rtlCol="0" anchor="ctr"/>
-          <a:lstStyle/>
-          <a:p>
-            <a:pPr indent="0" marL="0">
-              <a:buNone/>
-            </a:pPr>
-            <a:r>
-              <a:rPr lang="en-US" sz="950" dirty="0">
-                <a:solidFill>
-                  <a:srgbClr val="52525B"/>
-                </a:solidFill>
-                <a:latin typeface="Malgun Gothic" pitchFamily="34" charset="0"/>
-                <a:ea typeface="Malgun Gothic" pitchFamily="34" charset="-122"/>
-                <a:cs typeface="Malgun Gothic" pitchFamily="34" charset="-120"/>
-              </a:rPr>
-              <a:t>면책 문구와 등급 체계, 유료 변호사 매칭 구조(변호사법 제34조)를 공개 전 전문가 검토</a:t>
-            </a:r>
-            <a:endParaRPr lang="en-US" sz="950" dirty="0"/>
-          </a:p>
-        </p:txBody>
-      </p:sp>
-      <p:sp>
-        <p:nvSpPr>
-          <p:cNvPr id="20" name="Shape 18"/>
+              <a:t>서버</a:t>
+            </a:r>
+            <a:endParaRPr lang="en-US" sz="750" dirty="0"/>
+          </a:p>
+        </p:txBody>
+      </p:sp>
+      <p:sp>
+        <p:nvSpPr>
+          <p:cNvPr id="25" name="Text 21"/>
+          <p:cNvSpPr txBox="1"/>
+          <p:nvPr/>
+        </p:nvSpPr>
+        <p:spPr>
+          <a:xfrm>
+            <a:off x="5468112" y="1572768"/>
+            <a:ext cx="3154680" cy="475488"/>
+          </a:xfrm>
+          <a:prstGeom prst="rect">
+            <a:avLst/>
+          </a:prstGeom>
+          <a:noFill/>
+          <a:ln/>
+        </p:spPr>
+        <p:txBody>
+          <a:bodyPr wrap="square" lIns="0" tIns="0" rIns="0" bIns="0" rtlCol="0" anchor="t"/>
+          <a:lstStyle/>
+          <a:p>
+            <a:pPr indent="0" marL="0">
+              <a:buNone/>
+            </a:pPr>
+            <a:r>
+              <a:rPr lang="en-US" sz="830" dirty="0">
+                <a:solidFill>
+                  <a:srgbClr val="D4D4D8"/>
+                </a:solidFill>
+                <a:latin typeface="Malgun Gothic" pitchFamily="34" charset="0"/>
+                <a:ea typeface="Malgun Gothic" pitchFamily="34" charset="-122"/>
+                <a:cs typeface="Malgun Gothic" pitchFamily="34" charset="-120"/>
+              </a:rPr>
+              <a:t>웹 Vercel · 백엔드 Render/Fly.io · DB PostgreSQL</a:t>
+            </a:r>
+            <a:endParaRPr lang="en-US" sz="830" dirty="0"/>
+          </a:p>
+        </p:txBody>
+      </p:sp>
+      <p:sp>
+        <p:nvSpPr>
+          <p:cNvPr id="26" name="Shape 22"/>
           <p:cNvSpPr/>
           <p:nvPr/>
         </p:nvSpPr>
         <p:spPr>
           <a:xfrm>
-            <a:off x="548640" y="4041648"/>
-            <a:ext cx="8138160" cy="0"/>
-          </a:xfrm>
-          <a:prstGeom prst="line">
-            <a:avLst/>
-          </a:prstGeom>
-          <a:noFill/>
-          <a:ln w="9525">
+            <a:off x="4846320" y="2121408"/>
+            <a:ext cx="502920" cy="219456"/>
+          </a:xfrm>
+          <a:prstGeom prst="roundRect">
+            <a:avLst>
+              <a:gd name="adj" fmla="val 20833"/>
+            </a:avLst>
+          </a:prstGeom>
+          <a:solidFill>
+            <a:srgbClr val="232326"/>
+          </a:solidFill>
+          <a:ln w="6350">
             <a:solidFill>
-              <a:srgbClr val="E4E4E7"/>
+              <a:srgbClr val="3F3F46"/>
             </a:solidFill>
             <a:prstDash val="solid"/>
           </a:ln>
         </p:spPr>
+      </p:sp>
+      <p:sp>
+        <p:nvSpPr>
+          <p:cNvPr id="27" name="Text 23"/>
+          <p:cNvSpPr txBox="1"/>
+          <p:nvPr/>
+        </p:nvSpPr>
+        <p:spPr>
+          <a:xfrm>
+            <a:off x="4846320" y="2121408"/>
+            <a:ext cx="502920" cy="219456"/>
+          </a:xfrm>
+          <a:prstGeom prst="rect">
+            <a:avLst/>
+          </a:prstGeom>
+          <a:noFill/>
+          <a:ln/>
+        </p:spPr>
+        <p:txBody>
+          <a:bodyPr wrap="square" lIns="0" tIns="0" rIns="0" bIns="0" rtlCol="0" anchor="ctr"/>
+          <a:lstStyle/>
+          <a:p>
+            <a:pPr algn="ctr" indent="0" marL="0">
+              <a:buNone/>
+            </a:pPr>
+            <a:r>
+              <a:rPr lang="en-US" sz="750" b="1" dirty="0">
+                <a:solidFill>
+                  <a:srgbClr val="F97316"/>
+                </a:solidFill>
+                <a:latin typeface="Malgun Gothic" pitchFamily="34" charset="0"/>
+                <a:ea typeface="Malgun Gothic" pitchFamily="34" charset="-122"/>
+                <a:cs typeface="Malgun Gothic" pitchFamily="34" charset="-120"/>
+              </a:rPr>
+              <a:t>DB</a:t>
+            </a:r>
+            <a:endParaRPr lang="en-US" sz="750" dirty="0"/>
+          </a:p>
+        </p:txBody>
+      </p:sp>
+      <p:sp>
+        <p:nvSpPr>
+          <p:cNvPr id="28" name="Text 24"/>
+          <p:cNvSpPr txBox="1"/>
+          <p:nvPr/>
+        </p:nvSpPr>
+        <p:spPr>
+          <a:xfrm>
+            <a:off x="5468112" y="2103120"/>
+            <a:ext cx="3154680" cy="475488"/>
+          </a:xfrm>
+          <a:prstGeom prst="rect">
+            <a:avLst/>
+          </a:prstGeom>
+          <a:noFill/>
+          <a:ln/>
+        </p:spPr>
+        <p:txBody>
+          <a:bodyPr wrap="square" lIns="0" tIns="0" rIns="0" bIns="0" rtlCol="0" anchor="t"/>
+          <a:lstStyle/>
+          <a:p>
+            <a:pPr indent="0" marL="0">
+              <a:buNone/>
+            </a:pPr>
+            <a:r>
+              <a:rPr lang="en-US" sz="830" dirty="0">
+                <a:solidFill>
+                  <a:srgbClr val="D4D4D8"/>
+                </a:solidFill>
+                <a:latin typeface="Malgun Gothic" pitchFamily="34" charset="0"/>
+                <a:ea typeface="Malgun Gothic" pitchFamily="34" charset="-122"/>
+                <a:cs typeface="Malgun Gothic" pitchFamily="34" charset="-120"/>
+              </a:rPr>
+              <a:t>Flyway 마이그레이션 도입 후 DDL_AUTO=validate</a:t>
+            </a:r>
+            <a:endParaRPr lang="en-US" sz="830" dirty="0"/>
+          </a:p>
+        </p:txBody>
+      </p:sp>
+      <p:sp>
+        <p:nvSpPr>
+          <p:cNvPr id="29" name="Shape 25"/>
+          <p:cNvSpPr/>
+          <p:nvPr/>
+        </p:nvSpPr>
+        <p:spPr>
+          <a:xfrm>
+            <a:off x="4846320" y="2651760"/>
+            <a:ext cx="502920" cy="219456"/>
+          </a:xfrm>
+          <a:prstGeom prst="roundRect">
+            <a:avLst>
+              <a:gd name="adj" fmla="val 20833"/>
+            </a:avLst>
+          </a:prstGeom>
+          <a:solidFill>
+            <a:srgbClr val="232326"/>
+          </a:solidFill>
+          <a:ln w="6350">
+            <a:solidFill>
+              <a:srgbClr val="3F3F46"/>
+            </a:solidFill>
+            <a:prstDash val="solid"/>
+          </a:ln>
+        </p:spPr>
+      </p:sp>
+      <p:sp>
+        <p:nvSpPr>
+          <p:cNvPr id="30" name="Text 26"/>
+          <p:cNvSpPr txBox="1"/>
+          <p:nvPr/>
+        </p:nvSpPr>
+        <p:spPr>
+          <a:xfrm>
+            <a:off x="4846320" y="2651760"/>
+            <a:ext cx="502920" cy="219456"/>
+          </a:xfrm>
+          <a:prstGeom prst="rect">
+            <a:avLst/>
+          </a:prstGeom>
+          <a:noFill/>
+          <a:ln/>
+        </p:spPr>
+        <p:txBody>
+          <a:bodyPr wrap="square" lIns="0" tIns="0" rIns="0" bIns="0" rtlCol="0" anchor="ctr"/>
+          <a:lstStyle/>
+          <a:p>
+            <a:pPr algn="ctr" indent="0" marL="0">
+              <a:buNone/>
+            </a:pPr>
+            <a:r>
+              <a:rPr lang="en-US" sz="750" b="1" dirty="0">
+                <a:solidFill>
+                  <a:srgbClr val="F97316"/>
+                </a:solidFill>
+                <a:latin typeface="Malgun Gothic" pitchFamily="34" charset="0"/>
+                <a:ea typeface="Malgun Gothic" pitchFamily="34" charset="-122"/>
+                <a:cs typeface="Malgun Gothic" pitchFamily="34" charset="-120"/>
+              </a:rPr>
+              <a:t>주소</a:t>
+            </a:r>
+            <a:endParaRPr lang="en-US" sz="750" dirty="0"/>
+          </a:p>
+        </p:txBody>
+      </p:sp>
+      <p:sp>
+        <p:nvSpPr>
+          <p:cNvPr id="31" name="Text 27"/>
+          <p:cNvSpPr txBox="1"/>
+          <p:nvPr/>
+        </p:nvSpPr>
+        <p:spPr>
+          <a:xfrm>
+            <a:off x="5468112" y="2633472"/>
+            <a:ext cx="3154680" cy="475488"/>
+          </a:xfrm>
+          <a:prstGeom prst="rect">
+            <a:avLst/>
+          </a:prstGeom>
+          <a:noFill/>
+          <a:ln/>
+        </p:spPr>
+        <p:txBody>
+          <a:bodyPr wrap="square" lIns="0" tIns="0" rIns="0" bIns="0" rtlCol="0" anchor="t"/>
+          <a:lstStyle/>
+          <a:p>
+            <a:pPr indent="0" marL="0">
+              <a:buNone/>
+            </a:pPr>
+            <a:r>
+              <a:rPr lang="en-US" sz="830" dirty="0">
+                <a:solidFill>
+                  <a:srgbClr val="D4D4D8"/>
+                </a:solidFill>
+                <a:latin typeface="Malgun Gothic" pitchFamily="34" charset="0"/>
+                <a:ea typeface="Malgun Gothic" pitchFamily="34" charset="-122"/>
+                <a:cs typeface="Malgun Gothic" pitchFamily="34" charset="-120"/>
+              </a:rPr>
+              <a:t>FRONTEND_ORIGIN · OAuth 리다이렉트 URI · 브이월드 도메인 · wss 교체</a:t>
+            </a:r>
+            <a:endParaRPr lang="en-US" sz="830" dirty="0"/>
+          </a:p>
+        </p:txBody>
+      </p:sp>
+      <p:sp>
+        <p:nvSpPr>
+          <p:cNvPr id="32" name="Shape 28"/>
+          <p:cNvSpPr/>
+          <p:nvPr/>
+        </p:nvSpPr>
+        <p:spPr>
+          <a:xfrm>
+            <a:off x="4846320" y="3182112"/>
+            <a:ext cx="502920" cy="219456"/>
+          </a:xfrm>
+          <a:prstGeom prst="roundRect">
+            <a:avLst>
+              <a:gd name="adj" fmla="val 20833"/>
+            </a:avLst>
+          </a:prstGeom>
+          <a:solidFill>
+            <a:srgbClr val="232326"/>
+          </a:solidFill>
+          <a:ln w="6350">
+            <a:solidFill>
+              <a:srgbClr val="3F3F46"/>
+            </a:solidFill>
+            <a:prstDash val="solid"/>
+          </a:ln>
+        </p:spPr>
+      </p:sp>
+      <p:sp>
+        <p:nvSpPr>
+          <p:cNvPr id="33" name="Text 29"/>
+          <p:cNvSpPr txBox="1"/>
+          <p:nvPr/>
+        </p:nvSpPr>
+        <p:spPr>
+          <a:xfrm>
+            <a:off x="4846320" y="3182112"/>
+            <a:ext cx="502920" cy="219456"/>
+          </a:xfrm>
+          <a:prstGeom prst="rect">
+            <a:avLst/>
+          </a:prstGeom>
+          <a:noFill/>
+          <a:ln/>
+        </p:spPr>
+        <p:txBody>
+          <a:bodyPr wrap="square" lIns="0" tIns="0" rIns="0" bIns="0" rtlCol="0" anchor="ctr"/>
+          <a:lstStyle/>
+          <a:p>
+            <a:pPr algn="ctr" indent="0" marL="0">
+              <a:buNone/>
+            </a:pPr>
+            <a:r>
+              <a:rPr lang="en-US" sz="750" b="1" dirty="0">
+                <a:solidFill>
+                  <a:srgbClr val="F97316"/>
+                </a:solidFill>
+                <a:latin typeface="Malgun Gothic" pitchFamily="34" charset="0"/>
+                <a:ea typeface="Malgun Gothic" pitchFamily="34" charset="-122"/>
+                <a:cs typeface="Malgun Gothic" pitchFamily="34" charset="-120"/>
+              </a:rPr>
+              <a:t>키</a:t>
+            </a:r>
+            <a:endParaRPr lang="en-US" sz="750" dirty="0"/>
+          </a:p>
+        </p:txBody>
+      </p:sp>
+      <p:sp>
+        <p:nvSpPr>
+          <p:cNvPr id="34" name="Text 30"/>
+          <p:cNvSpPr txBox="1"/>
+          <p:nvPr/>
+        </p:nvSpPr>
+        <p:spPr>
+          <a:xfrm>
+            <a:off x="5468112" y="3163824"/>
+            <a:ext cx="3154680" cy="475488"/>
+          </a:xfrm>
+          <a:prstGeom prst="rect">
+            <a:avLst/>
+          </a:prstGeom>
+          <a:noFill/>
+          <a:ln/>
+        </p:spPr>
+        <p:txBody>
+          <a:bodyPr wrap="square" lIns="0" tIns="0" rIns="0" bIns="0" rtlCol="0" anchor="t"/>
+          <a:lstStyle/>
+          <a:p>
+            <a:pPr indent="0" marL="0">
+              <a:buNone/>
+            </a:pPr>
+            <a:r>
+              <a:rPr lang="en-US" sz="830" dirty="0">
+                <a:solidFill>
+                  <a:srgbClr val="D4D4D8"/>
+                </a:solidFill>
+                <a:latin typeface="Malgun Gothic" pitchFamily="34" charset="0"/>
+                <a:ea typeface="Malgun Gothic" pitchFamily="34" charset="-122"/>
+                <a:cs typeface="Malgun Gothic" pitchFamily="34" charset="-120"/>
+              </a:rPr>
+              <a:t>토스 라이브 키 · FCM · VAPID · 메일 계정 등록</a:t>
+            </a:r>
+            <a:endParaRPr lang="en-US" sz="830" dirty="0"/>
+          </a:p>
+        </p:txBody>
+      </p:sp>
+      <p:sp>
+        <p:nvSpPr>
+          <p:cNvPr id="35" name="Shape 31"/>
+          <p:cNvSpPr/>
+          <p:nvPr/>
+        </p:nvSpPr>
+        <p:spPr>
+          <a:xfrm>
+            <a:off x="4846320" y="3712464"/>
+            <a:ext cx="502920" cy="219456"/>
+          </a:xfrm>
+          <a:prstGeom prst="roundRect">
+            <a:avLst>
+              <a:gd name="adj" fmla="val 20833"/>
+            </a:avLst>
+          </a:prstGeom>
+          <a:solidFill>
+            <a:srgbClr val="232326"/>
+          </a:solidFill>
+          <a:ln w="6350">
+            <a:solidFill>
+              <a:srgbClr val="3F3F46"/>
+            </a:solidFill>
+            <a:prstDash val="solid"/>
+          </a:ln>
+        </p:spPr>
+      </p:sp>
+      <p:sp>
+        <p:nvSpPr>
+          <p:cNvPr id="36" name="Text 32"/>
+          <p:cNvSpPr txBox="1"/>
+          <p:nvPr/>
+        </p:nvSpPr>
+        <p:spPr>
+          <a:xfrm>
+            <a:off x="4846320" y="3712464"/>
+            <a:ext cx="502920" cy="219456"/>
+          </a:xfrm>
+          <a:prstGeom prst="rect">
+            <a:avLst/>
+          </a:prstGeom>
+          <a:noFill/>
+          <a:ln/>
+        </p:spPr>
+        <p:txBody>
+          <a:bodyPr wrap="square" lIns="0" tIns="0" rIns="0" bIns="0" rtlCol="0" anchor="ctr"/>
+          <a:lstStyle/>
+          <a:p>
+            <a:pPr algn="ctr" indent="0" marL="0">
+              <a:buNone/>
+            </a:pPr>
+            <a:r>
+              <a:rPr lang="en-US" sz="750" b="1" dirty="0">
+                <a:solidFill>
+                  <a:srgbClr val="F97316"/>
+                </a:solidFill>
+                <a:latin typeface="Malgun Gothic" pitchFamily="34" charset="0"/>
+                <a:ea typeface="Malgun Gothic" pitchFamily="34" charset="-122"/>
+                <a:cs typeface="Malgun Gothic" pitchFamily="34" charset="-120"/>
+              </a:rPr>
+              <a:t>확인</a:t>
+            </a:r>
+            <a:endParaRPr lang="en-US" sz="750" dirty="0"/>
+          </a:p>
+        </p:txBody>
+      </p:sp>
+      <p:sp>
+        <p:nvSpPr>
+          <p:cNvPr id="37" name="Text 33"/>
+          <p:cNvSpPr txBox="1"/>
+          <p:nvPr/>
+        </p:nvSpPr>
+        <p:spPr>
+          <a:xfrm>
+            <a:off x="5468112" y="3694176"/>
+            <a:ext cx="3154680" cy="475488"/>
+          </a:xfrm>
+          <a:prstGeom prst="rect">
+            <a:avLst/>
+          </a:prstGeom>
+          <a:noFill/>
+          <a:ln/>
+        </p:spPr>
+        <p:txBody>
+          <a:bodyPr wrap="square" lIns="0" tIns="0" rIns="0" bIns="0" rtlCol="0" anchor="t"/>
+          <a:lstStyle/>
+          <a:p>
+            <a:pPr indent="0" marL="0">
+              <a:buNone/>
+            </a:pPr>
+            <a:r>
+              <a:rPr lang="en-US" sz="830" dirty="0">
+                <a:solidFill>
+                  <a:srgbClr val="D4D4D8"/>
+                </a:solidFill>
+                <a:latin typeface="Malgun Gothic" pitchFamily="34" charset="0"/>
+                <a:ea typeface="Malgun Gothic" pitchFamily="34" charset="-122"/>
+                <a:cs typeface="Malgun Gothic" pitchFamily="34" charset="-120"/>
+              </a:rPr>
+              <a:t>결제창을 거친 재승인 응답 · 실기기 푸시 검증, 화면 캡처</a:t>
+            </a:r>
+            <a:endParaRPr lang="en-US" sz="830" dirty="0"/>
+          </a:p>
+        </p:txBody>
+      </p:sp>
+      <p:sp>
+        <p:nvSpPr>
+          <p:cNvPr id="38" name="Text 34"/>
+          <p:cNvSpPr txBox="1"/>
+          <p:nvPr/>
+        </p:nvSpPr>
+        <p:spPr>
+          <a:xfrm>
+            <a:off x="411480" y="4434840"/>
+            <a:ext cx="8321040" cy="228600"/>
+          </a:xfrm>
+          <a:prstGeom prst="rect">
+            <a:avLst/>
+          </a:prstGeom>
+          <a:noFill/>
+          <a:ln/>
+        </p:spPr>
+        <p:txBody>
+          <a:bodyPr wrap="square" lIns="0" tIns="0" rIns="0" bIns="0" rtlCol="0" anchor="t"/>
+          <a:lstStyle/>
+          <a:p>
+            <a:pPr algn="ctr" indent="0" marL="0">
+              <a:buNone/>
+            </a:pPr>
+            <a:r>
+              <a:rPr lang="en-US" sz="950" b="1" dirty="0">
+                <a:solidFill>
+                  <a:srgbClr val="18181B"/>
+                </a:solidFill>
+                <a:latin typeface="Malgun Gothic" pitchFamily="34" charset="0"/>
+                <a:ea typeface="Malgun Gothic" pitchFamily="34" charset="-122"/>
+                <a:cs typeface="Malgun Gothic" pitchFamily="34" charset="-120"/>
+              </a:rPr>
+              <a:t>코드는 완성 — 남은 것은 운영 환경 값과 인프라 구성</a:t>
+            </a:r>
+            <a:endParaRPr lang="en-US" sz="950" dirty="0"/>
+          </a:p>
+        </p:txBody>
       </p:sp>
       <p:sp>
         <p:nvSpPr>
@@ -34640,6 +34734,756 @@
           <a:chExt cx="0" cy="0"/>
         </a:xfrm>
       </p:grpSpPr>
+      <p:sp>
+        <p:nvSpPr>
+          <p:cNvPr id="2" name="Text 0"/>
+          <p:cNvSpPr txBox="1"/>
+          <p:nvPr/>
+        </p:nvSpPr>
+        <p:spPr>
+          <a:xfrm>
+            <a:off x="411480" y="237744"/>
+            <a:ext cx="4572000" cy="146304"/>
+          </a:xfrm>
+          <a:prstGeom prst="rect">
+            <a:avLst/>
+          </a:prstGeom>
+          <a:noFill/>
+          <a:ln/>
+        </p:spPr>
+        <p:txBody>
+          <a:bodyPr wrap="square" lIns="0" tIns="0" rIns="0" bIns="0" rtlCol="0" anchor="t"/>
+          <a:lstStyle/>
+          <a:p>
+            <a:pPr indent="0" marL="0">
+              <a:buNone/>
+            </a:pPr>
+            <a:r>
+              <a:rPr lang="en-US" sz="700" b="1" spc="100" kern="0" dirty="0">
+                <a:solidFill>
+                  <a:srgbClr val="F97316"/>
+                </a:solidFill>
+                <a:latin typeface="Malgun Gothic" pitchFamily="34" charset="0"/>
+                <a:ea typeface="Malgun Gothic" pitchFamily="34" charset="-122"/>
+                <a:cs typeface="Malgun Gothic" pitchFamily="34" charset="-120"/>
+              </a:rPr>
+              <a:t>RETROSPECTIVE</a:t>
+            </a:r>
+            <a:endParaRPr lang="en-US" sz="700" dirty="0"/>
+          </a:p>
+        </p:txBody>
+      </p:sp>
+      <p:sp>
+        <p:nvSpPr>
+          <p:cNvPr id="3" name="Text 1"/>
+          <p:cNvSpPr txBox="1"/>
+          <p:nvPr/>
+        </p:nvSpPr>
+        <p:spPr>
+          <a:xfrm>
+            <a:off x="411480" y="384048"/>
+            <a:ext cx="6949440" cy="411480"/>
+          </a:xfrm>
+          <a:prstGeom prst="rect">
+            <a:avLst/>
+          </a:prstGeom>
+          <a:noFill/>
+          <a:ln/>
+        </p:spPr>
+        <p:txBody>
+          <a:bodyPr wrap="square" lIns="0" tIns="0" rIns="0" bIns="0" rtlCol="0" anchor="ctr"/>
+          <a:lstStyle/>
+          <a:p>
+            <a:pPr indent="0" marL="0">
+              <a:buNone/>
+            </a:pPr>
+            <a:r>
+              <a:rPr lang="en-US" sz="2100" b="1" dirty="0">
+                <a:solidFill>
+                  <a:srgbClr val="18181B"/>
+                </a:solidFill>
+                <a:latin typeface="Malgun Gothic" pitchFamily="34" charset="0"/>
+                <a:ea typeface="Malgun Gothic" pitchFamily="34" charset="-122"/>
+                <a:cs typeface="Malgun Gothic" pitchFamily="34" charset="-120"/>
+              </a:rPr>
+              <a:t>다음 개선 과제</a:t>
+            </a:r>
+            <a:endParaRPr lang="en-US" sz="2100" dirty="0"/>
+          </a:p>
+        </p:txBody>
+      </p:sp>
+      <p:sp>
+        <p:nvSpPr>
+          <p:cNvPr id="4" name="Text 2"/>
+          <p:cNvSpPr txBox="1"/>
+          <p:nvPr/>
+        </p:nvSpPr>
+        <p:spPr>
+          <a:xfrm>
+            <a:off x="411480" y="4828032"/>
+            <a:ext cx="2743200" cy="182880"/>
+          </a:xfrm>
+          <a:prstGeom prst="rect">
+            <a:avLst/>
+          </a:prstGeom>
+          <a:noFill/>
+          <a:ln/>
+        </p:spPr>
+        <p:txBody>
+          <a:bodyPr wrap="square" lIns="0" tIns="0" rIns="0" bIns="0" rtlCol="0" anchor="t"/>
+          <a:lstStyle/>
+          <a:p>
+            <a:pPr indent="0" marL="0">
+              <a:buNone/>
+            </a:pPr>
+            <a:r>
+              <a:rPr lang="en-US" sz="650" b="1" spc="100" kern="0" dirty="0">
+                <a:solidFill>
+                  <a:srgbClr val="8A8A93"/>
+                </a:solidFill>
+                <a:latin typeface="Malgun Gothic" pitchFamily="34" charset="0"/>
+                <a:ea typeface="Malgun Gothic" pitchFamily="34" charset="-122"/>
+                <a:cs typeface="Malgun Gothic" pitchFamily="34" charset="-120"/>
+              </a:rPr>
+              <a:t>RETROSPECTIVE</a:t>
+            </a:r>
+            <a:endParaRPr lang="en-US" sz="650" dirty="0"/>
+          </a:p>
+        </p:txBody>
+      </p:sp>
+      <p:sp>
+        <p:nvSpPr>
+          <p:cNvPr id="5" name="Text 3"/>
+          <p:cNvSpPr txBox="1"/>
+          <p:nvPr/>
+        </p:nvSpPr>
+        <p:spPr>
+          <a:xfrm>
+            <a:off x="548640" y="1143000"/>
+            <a:ext cx="548640" cy="411480"/>
+          </a:xfrm>
+          <a:prstGeom prst="rect">
+            <a:avLst/>
+          </a:prstGeom>
+          <a:noFill/>
+          <a:ln/>
+        </p:spPr>
+        <p:txBody>
+          <a:bodyPr wrap="square" lIns="0" tIns="0" rIns="0" bIns="0" rtlCol="0" anchor="ctr"/>
+          <a:lstStyle/>
+          <a:p>
+            <a:pPr indent="0" marL="0">
+              <a:buNone/>
+            </a:pPr>
+            <a:r>
+              <a:rPr lang="en-US" sz="1300" b="1" dirty="0">
+                <a:solidFill>
+                  <a:srgbClr val="F97316"/>
+                </a:solidFill>
+                <a:latin typeface="Malgun Gothic" pitchFamily="34" charset="0"/>
+                <a:ea typeface="Malgun Gothic" pitchFamily="34" charset="-122"/>
+                <a:cs typeface="Malgun Gothic" pitchFamily="34" charset="-120"/>
+              </a:rPr>
+              <a:t>01</a:t>
+            </a:r>
+            <a:endParaRPr lang="en-US" sz="1300" dirty="0"/>
+          </a:p>
+        </p:txBody>
+      </p:sp>
+      <p:sp>
+        <p:nvSpPr>
+          <p:cNvPr id="6" name="Text 4"/>
+          <p:cNvSpPr txBox="1"/>
+          <p:nvPr/>
+        </p:nvSpPr>
+        <p:spPr>
+          <a:xfrm>
+            <a:off x="1188720" y="1143000"/>
+            <a:ext cx="1737360" cy="411480"/>
+          </a:xfrm>
+          <a:prstGeom prst="rect">
+            <a:avLst/>
+          </a:prstGeom>
+          <a:noFill/>
+          <a:ln/>
+        </p:spPr>
+        <p:txBody>
+          <a:bodyPr wrap="square" lIns="0" tIns="0" rIns="0" bIns="0" rtlCol="0" anchor="ctr"/>
+          <a:lstStyle/>
+          <a:p>
+            <a:pPr indent="0" marL="0">
+              <a:buNone/>
+            </a:pPr>
+            <a:r>
+              <a:rPr lang="en-US" sz="1200" b="1" dirty="0">
+                <a:solidFill>
+                  <a:srgbClr val="18181B"/>
+                </a:solidFill>
+                <a:latin typeface="Malgun Gothic" pitchFamily="34" charset="0"/>
+                <a:ea typeface="Malgun Gothic" pitchFamily="34" charset="-122"/>
+                <a:cs typeface="Malgun Gothic" pitchFamily="34" charset="-120"/>
+              </a:rPr>
+              <a:t>운영 배포</a:t>
+            </a:r>
+            <a:endParaRPr lang="en-US" sz="1200" dirty="0"/>
+          </a:p>
+        </p:txBody>
+      </p:sp>
+      <p:sp>
+        <p:nvSpPr>
+          <p:cNvPr id="7" name="Text 5"/>
+          <p:cNvSpPr txBox="1"/>
+          <p:nvPr/>
+        </p:nvSpPr>
+        <p:spPr>
+          <a:xfrm>
+            <a:off x="3017520" y="1143000"/>
+            <a:ext cx="5669280" cy="411480"/>
+          </a:xfrm>
+          <a:prstGeom prst="rect">
+            <a:avLst/>
+          </a:prstGeom>
+          <a:noFill/>
+          <a:ln/>
+        </p:spPr>
+        <p:txBody>
+          <a:bodyPr wrap="square" lIns="0" tIns="0" rIns="0" bIns="0" rtlCol="0" anchor="ctr"/>
+          <a:lstStyle/>
+          <a:p>
+            <a:pPr indent="0" marL="0">
+              <a:buNone/>
+            </a:pPr>
+            <a:r>
+              <a:rPr lang="en-US" sz="950" dirty="0">
+                <a:solidFill>
+                  <a:srgbClr val="52525B"/>
+                </a:solidFill>
+                <a:latin typeface="Malgun Gothic" pitchFamily="34" charset="0"/>
+                <a:ea typeface="Malgun Gothic" pitchFamily="34" charset="-122"/>
+                <a:cs typeface="Malgun Gothic" pitchFamily="34" charset="-120"/>
+              </a:rPr>
+              <a:t>배포 후 모니터링 · 오류 알림 구성, 실제 화면 캡처를 포트폴리오에 반영</a:t>
+            </a:r>
+            <a:endParaRPr lang="en-US" sz="950" dirty="0"/>
+          </a:p>
+        </p:txBody>
+      </p:sp>
+      <p:sp>
+        <p:nvSpPr>
+          <p:cNvPr id="8" name="Shape 6"/>
+          <p:cNvSpPr/>
+          <p:nvPr/>
+        </p:nvSpPr>
+        <p:spPr>
+          <a:xfrm>
+            <a:off x="548640" y="1709928"/>
+            <a:ext cx="8138160" cy="0"/>
+          </a:xfrm>
+          <a:prstGeom prst="line">
+            <a:avLst/>
+          </a:prstGeom>
+          <a:noFill/>
+          <a:ln w="9525">
+            <a:solidFill>
+              <a:srgbClr val="E4E4E7"/>
+            </a:solidFill>
+            <a:prstDash val="solid"/>
+          </a:ln>
+        </p:spPr>
+      </p:sp>
+      <p:sp>
+        <p:nvSpPr>
+          <p:cNvPr id="9" name="Text 7"/>
+          <p:cNvSpPr txBox="1"/>
+          <p:nvPr/>
+        </p:nvSpPr>
+        <p:spPr>
+          <a:xfrm>
+            <a:off x="548640" y="1920240"/>
+            <a:ext cx="548640" cy="411480"/>
+          </a:xfrm>
+          <a:prstGeom prst="rect">
+            <a:avLst/>
+          </a:prstGeom>
+          <a:noFill/>
+          <a:ln/>
+        </p:spPr>
+        <p:txBody>
+          <a:bodyPr wrap="square" lIns="0" tIns="0" rIns="0" bIns="0" rtlCol="0" anchor="ctr"/>
+          <a:lstStyle/>
+          <a:p>
+            <a:pPr indent="0" marL="0">
+              <a:buNone/>
+            </a:pPr>
+            <a:r>
+              <a:rPr lang="en-US" sz="1300" b="1" dirty="0">
+                <a:solidFill>
+                  <a:srgbClr val="F97316"/>
+                </a:solidFill>
+                <a:latin typeface="Malgun Gothic" pitchFamily="34" charset="0"/>
+                <a:ea typeface="Malgun Gothic" pitchFamily="34" charset="-122"/>
+                <a:cs typeface="Malgun Gothic" pitchFamily="34" charset="-120"/>
+              </a:rPr>
+              <a:t>02</a:t>
+            </a:r>
+            <a:endParaRPr lang="en-US" sz="1300" dirty="0"/>
+          </a:p>
+        </p:txBody>
+      </p:sp>
+      <p:sp>
+        <p:nvSpPr>
+          <p:cNvPr id="10" name="Text 8"/>
+          <p:cNvSpPr txBox="1"/>
+          <p:nvPr/>
+        </p:nvSpPr>
+        <p:spPr>
+          <a:xfrm>
+            <a:off x="1188720" y="1920240"/>
+            <a:ext cx="1737360" cy="411480"/>
+          </a:xfrm>
+          <a:prstGeom prst="rect">
+            <a:avLst/>
+          </a:prstGeom>
+          <a:noFill/>
+          <a:ln/>
+        </p:spPr>
+        <p:txBody>
+          <a:bodyPr wrap="square" lIns="0" tIns="0" rIns="0" bIns="0" rtlCol="0" anchor="ctr"/>
+          <a:lstStyle/>
+          <a:p>
+            <a:pPr indent="0" marL="0">
+              <a:buNone/>
+            </a:pPr>
+            <a:r>
+              <a:rPr lang="en-US" sz="1200" b="1" dirty="0">
+                <a:solidFill>
+                  <a:srgbClr val="18181B"/>
+                </a:solidFill>
+                <a:latin typeface="Malgun Gothic" pitchFamily="34" charset="0"/>
+                <a:ea typeface="Malgun Gothic" pitchFamily="34" charset="-122"/>
+                <a:cs typeface="Malgun Gothic" pitchFamily="34" charset="-120"/>
+              </a:rPr>
+              <a:t>기준표 DB화</a:t>
+            </a:r>
+            <a:endParaRPr lang="en-US" sz="1200" dirty="0"/>
+          </a:p>
+        </p:txBody>
+      </p:sp>
+      <p:sp>
+        <p:nvSpPr>
+          <p:cNvPr id="11" name="Text 9"/>
+          <p:cNvSpPr txBox="1"/>
+          <p:nvPr/>
+        </p:nvSpPr>
+        <p:spPr>
+          <a:xfrm>
+            <a:off x="3017520" y="1920240"/>
+            <a:ext cx="5669280" cy="411480"/>
+          </a:xfrm>
+          <a:prstGeom prst="rect">
+            <a:avLst/>
+          </a:prstGeom>
+          <a:noFill/>
+          <a:ln/>
+        </p:spPr>
+        <p:txBody>
+          <a:bodyPr wrap="square" lIns="0" tIns="0" rIns="0" bIns="0" rtlCol="0" anchor="ctr"/>
+          <a:lstStyle/>
+          <a:p>
+            <a:pPr indent="0" marL="0">
+              <a:buNone/>
+            </a:pPr>
+            <a:r>
+              <a:rPr lang="en-US" sz="950" dirty="0">
+                <a:solidFill>
+                  <a:srgbClr val="52525B"/>
+                </a:solidFill>
+                <a:latin typeface="Malgun Gothic" pitchFamily="34" charset="0"/>
+                <a:ea typeface="Malgun Gothic" pitchFamily="34" charset="-122"/>
+                <a:cs typeface="Malgun Gothic" pitchFamily="34" charset="-120"/>
+              </a:rPr>
+              <a:t>상수로 관리 중인 위험 기준(RiskThresholds)을 DB 기준표로 옮겨 기준금리 · HUG 기준 변경에 대응</a:t>
+            </a:r>
+            <a:endParaRPr lang="en-US" sz="950" dirty="0"/>
+          </a:p>
+        </p:txBody>
+      </p:sp>
+      <p:sp>
+        <p:nvSpPr>
+          <p:cNvPr id="12" name="Shape 10"/>
+          <p:cNvSpPr/>
+          <p:nvPr/>
+        </p:nvSpPr>
+        <p:spPr>
+          <a:xfrm>
+            <a:off x="548640" y="2487168"/>
+            <a:ext cx="8138160" cy="0"/>
+          </a:xfrm>
+          <a:prstGeom prst="line">
+            <a:avLst/>
+          </a:prstGeom>
+          <a:noFill/>
+          <a:ln w="9525">
+            <a:solidFill>
+              <a:srgbClr val="E4E4E7"/>
+            </a:solidFill>
+            <a:prstDash val="solid"/>
+          </a:ln>
+        </p:spPr>
+      </p:sp>
+      <p:sp>
+        <p:nvSpPr>
+          <p:cNvPr id="13" name="Text 11"/>
+          <p:cNvSpPr txBox="1"/>
+          <p:nvPr/>
+        </p:nvSpPr>
+        <p:spPr>
+          <a:xfrm>
+            <a:off x="548640" y="2697480"/>
+            <a:ext cx="548640" cy="411480"/>
+          </a:xfrm>
+          <a:prstGeom prst="rect">
+            <a:avLst/>
+          </a:prstGeom>
+          <a:noFill/>
+          <a:ln/>
+        </p:spPr>
+        <p:txBody>
+          <a:bodyPr wrap="square" lIns="0" tIns="0" rIns="0" bIns="0" rtlCol="0" anchor="ctr"/>
+          <a:lstStyle/>
+          <a:p>
+            <a:pPr indent="0" marL="0">
+              <a:buNone/>
+            </a:pPr>
+            <a:r>
+              <a:rPr lang="en-US" sz="1300" b="1" dirty="0">
+                <a:solidFill>
+                  <a:srgbClr val="F97316"/>
+                </a:solidFill>
+                <a:latin typeface="Malgun Gothic" pitchFamily="34" charset="0"/>
+                <a:ea typeface="Malgun Gothic" pitchFamily="34" charset="-122"/>
+                <a:cs typeface="Malgun Gothic" pitchFamily="34" charset="-120"/>
+              </a:rPr>
+              <a:t>03</a:t>
+            </a:r>
+            <a:endParaRPr lang="en-US" sz="1300" dirty="0"/>
+          </a:p>
+        </p:txBody>
+      </p:sp>
+      <p:sp>
+        <p:nvSpPr>
+          <p:cNvPr id="14" name="Text 12"/>
+          <p:cNvSpPr txBox="1"/>
+          <p:nvPr/>
+        </p:nvSpPr>
+        <p:spPr>
+          <a:xfrm>
+            <a:off x="1188720" y="2697480"/>
+            <a:ext cx="1737360" cy="411480"/>
+          </a:xfrm>
+          <a:prstGeom prst="rect">
+            <a:avLst/>
+          </a:prstGeom>
+          <a:noFill/>
+          <a:ln/>
+        </p:spPr>
+        <p:txBody>
+          <a:bodyPr wrap="square" lIns="0" tIns="0" rIns="0" bIns="0" rtlCol="0" anchor="ctr"/>
+          <a:lstStyle/>
+          <a:p>
+            <a:pPr indent="0" marL="0">
+              <a:buNone/>
+            </a:pPr>
+            <a:r>
+              <a:rPr lang="en-US" sz="1200" b="1" dirty="0">
+                <a:solidFill>
+                  <a:srgbClr val="18181B"/>
+                </a:solidFill>
+                <a:latin typeface="Malgun Gothic" pitchFamily="34" charset="0"/>
+                <a:ea typeface="Malgun Gothic" pitchFamily="34" charset="-122"/>
+                <a:cs typeface="Malgun Gothic" pitchFamily="34" charset="-120"/>
+              </a:rPr>
+              <a:t>앱 출시 준비</a:t>
+            </a:r>
+            <a:endParaRPr lang="en-US" sz="1200" dirty="0"/>
+          </a:p>
+        </p:txBody>
+      </p:sp>
+      <p:sp>
+        <p:nvSpPr>
+          <p:cNvPr id="15" name="Text 13"/>
+          <p:cNvSpPr txBox="1"/>
+          <p:nvPr/>
+        </p:nvSpPr>
+        <p:spPr>
+          <a:xfrm>
+            <a:off x="3017520" y="2697480"/>
+            <a:ext cx="5669280" cy="411480"/>
+          </a:xfrm>
+          <a:prstGeom prst="rect">
+            <a:avLst/>
+          </a:prstGeom>
+          <a:noFill/>
+          <a:ln/>
+        </p:spPr>
+        <p:txBody>
+          <a:bodyPr wrap="square" lIns="0" tIns="0" rIns="0" bIns="0" rtlCol="0" anchor="ctr"/>
+          <a:lstStyle/>
+          <a:p>
+            <a:pPr indent="0" marL="0">
+              <a:buNone/>
+            </a:pPr>
+            <a:r>
+              <a:rPr lang="en-US" sz="950" dirty="0">
+                <a:solidFill>
+                  <a:srgbClr val="52525B"/>
+                </a:solidFill>
+                <a:latin typeface="Malgun Gothic" pitchFamily="34" charset="0"/>
+                <a:ea typeface="Malgun Gothic" pitchFamily="34" charset="-122"/>
+                <a:cs typeface="Malgun Gothic" pitchFamily="34" charset="-120"/>
+              </a:rPr>
+              <a:t>iOS 푸시 실기기 검증, 다가구 · 토지 등기부 실제 샘플로 파서 추가 검증</a:t>
+            </a:r>
+            <a:endParaRPr lang="en-US" sz="950" dirty="0"/>
+          </a:p>
+        </p:txBody>
+      </p:sp>
+      <p:sp>
+        <p:nvSpPr>
+          <p:cNvPr id="16" name="Shape 14"/>
+          <p:cNvSpPr/>
+          <p:nvPr/>
+        </p:nvSpPr>
+        <p:spPr>
+          <a:xfrm>
+            <a:off x="548640" y="3264408"/>
+            <a:ext cx="8138160" cy="0"/>
+          </a:xfrm>
+          <a:prstGeom prst="line">
+            <a:avLst/>
+          </a:prstGeom>
+          <a:noFill/>
+          <a:ln w="9525">
+            <a:solidFill>
+              <a:srgbClr val="E4E4E7"/>
+            </a:solidFill>
+            <a:prstDash val="solid"/>
+          </a:ln>
+        </p:spPr>
+      </p:sp>
+      <p:sp>
+        <p:nvSpPr>
+          <p:cNvPr id="17" name="Text 15"/>
+          <p:cNvSpPr txBox="1"/>
+          <p:nvPr/>
+        </p:nvSpPr>
+        <p:spPr>
+          <a:xfrm>
+            <a:off x="548640" y="3474720"/>
+            <a:ext cx="548640" cy="411480"/>
+          </a:xfrm>
+          <a:prstGeom prst="rect">
+            <a:avLst/>
+          </a:prstGeom>
+          <a:noFill/>
+          <a:ln/>
+        </p:spPr>
+        <p:txBody>
+          <a:bodyPr wrap="square" lIns="0" tIns="0" rIns="0" bIns="0" rtlCol="0" anchor="ctr"/>
+          <a:lstStyle/>
+          <a:p>
+            <a:pPr indent="0" marL="0">
+              <a:buNone/>
+            </a:pPr>
+            <a:r>
+              <a:rPr lang="en-US" sz="1300" b="1" dirty="0">
+                <a:solidFill>
+                  <a:srgbClr val="F97316"/>
+                </a:solidFill>
+                <a:latin typeface="Malgun Gothic" pitchFamily="34" charset="0"/>
+                <a:ea typeface="Malgun Gothic" pitchFamily="34" charset="-122"/>
+                <a:cs typeface="Malgun Gothic" pitchFamily="34" charset="-120"/>
+              </a:rPr>
+              <a:t>04</a:t>
+            </a:r>
+            <a:endParaRPr lang="en-US" sz="1300" dirty="0"/>
+          </a:p>
+        </p:txBody>
+      </p:sp>
+      <p:sp>
+        <p:nvSpPr>
+          <p:cNvPr id="18" name="Text 16"/>
+          <p:cNvSpPr txBox="1"/>
+          <p:nvPr/>
+        </p:nvSpPr>
+        <p:spPr>
+          <a:xfrm>
+            <a:off x="1188720" y="3474720"/>
+            <a:ext cx="1737360" cy="411480"/>
+          </a:xfrm>
+          <a:prstGeom prst="rect">
+            <a:avLst/>
+          </a:prstGeom>
+          <a:noFill/>
+          <a:ln/>
+        </p:spPr>
+        <p:txBody>
+          <a:bodyPr wrap="square" lIns="0" tIns="0" rIns="0" bIns="0" rtlCol="0" anchor="ctr"/>
+          <a:lstStyle/>
+          <a:p>
+            <a:pPr indent="0" marL="0">
+              <a:buNone/>
+            </a:pPr>
+            <a:r>
+              <a:rPr lang="en-US" sz="1200" b="1" dirty="0">
+                <a:solidFill>
+                  <a:srgbClr val="18181B"/>
+                </a:solidFill>
+                <a:latin typeface="Malgun Gothic" pitchFamily="34" charset="0"/>
+                <a:ea typeface="Malgun Gothic" pitchFamily="34" charset="-122"/>
+                <a:cs typeface="Malgun Gothic" pitchFamily="34" charset="-120"/>
+              </a:rPr>
+              <a:t>법률 검토</a:t>
+            </a:r>
+            <a:endParaRPr lang="en-US" sz="1200" dirty="0"/>
+          </a:p>
+        </p:txBody>
+      </p:sp>
+      <p:sp>
+        <p:nvSpPr>
+          <p:cNvPr id="19" name="Text 17"/>
+          <p:cNvSpPr txBox="1"/>
+          <p:nvPr/>
+        </p:nvSpPr>
+        <p:spPr>
+          <a:xfrm>
+            <a:off x="3017520" y="3474720"/>
+            <a:ext cx="5669280" cy="411480"/>
+          </a:xfrm>
+          <a:prstGeom prst="rect">
+            <a:avLst/>
+          </a:prstGeom>
+          <a:noFill/>
+          <a:ln/>
+        </p:spPr>
+        <p:txBody>
+          <a:bodyPr wrap="square" lIns="0" tIns="0" rIns="0" bIns="0" rtlCol="0" anchor="ctr"/>
+          <a:lstStyle/>
+          <a:p>
+            <a:pPr indent="0" marL="0">
+              <a:buNone/>
+            </a:pPr>
+            <a:r>
+              <a:rPr lang="en-US" sz="950" dirty="0">
+                <a:solidFill>
+                  <a:srgbClr val="52525B"/>
+                </a:solidFill>
+                <a:latin typeface="Malgun Gothic" pitchFamily="34" charset="0"/>
+                <a:ea typeface="Malgun Gothic" pitchFamily="34" charset="-122"/>
+                <a:cs typeface="Malgun Gothic" pitchFamily="34" charset="-120"/>
+              </a:rPr>
+              <a:t>면책 문구와 등급 체계, 유료 변호사 매칭 구조(변호사법 제34조)를 공개 전 전문가 검토</a:t>
+            </a:r>
+            <a:endParaRPr lang="en-US" sz="950" dirty="0"/>
+          </a:p>
+        </p:txBody>
+      </p:sp>
+      <p:sp>
+        <p:nvSpPr>
+          <p:cNvPr id="20" name="Shape 18"/>
+          <p:cNvSpPr/>
+          <p:nvPr/>
+        </p:nvSpPr>
+        <p:spPr>
+          <a:xfrm>
+            <a:off x="548640" y="4041648"/>
+            <a:ext cx="8138160" cy="0"/>
+          </a:xfrm>
+          <a:prstGeom prst="line">
+            <a:avLst/>
+          </a:prstGeom>
+          <a:noFill/>
+          <a:ln w="9525">
+            <a:solidFill>
+              <a:srgbClr val="E4E4E7"/>
+            </a:solidFill>
+            <a:prstDash val="solid"/>
+          </a:ln>
+        </p:spPr>
+      </p:sp>
+      <p:sp>
+        <p:nvSpPr>
+          <p:cNvPr id="25" name="Slide Number Placeholder 0"/>
+          <p:cNvSpPr>
+            <a:spLocks noGrp="1"/>
+          </p:cNvSpPr>
+          <p:nvPr>
+            <p:ph type="sldNum" sz="quarter" idx="4294967295"/>
+          </p:nvPr>
+        </p:nvSpPr>
+        <p:spPr>
+          <a:xfrm>
+            <a:off x="8458200" y="4828032"/>
+            <a:ext cx="365760" cy="182880"/>
+          </a:xfrm>
+          <a:prstGeom prst="rect">
+            <a:avLst/>
+          </a:prstGeom>
+          <a:extLst>
+            <a:ext uri="{C572A759-6A51-4108-AA02-DFA0A04FC94B}">
+              <ma14:wrappingTextBoxFlag xmlns:ma14="http://schemas.microsoft.com/office/mac/drawingml/2011/main" val="0"/>
+            </a:ext>
+          </a:extLst>
+        </p:spPr>
+        <p:txBody>
+          <a:bodyPr/>
+          <a:lstStyle>
+            <a:lvl1pPr>
+              <a:defRPr sz="700">
+                <a:solidFill>
+                  <a:srgbClr val="8A8A93"/>
+                </a:solidFill>
+                <a:latin typeface="Malgun Gothic"/>
+                <a:ea typeface="Malgun Gothic"/>
+                <a:cs typeface="Malgun Gothic"/>
+              </a:defRPr>
+            </a:lvl1pPr>
+          </a:lstStyle>
+          <a:p>
+            <a:pPr algn="r"/>
+            <a:fld id="{F7021451-1387-4CA6-816F-3879F97B5CBC}" type="slidenum">
+              <a:rPr b="0" lang="en-US"/>
+              <a:t>33</a:t>
+            </a:fld>
+            <a:endParaRPr lang="en-US"/>
+          </a:p>
+        </p:txBody>
+      </p:sp>
+    </p:spTree>
+  </p:cSld>
+  <p:clrMapOvr>
+    <a:masterClrMapping/>
+  </p:clrMapOvr>
+</p:sld>
+</file>
+
+<file path=ppt/slides/slide34.xml><?xml version="1.0" encoding="utf-8"?>
+<p:sld xmlns:a="http://schemas.openxmlformats.org/drawingml/2006/main" xmlns:r="http://schemas.openxmlformats.org/officeDocument/2006/relationships" xmlns:p="http://schemas.openxmlformats.org/presentationml/2006/main">
+  <p:cSld name="Slide 34">
+    <p:spTree>
+      <p:nvGrpSpPr>
+        <p:cNvPr id="1" name=""/>
+        <p:cNvGrpSpPr/>
+        <p:nvPr/>
+      </p:nvGrpSpPr>
+      <p:grpSpPr>
+        <a:xfrm>
+          <a:off x="0" y="0"/>
+          <a:ext cx="0" cy="0"/>
+          <a:chOff x="0" y="0"/>
+          <a:chExt cx="0" cy="0"/>
+        </a:xfrm>
+      </p:grpSpPr>
       <p:pic>
         <p:nvPicPr>
           <p:cNvPr id="2" name="Image 0" descr="preencoded.png">    </p:cNvPr>
@@ -34876,7 +35720,7 @@
             <a:pPr algn="r"/>
             <a:fld id="{F7021451-1387-4CA6-816F-3879F97B5CBC}" type="slidenum">
               <a:rPr b="0" lang="en-US"/>
-              <a:t>33</a:t>
+              <a:t>34</a:t>
             </a:fld>
             <a:endParaRPr lang="en-US"/>
           </a:p>
@@ -37554,7 +38398,7 @@
                 <a:ea typeface="Malgun Gothic" pitchFamily="34" charset="-122"/>
                 <a:cs typeface="Malgun Gothic" pitchFamily="34" charset="-120"/>
               </a:rPr>
-              <a:t>109</a:t>
+              <a:t>114</a:t>
             </a:r>
             <a:endParaRPr lang="en-US" sz="2200" dirty="0"/>
           </a:p>
@@ -37710,7 +38554,7 @@
                 <a:ea typeface="Malgun Gothic" pitchFamily="34" charset="-122"/>
                 <a:cs typeface="Malgun Gothic" pitchFamily="34" charset="-120"/>
               </a:rPr>
-              <a:t>319개</a:t>
+              <a:t>328개</a:t>
             </a:r>
             <a:endParaRPr lang="en-US" sz="2200" dirty="0"/>
           </a:p>
@@ -37786,7 +38630,7 @@
         </p:nvSpPr>
         <p:spPr>
           <a:xfrm>
-            <a:off x="1014984" y="2130552"/>
+            <a:off x="877824" y="2130552"/>
             <a:ext cx="164592" cy="164592"/>
           </a:xfrm>
           <a:prstGeom prst="ellipse">
@@ -37811,8 +38655,8 @@
         </p:nvSpPr>
         <p:spPr>
           <a:xfrm>
-            <a:off x="457200" y="2377440"/>
-            <a:ext cx="1280160" cy="182880"/>
+            <a:off x="411480" y="2377440"/>
+            <a:ext cx="1097280" cy="182880"/>
           </a:xfrm>
           <a:prstGeom prst="rect">
             <a:avLst/>
@@ -37850,8 +38694,8 @@
         </p:nvSpPr>
         <p:spPr>
           <a:xfrm>
-            <a:off x="457200" y="2560320"/>
-            <a:ext cx="1280160" cy="219456"/>
+            <a:off x="411480" y="2560320"/>
+            <a:ext cx="1097280" cy="219456"/>
           </a:xfrm>
           <a:prstGeom prst="rect">
             <a:avLst/>
@@ -37867,7 +38711,7 @@
               <a:buNone/>
             </a:pPr>
             <a:r>
-              <a:rPr lang="en-US" sz="1000" b="1" dirty="0">
+              <a:rPr lang="en-US" sz="950" b="1" dirty="0">
                 <a:solidFill>
                   <a:srgbClr val="18181B"/>
                 </a:solidFill>
@@ -37877,7 +38721,7 @@
               </a:rPr>
               <a:t>분석 엔진 기반</a:t>
             </a:r>
-            <a:endParaRPr lang="en-US" sz="1000" dirty="0"/>
+            <a:endParaRPr lang="en-US" sz="950" dirty="0"/>
           </a:p>
         </p:txBody>
       </p:sp>
@@ -37889,8 +38733,8 @@
         </p:nvSpPr>
         <p:spPr>
           <a:xfrm>
-            <a:off x="457200" y="2834640"/>
-            <a:ext cx="1280160" cy="822960"/>
+            <a:off x="411480" y="2834640"/>
+            <a:ext cx="1097280" cy="822960"/>
           </a:xfrm>
           <a:prstGeom prst="rect">
             <a:avLst/>
@@ -37909,7 +38753,7 @@
               <a:buNone/>
             </a:pPr>
             <a:r>
-              <a:rPr lang="en-US" sz="750" dirty="0">
+              <a:rPr lang="en-US" sz="700" dirty="0">
                 <a:solidFill>
                   <a:srgbClr val="52525B"/>
                 </a:solidFill>
@@ -37919,7 +38763,7 @@
               </a:rPr>
               <a:t>Git·브랜치 전략 수립</a:t>
             </a:r>
-            <a:endParaRPr lang="en-US" sz="750" dirty="0"/>
+            <a:endParaRPr lang="en-US" sz="700" dirty="0"/>
           </a:p>
           <a:p>
             <a:pPr algn="ctr" indent="0" marL="0">
@@ -37929,7 +38773,7 @@
               <a:buNone/>
             </a:pPr>
             <a:r>
-              <a:rPr lang="en-US" sz="750" dirty="0">
+              <a:rPr lang="en-US" sz="700" dirty="0">
                 <a:solidFill>
                   <a:srgbClr val="52525B"/>
                 </a:solidFill>
@@ -37939,7 +38783,7 @@
               </a:rPr>
               <a:t>PDFBox 등기부 파싱</a:t>
             </a:r>
-            <a:endParaRPr lang="en-US" sz="750" dirty="0"/>
+            <a:endParaRPr lang="en-US" sz="700" dirty="0"/>
           </a:p>
           <a:p>
             <a:pPr algn="ctr" indent="0" marL="0">
@@ -37949,7 +38793,7 @@
               <a:buNone/>
             </a:pPr>
             <a:r>
-              <a:rPr lang="en-US" sz="750" dirty="0">
+              <a:rPr lang="en-US" sz="700" dirty="0">
                 <a:solidFill>
                   <a:srgbClr val="52525B"/>
                 </a:solidFill>
@@ -37959,7 +38803,7 @@
               </a:rPr>
               <a:t>위험 판단 규칙 엔진</a:t>
             </a:r>
-            <a:endParaRPr lang="en-US" sz="750" dirty="0"/>
+            <a:endParaRPr lang="en-US" sz="700" dirty="0"/>
           </a:p>
           <a:p>
             <a:pPr algn="ctr" indent="0" marL="0">
@@ -37969,7 +38813,7 @@
               <a:buNone/>
             </a:pPr>
             <a:r>
-              <a:rPr lang="en-US" sz="750" dirty="0">
+              <a:rPr lang="en-US" sz="700" dirty="0">
                 <a:solidFill>
                   <a:srgbClr val="52525B"/>
                 </a:solidFill>
@@ -37979,7 +38823,7 @@
               </a:rPr>
               <a:t>실거래가 시세 조회</a:t>
             </a:r>
-            <a:endParaRPr lang="en-US" sz="750" dirty="0"/>
+            <a:endParaRPr lang="en-US" sz="700" dirty="0"/>
           </a:p>
         </p:txBody>
       </p:sp>
@@ -37991,7 +38835,7 @@
         </p:nvSpPr>
         <p:spPr>
           <a:xfrm>
-            <a:off x="2386584" y="2130552"/>
+            <a:off x="2066544" y="2130552"/>
             <a:ext cx="164592" cy="164592"/>
           </a:xfrm>
           <a:prstGeom prst="ellipse">
@@ -38016,8 +38860,8 @@
         </p:nvSpPr>
         <p:spPr>
           <a:xfrm>
-            <a:off x="1828800" y="2377440"/>
-            <a:ext cx="1280160" cy="182880"/>
+            <a:off x="1600200" y="2377440"/>
+            <a:ext cx="1097280" cy="182880"/>
           </a:xfrm>
           <a:prstGeom prst="rect">
             <a:avLst/>
@@ -38055,8 +38899,8 @@
         </p:nvSpPr>
         <p:spPr>
           <a:xfrm>
-            <a:off x="1828800" y="2560320"/>
-            <a:ext cx="1280160" cy="219456"/>
+            <a:off x="1600200" y="2560320"/>
+            <a:ext cx="1097280" cy="219456"/>
           </a:xfrm>
           <a:prstGeom prst="rect">
             <a:avLst/>
@@ -38072,7 +38916,7 @@
               <a:buNone/>
             </a:pPr>
             <a:r>
-              <a:rPr lang="en-US" sz="1000" b="1" dirty="0">
+              <a:rPr lang="en-US" sz="950" b="1" dirty="0">
                 <a:solidFill>
                   <a:srgbClr val="18181B"/>
                 </a:solidFill>
@@ -38082,7 +38926,7 @@
               </a:rPr>
               <a:t>분석 서비스 완성</a:t>
             </a:r>
-            <a:endParaRPr lang="en-US" sz="1000" dirty="0"/>
+            <a:endParaRPr lang="en-US" sz="950" dirty="0"/>
           </a:p>
         </p:txBody>
       </p:sp>
@@ -38094,8 +38938,8 @@
         </p:nvSpPr>
         <p:spPr>
           <a:xfrm>
-            <a:off x="1828800" y="2834640"/>
-            <a:ext cx="1280160" cy="822960"/>
+            <a:off x="1600200" y="2834640"/>
+            <a:ext cx="1097280" cy="822960"/>
           </a:xfrm>
           <a:prstGeom prst="rect">
             <a:avLst/>
@@ -38114,7 +38958,7 @@
               <a:buNone/>
             </a:pPr>
             <a:r>
-              <a:rPr lang="en-US" sz="750" dirty="0">
+              <a:rPr lang="en-US" sz="700" dirty="0">
                 <a:solidFill>
                   <a:srgbClr val="52525B"/>
                 </a:solidFill>
@@ -38124,7 +38968,7 @@
               </a:rPr>
               <a:t>분석 API·OCR 연동</a:t>
             </a:r>
-            <a:endParaRPr lang="en-US" sz="750" dirty="0"/>
+            <a:endParaRPr lang="en-US" sz="700" dirty="0"/>
           </a:p>
           <a:p>
             <a:pPr algn="ctr" indent="0" marL="0">
@@ -38134,7 +38978,7 @@
               <a:buNone/>
             </a:pPr>
             <a:r>
-              <a:rPr lang="en-US" sz="750" dirty="0">
+              <a:rPr lang="en-US" sz="700" dirty="0">
                 <a:solidFill>
                   <a:srgbClr val="52525B"/>
                 </a:solidFill>
@@ -38144,7 +38988,7 @@
               </a:rPr>
               <a:t>건축물대장·e2e 테스트</a:t>
             </a:r>
-            <a:endParaRPr lang="en-US" sz="750" dirty="0"/>
+            <a:endParaRPr lang="en-US" sz="700" dirty="0"/>
           </a:p>
           <a:p>
             <a:pPr algn="ctr" indent="0" marL="0">
@@ -38154,7 +38998,7 @@
               <a:buNone/>
             </a:pPr>
             <a:r>
-              <a:rPr lang="en-US" sz="750" dirty="0">
+              <a:rPr lang="en-US" sz="700" dirty="0">
                 <a:solidFill>
                   <a:srgbClr val="52525B"/>
                 </a:solidFill>
@@ -38164,7 +39008,7 @@
               </a:rPr>
               <a:t>로그인·소셜 로그인</a:t>
             </a:r>
-            <a:endParaRPr lang="en-US" sz="750" dirty="0"/>
+            <a:endParaRPr lang="en-US" sz="700" dirty="0"/>
           </a:p>
           <a:p>
             <a:pPr algn="ctr" indent="0" marL="0">
@@ -38174,7 +39018,7 @@
               <a:buNone/>
             </a:pPr>
             <a:r>
-              <a:rPr lang="en-US" sz="750" dirty="0">
+              <a:rPr lang="en-US" sz="700" dirty="0">
                 <a:solidFill>
                   <a:srgbClr val="52525B"/>
                 </a:solidFill>
@@ -38184,7 +39028,7 @@
               </a:rPr>
               <a:t>변호사 승인·상담</a:t>
             </a:r>
-            <a:endParaRPr lang="en-US" sz="750" dirty="0"/>
+            <a:endParaRPr lang="en-US" sz="700" dirty="0"/>
           </a:p>
         </p:txBody>
       </p:sp>
@@ -38196,7 +39040,7 @@
         </p:nvSpPr>
         <p:spPr>
           <a:xfrm>
-            <a:off x="3758184" y="2130552"/>
+            <a:off x="3255264" y="2130552"/>
             <a:ext cx="164592" cy="164592"/>
           </a:xfrm>
           <a:prstGeom prst="ellipse">
@@ -38221,8 +39065,8 @@
         </p:nvSpPr>
         <p:spPr>
           <a:xfrm>
-            <a:off x="3200400" y="2377440"/>
-            <a:ext cx="1280160" cy="182880"/>
+            <a:off x="2788920" y="2377440"/>
+            <a:ext cx="1097280" cy="182880"/>
           </a:xfrm>
           <a:prstGeom prst="rect">
             <a:avLst/>
@@ -38260,8 +39104,8 @@
         </p:nvSpPr>
         <p:spPr>
           <a:xfrm>
-            <a:off x="3200400" y="2560320"/>
-            <a:ext cx="1280160" cy="219456"/>
+            <a:off x="2788920" y="2560320"/>
+            <a:ext cx="1097280" cy="219456"/>
           </a:xfrm>
           <a:prstGeom prst="rect">
             <a:avLst/>
@@ -38277,7 +39121,7 @@
               <a:buNone/>
             </a:pPr>
             <a:r>
-              <a:rPr lang="en-US" sz="1000" b="1" dirty="0">
+              <a:rPr lang="en-US" sz="950" b="1" dirty="0">
                 <a:solidFill>
                   <a:srgbClr val="18181B"/>
                 </a:solidFill>
@@ -38287,7 +39131,7 @@
               </a:rPr>
               <a:t>상담·결제·보안</a:t>
             </a:r>
-            <a:endParaRPr lang="en-US" sz="1000" dirty="0"/>
+            <a:endParaRPr lang="en-US" sz="950" dirty="0"/>
           </a:p>
         </p:txBody>
       </p:sp>
@@ -38299,8 +39143,8 @@
         </p:nvSpPr>
         <p:spPr>
           <a:xfrm>
-            <a:off x="3200400" y="2834640"/>
-            <a:ext cx="1280160" cy="822960"/>
+            <a:off x="2788920" y="2834640"/>
+            <a:ext cx="1097280" cy="822960"/>
           </a:xfrm>
           <a:prstGeom prst="rect">
             <a:avLst/>
@@ -38319,7 +39163,7 @@
               <a:buNone/>
             </a:pPr>
             <a:r>
-              <a:rPr lang="en-US" sz="750" dirty="0">
+              <a:rPr lang="en-US" sz="700" dirty="0">
                 <a:solidFill>
                   <a:srgbClr val="52525B"/>
                 </a:solidFill>
@@ -38329,7 +39173,7 @@
               </a:rPr>
               <a:t>신고·정지·차단</a:t>
             </a:r>
-            <a:endParaRPr lang="en-US" sz="750" dirty="0"/>
+            <a:endParaRPr lang="en-US" sz="700" dirty="0"/>
           </a:p>
           <a:p>
             <a:pPr algn="ctr" indent="0" marL="0">
@@ -38339,7 +39183,7 @@
               <a:buNone/>
             </a:pPr>
             <a:r>
-              <a:rPr lang="en-US" sz="750" dirty="0">
+              <a:rPr lang="en-US" sz="700" dirty="0">
                 <a:solidFill>
                   <a:srgbClr val="52525B"/>
                 </a:solidFill>
@@ -38349,7 +39193,7 @@
               </a:rPr>
               <a:t>WebSocket 실시간 채팅</a:t>
             </a:r>
-            <a:endParaRPr lang="en-US" sz="750" dirty="0"/>
+            <a:endParaRPr lang="en-US" sz="700" dirty="0"/>
           </a:p>
           <a:p>
             <a:pPr algn="ctr" indent="0" marL="0">
@@ -38359,7 +39203,7 @@
               <a:buNone/>
             </a:pPr>
             <a:r>
-              <a:rPr lang="en-US" sz="750" dirty="0">
+              <a:rPr lang="en-US" sz="700" dirty="0">
                 <a:solidFill>
                   <a:srgbClr val="52525B"/>
                 </a:solidFill>
@@ -38369,7 +39213,7 @@
               </a:rPr>
               <a:t>토스 결제·환불</a:t>
             </a:r>
-            <a:endParaRPr lang="en-US" sz="750" dirty="0"/>
+            <a:endParaRPr lang="en-US" sz="700" dirty="0"/>
           </a:p>
           <a:p>
             <a:pPr algn="ctr" indent="0" marL="0">
@@ -38379,7 +39223,7 @@
               <a:buNone/>
             </a:pPr>
             <a:r>
-              <a:rPr lang="en-US" sz="750" dirty="0">
+              <a:rPr lang="en-US" sz="700" dirty="0">
                 <a:solidFill>
                   <a:srgbClr val="52525B"/>
                 </a:solidFill>
@@ -38389,7 +39233,7 @@
               </a:rPr>
               <a:t>이메일 인증·계정 잠금</a:t>
             </a:r>
-            <a:endParaRPr lang="en-US" sz="750" dirty="0"/>
+            <a:endParaRPr lang="en-US" sz="700" dirty="0"/>
           </a:p>
         </p:txBody>
       </p:sp>
@@ -38401,7 +39245,7 @@
         </p:nvSpPr>
         <p:spPr>
           <a:xfrm>
-            <a:off x="5129784" y="2130552"/>
+            <a:off x="4443984" y="2130552"/>
             <a:ext cx="164592" cy="164592"/>
           </a:xfrm>
           <a:prstGeom prst="ellipse">
@@ -38426,8 +39270,8 @@
         </p:nvSpPr>
         <p:spPr>
           <a:xfrm>
-            <a:off x="4572000" y="2377440"/>
-            <a:ext cx="1280160" cy="182880"/>
+            <a:off x="3977640" y="2377440"/>
+            <a:ext cx="1097280" cy="182880"/>
           </a:xfrm>
           <a:prstGeom prst="rect">
             <a:avLst/>
@@ -38465,8 +39309,8 @@
         </p:nvSpPr>
         <p:spPr>
           <a:xfrm>
-            <a:off x="4572000" y="2560320"/>
-            <a:ext cx="1280160" cy="219456"/>
+            <a:off x="3977640" y="2560320"/>
+            <a:ext cx="1097280" cy="219456"/>
           </a:xfrm>
           <a:prstGeom prst="rect">
             <a:avLst/>
@@ -38482,7 +39326,7 @@
               <a:buNone/>
             </a:pPr>
             <a:r>
-              <a:rPr lang="en-US" sz="1000" b="1" dirty="0">
+              <a:rPr lang="en-US" sz="950" b="1" dirty="0">
                 <a:solidFill>
                   <a:srgbClr val="18181B"/>
                 </a:solidFill>
@@ -38492,7 +39336,7 @@
               </a:rPr>
               <a:t>Flutter 앱</a:t>
             </a:r>
-            <a:endParaRPr lang="en-US" sz="1000" dirty="0"/>
+            <a:endParaRPr lang="en-US" sz="950" dirty="0"/>
           </a:p>
         </p:txBody>
       </p:sp>
@@ -38504,8 +39348,8 @@
         </p:nvSpPr>
         <p:spPr>
           <a:xfrm>
-            <a:off x="4572000" y="2834640"/>
-            <a:ext cx="1280160" cy="822960"/>
+            <a:off x="3977640" y="2834640"/>
+            <a:ext cx="1097280" cy="822960"/>
           </a:xfrm>
           <a:prstGeom prst="rect">
             <a:avLst/>
@@ -38524,7 +39368,7 @@
               <a:buNone/>
             </a:pPr>
             <a:r>
-              <a:rPr lang="en-US" sz="750" dirty="0">
+              <a:rPr lang="en-US" sz="700" dirty="0">
                 <a:solidFill>
                   <a:srgbClr val="52525B"/>
                 </a:solidFill>
@@ -38534,7 +39378,7 @@
               </a:rPr>
               <a:t>회원·변호사·관리자 앱</a:t>
             </a:r>
-            <a:endParaRPr lang="en-US" sz="750" dirty="0"/>
+            <a:endParaRPr lang="en-US" sz="700" dirty="0"/>
           </a:p>
           <a:p>
             <a:pPr algn="ctr" indent="0" marL="0">
@@ -38544,7 +39388,7 @@
               <a:buNone/>
             </a:pPr>
             <a:r>
-              <a:rPr lang="en-US" sz="750" dirty="0">
+              <a:rPr lang="en-US" sz="700" dirty="0">
                 <a:solidFill>
                   <a:srgbClr val="52525B"/>
                 </a:solidFill>
@@ -38554,7 +39398,7 @@
               </a:rPr>
               <a:t>FCM 앱 푸시</a:t>
             </a:r>
-            <a:endParaRPr lang="en-US" sz="750" dirty="0"/>
+            <a:endParaRPr lang="en-US" sz="700" dirty="0"/>
           </a:p>
           <a:p>
             <a:pPr algn="ctr" indent="0" marL="0">
@@ -38564,7 +39408,7 @@
               <a:buNone/>
             </a:pPr>
             <a:r>
-              <a:rPr lang="en-US" sz="750" dirty="0">
+              <a:rPr lang="en-US" sz="700" dirty="0">
                 <a:solidFill>
                   <a:srgbClr val="52525B"/>
                 </a:solidFill>
@@ -38574,7 +39418,7 @@
               </a:rPr>
               <a:t>PKCE 소셜 로그인</a:t>
             </a:r>
-            <a:endParaRPr lang="en-US" sz="750" dirty="0"/>
+            <a:endParaRPr lang="en-US" sz="700" dirty="0"/>
           </a:p>
           <a:p>
             <a:pPr algn="ctr" indent="0" marL="0">
@@ -38584,7 +39428,7 @@
               <a:buNone/>
             </a:pPr>
             <a:r>
-              <a:rPr lang="en-US" sz="750" dirty="0">
+              <a:rPr lang="en-US" sz="700" dirty="0">
                 <a:solidFill>
                   <a:srgbClr val="52525B"/>
                 </a:solidFill>
@@ -38594,7 +39438,7 @@
               </a:rPr>
               <a:t>실시간 문의함</a:t>
             </a:r>
-            <a:endParaRPr lang="en-US" sz="750" dirty="0"/>
+            <a:endParaRPr lang="en-US" sz="700" dirty="0"/>
           </a:p>
         </p:txBody>
       </p:sp>
@@ -38606,7 +39450,7 @@
         </p:nvSpPr>
         <p:spPr>
           <a:xfrm>
-            <a:off x="6501384" y="2130552"/>
+            <a:off x="5632704" y="2130552"/>
             <a:ext cx="164592" cy="164592"/>
           </a:xfrm>
           <a:prstGeom prst="ellipse">
@@ -38631,8 +39475,8 @@
         </p:nvSpPr>
         <p:spPr>
           <a:xfrm>
-            <a:off x="5943600" y="2377440"/>
-            <a:ext cx="1280160" cy="182880"/>
+            <a:off x="5166360" y="2377440"/>
+            <a:ext cx="1097280" cy="182880"/>
           </a:xfrm>
           <a:prstGeom prst="rect">
             <a:avLst/>
@@ -38670,8 +39514,8 @@
         </p:nvSpPr>
         <p:spPr>
           <a:xfrm>
-            <a:off x="5943600" y="2560320"/>
-            <a:ext cx="1280160" cy="219456"/>
+            <a:off x="5166360" y="2560320"/>
+            <a:ext cx="1097280" cy="219456"/>
           </a:xfrm>
           <a:prstGeom prst="rect">
             <a:avLst/>
@@ -38687,7 +39531,7 @@
               <a:buNone/>
             </a:pPr>
             <a:r>
-              <a:rPr lang="en-US" sz="1000" b="1" dirty="0">
+              <a:rPr lang="en-US" sz="950" b="1" dirty="0">
                 <a:solidFill>
                   <a:srgbClr val="18181B"/>
                 </a:solidFill>
@@ -38697,7 +39541,7 @@
               </a:rPr>
               <a:t>분석 범위 확장</a:t>
             </a:r>
-            <a:endParaRPr lang="en-US" sz="1000" dirty="0"/>
+            <a:endParaRPr lang="en-US" sz="950" dirty="0"/>
           </a:p>
         </p:txBody>
       </p:sp>
@@ -38709,8 +39553,8 @@
         </p:nvSpPr>
         <p:spPr>
           <a:xfrm>
-            <a:off x="5943600" y="2834640"/>
-            <a:ext cx="1280160" cy="822960"/>
+            <a:off x="5166360" y="2834640"/>
+            <a:ext cx="1097280" cy="822960"/>
           </a:xfrm>
           <a:prstGeom prst="rect">
             <a:avLst/>
@@ -38729,7 +39573,7 @@
               <a:buNone/>
             </a:pPr>
             <a:r>
-              <a:rPr lang="en-US" sz="750" dirty="0">
+              <a:rPr lang="en-US" sz="700" dirty="0">
                 <a:solidFill>
                   <a:srgbClr val="52525B"/>
                 </a:solidFill>
@@ -38739,7 +39583,7 @@
               </a:rPr>
               <a:t>원룸·다가구 조건부 분석</a:t>
             </a:r>
-            <a:endParaRPr lang="en-US" sz="750" dirty="0"/>
+            <a:endParaRPr lang="en-US" sz="700" dirty="0"/>
           </a:p>
           <a:p>
             <a:pPr algn="ctr" indent="0" marL="0">
@@ -38749,7 +39593,7 @@
               <a:buNone/>
             </a:pPr>
             <a:r>
-              <a:rPr lang="en-US" sz="750" dirty="0">
+              <a:rPr lang="en-US" sz="700" dirty="0">
                 <a:solidFill>
                   <a:srgbClr val="52525B"/>
                 </a:solidFill>
@@ -38759,7 +39603,7 @@
               </a:rPr>
               <a:t>토지 등기부 함께 분석</a:t>
             </a:r>
-            <a:endParaRPr lang="en-US" sz="750" dirty="0"/>
+            <a:endParaRPr lang="en-US" sz="700" dirty="0"/>
           </a:p>
           <a:p>
             <a:pPr algn="ctr" indent="0" marL="0">
@@ -38769,7 +39613,7 @@
               <a:buNone/>
             </a:pPr>
             <a:r>
-              <a:rPr lang="en-US" sz="750" dirty="0">
+              <a:rPr lang="en-US" sz="700" dirty="0">
                 <a:solidFill>
                   <a:srgbClr val="52525B"/>
                 </a:solidFill>
@@ -38779,7 +39623,7 @@
               </a:rPr>
               <a:t>근린생활시설 감지</a:t>
             </a:r>
-            <a:endParaRPr lang="en-US" sz="750" dirty="0"/>
+            <a:endParaRPr lang="en-US" sz="700" dirty="0"/>
           </a:p>
           <a:p>
             <a:pPr algn="ctr" indent="0" marL="0">
@@ -38789,7 +39633,7 @@
               <a:buNone/>
             </a:pPr>
             <a:r>
-              <a:rPr lang="en-US" sz="750" dirty="0">
+              <a:rPr lang="en-US" sz="700" dirty="0">
                 <a:solidFill>
                   <a:srgbClr val="52525B"/>
                 </a:solidFill>
@@ -38799,7 +39643,7 @@
               </a:rPr>
               <a:t>HUG 반환보증 추정</a:t>
             </a:r>
-            <a:endParaRPr lang="en-US" sz="750" dirty="0"/>
+            <a:endParaRPr lang="en-US" sz="700" dirty="0"/>
           </a:p>
         </p:txBody>
       </p:sp>
@@ -38811,7 +39655,192 @@
         </p:nvSpPr>
         <p:spPr>
           <a:xfrm>
-            <a:off x="7872984" y="2130552"/>
+            <a:off x="6821424" y="2130552"/>
+            <a:ext cx="164592" cy="164592"/>
+          </a:xfrm>
+          <a:prstGeom prst="ellipse">
+            <a:avLst/>
+          </a:prstGeom>
+          <a:solidFill>
+            <a:srgbClr val="F97316"/>
+          </a:solidFill>
+          <a:ln w="19050">
+            <a:solidFill>
+              <a:srgbClr val="FFFFFF"/>
+            </a:solidFill>
+            <a:prstDash val="solid"/>
+          </a:ln>
+        </p:spPr>
+      </p:sp>
+      <p:sp>
+        <p:nvSpPr>
+          <p:cNvPr id="38" name="Text 36"/>
+          <p:cNvSpPr txBox="1"/>
+          <p:nvPr/>
+        </p:nvSpPr>
+        <p:spPr>
+          <a:xfrm>
+            <a:off x="6355080" y="2377440"/>
+            <a:ext cx="1097280" cy="182880"/>
+          </a:xfrm>
+          <a:prstGeom prst="rect">
+            <a:avLst/>
+          </a:prstGeom>
+          <a:noFill/>
+          <a:ln/>
+        </p:spPr>
+        <p:txBody>
+          <a:bodyPr wrap="square" lIns="0" tIns="0" rIns="0" bIns="0" rtlCol="0" anchor="t"/>
+          <a:lstStyle/>
+          <a:p>
+            <a:pPr algn="ctr" indent="0" marL="0">
+              <a:buNone/>
+            </a:pPr>
+            <a:r>
+              <a:rPr lang="en-US" sz="850" b="1" dirty="0">
+                <a:solidFill>
+                  <a:srgbClr val="F97316"/>
+                </a:solidFill>
+                <a:latin typeface="Malgun Gothic" pitchFamily="34" charset="0"/>
+                <a:ea typeface="Malgun Gothic" pitchFamily="34" charset="-122"/>
+                <a:cs typeface="Malgun Gothic" pitchFamily="34" charset="-120"/>
+              </a:rPr>
+              <a:t>10.10</a:t>
+            </a:r>
+            <a:endParaRPr lang="en-US" sz="850" dirty="0"/>
+          </a:p>
+        </p:txBody>
+      </p:sp>
+      <p:sp>
+        <p:nvSpPr>
+          <p:cNvPr id="39" name="Text 37"/>
+          <p:cNvSpPr txBox="1"/>
+          <p:nvPr/>
+        </p:nvSpPr>
+        <p:spPr>
+          <a:xfrm>
+            <a:off x="6355080" y="2560320"/>
+            <a:ext cx="1097280" cy="219456"/>
+          </a:xfrm>
+          <a:prstGeom prst="rect">
+            <a:avLst/>
+          </a:prstGeom>
+          <a:noFill/>
+          <a:ln/>
+        </p:spPr>
+        <p:txBody>
+          <a:bodyPr wrap="square" lIns="0" tIns="0" rIns="0" bIns="0" rtlCol="0" anchor="t"/>
+          <a:lstStyle/>
+          <a:p>
+            <a:pPr algn="ctr" indent="0" marL="0">
+              <a:buNone/>
+            </a:pPr>
+            <a:r>
+              <a:rPr lang="en-US" sz="950" b="1" dirty="0">
+                <a:solidFill>
+                  <a:srgbClr val="18181B"/>
+                </a:solidFill>
+                <a:latin typeface="Malgun Gothic" pitchFamily="34" charset="0"/>
+                <a:ea typeface="Malgun Gothic" pitchFamily="34" charset="-122"/>
+                <a:cs typeface="Malgun Gothic" pitchFamily="34" charset="-120"/>
+              </a:rPr>
+              <a:t>개발 완료</a:t>
+            </a:r>
+            <a:endParaRPr lang="en-US" sz="950" dirty="0"/>
+          </a:p>
+        </p:txBody>
+      </p:sp>
+      <p:sp>
+        <p:nvSpPr>
+          <p:cNvPr id="40" name="Text 38"/>
+          <p:cNvSpPr txBox="1"/>
+          <p:nvPr/>
+        </p:nvSpPr>
+        <p:spPr>
+          <a:xfrm>
+            <a:off x="6355080" y="2834640"/>
+            <a:ext cx="1097280" cy="822960"/>
+          </a:xfrm>
+          <a:prstGeom prst="rect">
+            <a:avLst/>
+          </a:prstGeom>
+          <a:noFill/>
+          <a:ln/>
+        </p:spPr>
+        <p:txBody>
+          <a:bodyPr wrap="square" lIns="0" tIns="0" rIns="0" bIns="0" rtlCol="0" anchor="t"/>
+          <a:lstStyle/>
+          <a:p>
+            <a:pPr algn="ctr" indent="0" marL="0">
+              <a:lnSpc>
+                <a:spcPct val="125000"/>
+              </a:lnSpc>
+              <a:buNone/>
+            </a:pPr>
+            <a:r>
+              <a:rPr lang="en-US" sz="700" dirty="0">
+                <a:solidFill>
+                  <a:srgbClr val="52525B"/>
+                </a:solidFill>
+                <a:latin typeface="Malgun Gothic" pitchFamily="34" charset="0"/>
+                <a:ea typeface="Malgun Gothic" pitchFamily="34" charset="-122"/>
+                <a:cs typeface="Malgun Gothic" pitchFamily="34" charset="-120"/>
+              </a:rPr>
+              <a:t>전체 기능 마무리</a:t>
+            </a:r>
+            <a:endParaRPr lang="en-US" sz="700" dirty="0"/>
+          </a:p>
+          <a:p>
+            <a:pPr algn="ctr" indent="0" marL="0">
+              <a:lnSpc>
+                <a:spcPct val="125000"/>
+              </a:lnSpc>
+              <a:buNone/>
+            </a:pPr>
+            <a:r>
+              <a:rPr lang="en-US" sz="700" dirty="0">
+                <a:solidFill>
+                  <a:srgbClr val="52525B"/>
+                </a:solidFill>
+                <a:latin typeface="Malgun Gothic" pitchFamily="34" charset="0"/>
+                <a:ea typeface="Malgun Gothic" pitchFamily="34" charset="-122"/>
+                <a:cs typeface="Malgun Gothic" pitchFamily="34" charset="-120"/>
+              </a:rPr>
+              <a:t>결정 사항 정리</a:t>
+            </a:r>
+            <a:endParaRPr lang="en-US" sz="700" dirty="0"/>
+          </a:p>
+          <a:p>
+            <a:pPr algn="ctr" indent="0" marL="0">
+              <a:lnSpc>
+                <a:spcPct val="125000"/>
+              </a:lnSpc>
+              <a:buNone/>
+            </a:pPr>
+            <a:r>
+              <a:rPr lang="en-US" sz="700" dirty="0">
+                <a:solidFill>
+                  <a:srgbClr val="52525B"/>
+                </a:solidFill>
+                <a:latin typeface="Malgun Gothic" pitchFamily="34" charset="0"/>
+                <a:ea typeface="Malgun Gothic" pitchFamily="34" charset="-122"/>
+                <a:cs typeface="Malgun Gothic" pitchFamily="34" charset="-120"/>
+              </a:rPr>
+              <a:t>배포 준비 착수</a:t>
+            </a:r>
+            <a:endParaRPr lang="en-US" sz="700" dirty="0"/>
+          </a:p>
+        </p:txBody>
+      </p:sp>
+      <p:sp>
+        <p:nvSpPr>
+          <p:cNvPr id="41" name="Shape 39"/>
+          <p:cNvSpPr/>
+          <p:nvPr/>
+        </p:nvSpPr>
+        <p:spPr>
+          <a:xfrm>
+            <a:off x="8010144" y="2130552"/>
             <a:ext cx="164592" cy="164592"/>
           </a:xfrm>
           <a:prstGeom prst="ellipse">
@@ -38830,14 +39859,14 @@
       </p:sp>
       <p:sp>
         <p:nvSpPr>
-          <p:cNvPr id="38" name="Text 36"/>
-          <p:cNvSpPr txBox="1"/>
-          <p:nvPr/>
-        </p:nvSpPr>
-        <p:spPr>
-          <a:xfrm>
-            <a:off x="7315200" y="2377440"/>
-            <a:ext cx="1280160" cy="182880"/>
+          <p:cNvPr id="42" name="Text 40"/>
+          <p:cNvSpPr txBox="1"/>
+          <p:nvPr/>
+        </p:nvSpPr>
+        <p:spPr>
+          <a:xfrm>
+            <a:off x="7543800" y="2377440"/>
+            <a:ext cx="1097280" cy="182880"/>
           </a:xfrm>
           <a:prstGeom prst="rect">
             <a:avLst/>
@@ -38861,7 +39890,7 @@
                 <a:ea typeface="Malgun Gothic" pitchFamily="34" charset="-122"/>
                 <a:cs typeface="Malgun Gothic" pitchFamily="34" charset="-120"/>
               </a:rPr>
-              <a:t>10.10</a:t>
+              <a:t>10.15</a:t>
             </a:r>
             <a:endParaRPr lang="en-US" sz="850" dirty="0"/>
           </a:p>
@@ -38869,14 +39898,14 @@
       </p:sp>
       <p:sp>
         <p:nvSpPr>
-          <p:cNvPr id="39" name="Text 37"/>
-          <p:cNvSpPr txBox="1"/>
-          <p:nvPr/>
-        </p:nvSpPr>
-        <p:spPr>
-          <a:xfrm>
-            <a:off x="7315200" y="2560320"/>
-            <a:ext cx="1280160" cy="219456"/>
+          <p:cNvPr id="43" name="Text 41"/>
+          <p:cNvSpPr txBox="1"/>
+          <p:nvPr/>
+        </p:nvSpPr>
+        <p:spPr>
+          <a:xfrm>
+            <a:off x="7543800" y="2560320"/>
+            <a:ext cx="1097280" cy="219456"/>
           </a:xfrm>
           <a:prstGeom prst="rect">
             <a:avLst/>
@@ -38892,7 +39921,7 @@
               <a:buNone/>
             </a:pPr>
             <a:r>
-              <a:rPr lang="en-US" sz="1000" b="1" dirty="0">
+              <a:rPr lang="en-US" sz="950" b="1" dirty="0">
                 <a:solidFill>
                   <a:srgbClr val="18181B"/>
                 </a:solidFill>
@@ -38900,22 +39929,22 @@
                 <a:ea typeface="Malgun Gothic" pitchFamily="34" charset="-122"/>
                 <a:cs typeface="Malgun Gothic" pitchFamily="34" charset="-120"/>
               </a:rPr>
-              <a:t>개발 완료</a:t>
-            </a:r>
-            <a:endParaRPr lang="en-US" sz="1000" dirty="0"/>
-          </a:p>
-        </p:txBody>
-      </p:sp>
-      <p:sp>
-        <p:nvSpPr>
-          <p:cNvPr id="40" name="Text 38"/>
-          <p:cNvSpPr txBox="1"/>
-          <p:nvPr/>
-        </p:nvSpPr>
-        <p:spPr>
-          <a:xfrm>
-            <a:off x="7315200" y="2834640"/>
-            <a:ext cx="1280160" cy="822960"/>
+              <a:t>보완 · CI</a:t>
+            </a:r>
+            <a:endParaRPr lang="en-US" sz="950" dirty="0"/>
+          </a:p>
+        </p:txBody>
+      </p:sp>
+      <p:sp>
+        <p:nvSpPr>
+          <p:cNvPr id="44" name="Text 42"/>
+          <p:cNvSpPr txBox="1"/>
+          <p:nvPr/>
+        </p:nvSpPr>
+        <p:spPr>
+          <a:xfrm>
+            <a:off x="7543800" y="2834640"/>
+            <a:ext cx="1097280" cy="822960"/>
           </a:xfrm>
           <a:prstGeom prst="rect">
             <a:avLst/>
@@ -38934,7 +39963,7 @@
               <a:buNone/>
             </a:pPr>
             <a:r>
-              <a:rPr lang="en-US" sz="750" dirty="0">
+              <a:rPr lang="en-US" sz="700" dirty="0">
                 <a:solidFill>
                   <a:srgbClr val="52525B"/>
                 </a:solidFill>
@@ -38942,9 +39971,9 @@
                 <a:ea typeface="Malgun Gothic" pitchFamily="34" charset="-122"/>
                 <a:cs typeface="Malgun Gothic" pitchFamily="34" charset="-120"/>
               </a:rPr>
-              <a:t>자동화 테스트 319개</a:t>
-            </a:r>
-            <a:endParaRPr lang="en-US" sz="750" dirty="0"/>
+              <a:t>결제 결과 불확실 처리</a:t>
+            </a:r>
+            <a:endParaRPr lang="en-US" sz="700" dirty="0"/>
           </a:p>
           <a:p>
             <a:pPr algn="ctr" indent="0" marL="0">
@@ -38954,7 +39983,7 @@
               <a:buNone/>
             </a:pPr>
             <a:r>
-              <a:rPr lang="en-US" sz="750" dirty="0">
+              <a:rPr lang="en-US" sz="700" dirty="0">
                 <a:solidFill>
                   <a:srgbClr val="52525B"/>
                 </a:solidFill>
@@ -38962,9 +39991,9 @@
                 <a:ea typeface="Malgun Gothic" pitchFamily="34" charset="-122"/>
                 <a:cs typeface="Malgun Gothic" pitchFamily="34" charset="-120"/>
               </a:rPr>
-              <a:t>결정 사항 51건 정리</a:t>
-            </a:r>
-            <a:endParaRPr lang="en-US" sz="750" dirty="0"/>
+              <a:t>이용권 선점·환원</a:t>
+            </a:r>
+            <a:endParaRPr lang="en-US" sz="700" dirty="0"/>
           </a:p>
           <a:p>
             <a:pPr algn="ctr" indent="0" marL="0">
@@ -38974,7 +40003,7 @@
               <a:buNone/>
             </a:pPr>
             <a:r>
-              <a:rPr lang="en-US" sz="750" dirty="0">
+              <a:rPr lang="en-US" sz="700" dirty="0">
                 <a:solidFill>
                   <a:srgbClr val="52525B"/>
                 </a:solidFill>
@@ -38982,15 +40011,35 @@
                 <a:ea typeface="Malgun Gothic" pitchFamily="34" charset="-122"/>
                 <a:cs typeface="Malgun Gothic" pitchFamily="34" charset="-120"/>
               </a:rPr>
-              <a:t>배포 준비 착수</a:t>
-            </a:r>
-            <a:endParaRPr lang="en-US" sz="750" dirty="0"/>
-          </a:p>
-        </p:txBody>
-      </p:sp>
-      <p:sp>
-        <p:nvSpPr>
-          <p:cNvPr id="41" name="Text 39"/>
+              <a:t>토큰 해시 저장</a:t>
+            </a:r>
+            <a:endParaRPr lang="en-US" sz="700" dirty="0"/>
+          </a:p>
+          <a:p>
+            <a:pPr algn="ctr" indent="0" marL="0">
+              <a:lnSpc>
+                <a:spcPct val="125000"/>
+              </a:lnSpc>
+              <a:buNone/>
+            </a:pPr>
+            <a:r>
+              <a:rPr lang="en-US" sz="700" dirty="0">
+                <a:solidFill>
+                  <a:srgbClr val="52525B"/>
+                </a:solidFill>
+                <a:latin typeface="Malgun Gothic" pitchFamily="34" charset="0"/>
+                <a:ea typeface="Malgun Gothic" pitchFamily="34" charset="-122"/>
+                <a:cs typeface="Malgun Gothic" pitchFamily="34" charset="-120"/>
+              </a:rPr>
+              <a:t>GitHub Actions CI</a:t>
+            </a:r>
+            <a:endParaRPr lang="en-US" sz="700" dirty="0"/>
+          </a:p>
+        </p:txBody>
+      </p:sp>
+      <p:sp>
+        <p:nvSpPr>
+          <p:cNvPr id="45" name="Text 43"/>
           <p:cNvSpPr txBox="1"/>
           <p:nvPr/>
         </p:nvSpPr>
@@ -39021,7 +40070,7 @@
                 <a:ea typeface="Malgun Gothic" pitchFamily="34" charset="-122"/>
                 <a:cs typeface="Malgun Gothic" pitchFamily="34" charset="-120"/>
               </a:rPr>
-              <a:t>기능 단위 feature 브랜치 → PR → main, 결정 사항 51건을 문서로 기록</a:t>
+              <a:t>기능 단위 feature 브랜치 → PR → main, 결정 사항 54건을 문서로 기록 · GitHub Actions CI로 자동 검사</a:t>
             </a:r>
             <a:endParaRPr lang="en-US" sz="900" dirty="0"/>
           </a:p>
@@ -39884,7 +40933,7 @@
                 <a:ea typeface="Malgun Gothic" pitchFamily="34" charset="-122"/>
                 <a:cs typeface="Malgun Gothic" pitchFamily="34" charset="-120"/>
               </a:rPr>
-              <a:t>319개</a:t>
+              <a:t>328개</a:t>
             </a:r>
             <a:endParaRPr lang="en-US" sz="1800" dirty="0"/>
           </a:p>
@@ -39989,7 +41038,7 @@
                 <a:ea typeface="Malgun Gothic" pitchFamily="34" charset="-122"/>
                 <a:cs typeface="Malgun Gothic" pitchFamily="34" charset="-120"/>
               </a:rPr>
-              <a:t>51건</a:t>
+              <a:t>54건</a:t>
             </a:r>
             <a:endParaRPr lang="en-US" sz="1800" dirty="0"/>
           </a:p>
@@ -40094,7 +41143,7 @@
                 <a:ea typeface="Malgun Gothic" pitchFamily="34" charset="-122"/>
                 <a:cs typeface="Malgun Gothic" pitchFamily="34" charset="-120"/>
               </a:rPr>
-              <a:t>테스트 319개 = 백엔드 290 · Playwright e2e 22 · Flutter 7</a:t>
+              <a:t>테스트 328개 = 백엔드 299 · Playwright e2e 22 · Flutter 7 — GitHub Actions CI로 자동 실행</a:t>
             </a:r>
             <a:endParaRPr lang="en-US" sz="900" dirty="0"/>
           </a:p>
@@ -41282,7 +42331,7 @@
                 <a:ea typeface="Malgun Gothic" pitchFamily="34" charset="-122"/>
                 <a:cs typeface="Malgun Gothic" pitchFamily="34" charset="-120"/>
               </a:rPr>
-              <a:t>Next.js 16.3.5</a:t>
+              <a:t>Next.js 16.4.0</a:t>
             </a:r>
             <a:endParaRPr lang="en-US" sz="850" dirty="0"/>
           </a:p>
@@ -41560,6 +42609,72 @@
         </p:nvSpPr>
         <p:spPr>
           <a:xfrm>
+            <a:off x="2706624" y="3977640"/>
+            <a:ext cx="1600200" cy="310896"/>
+          </a:xfrm>
+          <a:prstGeom prst="roundRect">
+            <a:avLst>
+              <a:gd name="adj" fmla="val 23529"/>
+            </a:avLst>
+          </a:prstGeom>
+          <a:solidFill>
+            <a:srgbClr val="F4F4F5"/>
+          </a:solidFill>
+          <a:ln w="12700">
+            <a:solidFill>
+              <a:srgbClr val="F4F4F5"/>
+            </a:solidFill>
+            <a:prstDash val="solid"/>
+          </a:ln>
+        </p:spPr>
+      </p:sp>
+      <p:sp>
+        <p:nvSpPr>
+          <p:cNvPr id="36" name="Text 32"/>
+          <p:cNvSpPr txBox="1"/>
+          <p:nvPr/>
+        </p:nvSpPr>
+        <p:spPr>
+          <a:xfrm>
+            <a:off x="2706624" y="3977640"/>
+            <a:ext cx="1600200" cy="310896"/>
+          </a:xfrm>
+          <a:prstGeom prst="rect">
+            <a:avLst/>
+          </a:prstGeom>
+          <a:noFill/>
+          <a:ln/>
+        </p:spPr>
+        <p:txBody>
+          <a:bodyPr wrap="square" lIns="0" tIns="0" rIns="0" bIns="0" rtlCol="0" anchor="ctr"/>
+          <a:lstStyle/>
+          <a:p>
+            <a:pPr algn="ctr" indent="0" marL="0">
+              <a:buNone/>
+            </a:pPr>
+            <a:r>
+              <a:rPr lang="en-US" sz="850" b="1" dirty="0">
+                <a:solidFill>
+                  <a:srgbClr val="18181B"/>
+                </a:solidFill>
+                <a:latin typeface="Malgun Gothic" pitchFamily="34" charset="0"/>
+                <a:ea typeface="Malgun Gothic" pitchFamily="34" charset="-122"/>
+                <a:cs typeface="Malgun Gothic" pitchFamily="34" charset="-120"/>
+              </a:rPr>
+              <a:t>GitHub Actions CI</a:t>
+            </a:r>
+            <a:endParaRPr lang="en-US" sz="850" dirty="0"/>
+          </a:p>
+        </p:txBody>
+      </p:sp>
+      <p:sp>
+        <p:nvSpPr>
+          <p:cNvPr id="37" name="Shape 33"/>
+          <p:cNvSpPr/>
+          <p:nvPr/>
+        </p:nvSpPr>
+        <p:spPr>
+          <a:xfrm>
             <a:off x="4636008" y="1005840"/>
             <a:ext cx="1965960" cy="3520440"/>
           </a:xfrm>
@@ -41581,7 +42696,7 @@
       </p:sp>
       <p:pic>
         <p:nvPicPr>
-          <p:cNvPr id="36" name="Image 2" descr="preencoded.png">    </p:cNvPr>
+          <p:cNvPr id="38" name="Image 2" descr="preencoded.png">    </p:cNvPr>
           <p:cNvPicPr>
             <a:picLocks noChangeAspect="1"/>
           </p:cNvPicPr>
@@ -41605,7 +42720,7 @@
       </p:pic>
       <p:sp>
         <p:nvSpPr>
-          <p:cNvPr id="37" name="Text 32"/>
+          <p:cNvPr id="39" name="Text 34"/>
           <p:cNvSpPr txBox="1"/>
           <p:nvPr/>
         </p:nvSpPr>
@@ -41644,7 +42759,7 @@
       </p:sp>
       <p:sp>
         <p:nvSpPr>
-          <p:cNvPr id="38" name="Text 33"/>
+          <p:cNvPr id="40" name="Text 35"/>
           <p:cNvSpPr txBox="1"/>
           <p:nvPr/>
         </p:nvSpPr>
@@ -41683,7 +42798,7 @@
       </p:sp>
       <p:sp>
         <p:nvSpPr>
-          <p:cNvPr id="39" name="Shape 34"/>
+          <p:cNvPr id="41" name="Shape 36"/>
           <p:cNvSpPr/>
           <p:nvPr/>
         </p:nvSpPr>
@@ -41710,7 +42825,7 @@
       </p:sp>
       <p:sp>
         <p:nvSpPr>
-          <p:cNvPr id="40" name="Text 35"/>
+          <p:cNvPr id="42" name="Text 37"/>
           <p:cNvSpPr txBox="1"/>
           <p:nvPr/>
         </p:nvSpPr>
@@ -41749,7 +42864,7 @@
       </p:sp>
       <p:sp>
         <p:nvSpPr>
-          <p:cNvPr id="41" name="Shape 36"/>
+          <p:cNvPr id="43" name="Shape 38"/>
           <p:cNvSpPr/>
           <p:nvPr/>
         </p:nvSpPr>
@@ -41776,7 +42891,7 @@
       </p:sp>
       <p:sp>
         <p:nvSpPr>
-          <p:cNvPr id="42" name="Text 37"/>
+          <p:cNvPr id="44" name="Text 39"/>
           <p:cNvSpPr txBox="1"/>
           <p:nvPr/>
         </p:nvSpPr>
@@ -41815,7 +42930,7 @@
       </p:sp>
       <p:sp>
         <p:nvSpPr>
-          <p:cNvPr id="43" name="Shape 38"/>
+          <p:cNvPr id="45" name="Shape 40"/>
           <p:cNvSpPr/>
           <p:nvPr/>
         </p:nvSpPr>
@@ -41842,7 +42957,7 @@
       </p:sp>
       <p:sp>
         <p:nvSpPr>
-          <p:cNvPr id="44" name="Text 39"/>
+          <p:cNvPr id="46" name="Text 41"/>
           <p:cNvSpPr txBox="1"/>
           <p:nvPr/>
         </p:nvSpPr>
@@ -41881,7 +42996,7 @@
       </p:sp>
       <p:sp>
         <p:nvSpPr>
-          <p:cNvPr id="45" name="Shape 40"/>
+          <p:cNvPr id="47" name="Shape 42"/>
           <p:cNvSpPr/>
           <p:nvPr/>
         </p:nvSpPr>
@@ -41908,7 +43023,7 @@
       </p:sp>
       <p:sp>
         <p:nvSpPr>
-          <p:cNvPr id="46" name="Text 41"/>
+          <p:cNvPr id="48" name="Text 43"/>
           <p:cNvSpPr txBox="1"/>
           <p:nvPr/>
         </p:nvSpPr>
@@ -41947,7 +43062,7 @@
       </p:sp>
       <p:sp>
         <p:nvSpPr>
-          <p:cNvPr id="47" name="Shape 42"/>
+          <p:cNvPr id="49" name="Shape 44"/>
           <p:cNvSpPr/>
           <p:nvPr/>
         </p:nvSpPr>
@@ -41974,7 +43089,7 @@
       </p:sp>
       <p:sp>
         <p:nvSpPr>
-          <p:cNvPr id="48" name="Text 43"/>
+          <p:cNvPr id="50" name="Text 45"/>
           <p:cNvSpPr txBox="1"/>
           <p:nvPr/>
         </p:nvSpPr>
@@ -42013,7 +43128,7 @@
       </p:sp>
       <p:sp>
         <p:nvSpPr>
-          <p:cNvPr id="49" name="Shape 44"/>
+          <p:cNvPr id="51" name="Shape 46"/>
           <p:cNvSpPr/>
           <p:nvPr/>
         </p:nvSpPr>
@@ -42040,7 +43155,7 @@
       </p:sp>
       <p:pic>
         <p:nvPicPr>
-          <p:cNvPr id="50" name="Image 3" descr="preencoded.png">    </p:cNvPr>
+          <p:cNvPr id="52" name="Image 3" descr="preencoded.png">    </p:cNvPr>
           <p:cNvPicPr>
             <a:picLocks noChangeAspect="1"/>
           </p:cNvPicPr>
@@ -42064,7 +43179,7 @@
       </p:pic>
       <p:sp>
         <p:nvSpPr>
-          <p:cNvPr id="51" name="Text 45"/>
+          <p:cNvPr id="53" name="Text 47"/>
           <p:cNvSpPr txBox="1"/>
           <p:nvPr/>
         </p:nvSpPr>
@@ -42103,7 +43218,7 @@
       </p:sp>
       <p:sp>
         <p:nvSpPr>
-          <p:cNvPr id="52" name="Text 46"/>
+          <p:cNvPr id="54" name="Text 48"/>
           <p:cNvSpPr txBox="1"/>
           <p:nvPr/>
         </p:nvSpPr>
@@ -42142,7 +43257,7 @@
       </p:sp>
       <p:sp>
         <p:nvSpPr>
-          <p:cNvPr id="53" name="Shape 47"/>
+          <p:cNvPr id="55" name="Shape 49"/>
           <p:cNvSpPr/>
           <p:nvPr/>
         </p:nvSpPr>
@@ -42169,7 +43284,7 @@
       </p:sp>
       <p:sp>
         <p:nvSpPr>
-          <p:cNvPr id="54" name="Text 48"/>
+          <p:cNvPr id="56" name="Text 50"/>
           <p:cNvSpPr txBox="1"/>
           <p:nvPr/>
         </p:nvSpPr>
@@ -42208,7 +43323,7 @@
       </p:sp>
       <p:sp>
         <p:nvSpPr>
-          <p:cNvPr id="55" name="Shape 49"/>
+          <p:cNvPr id="57" name="Shape 51"/>
           <p:cNvSpPr/>
           <p:nvPr/>
         </p:nvSpPr>
@@ -42235,7 +43350,7 @@
       </p:sp>
       <p:sp>
         <p:nvSpPr>
-          <p:cNvPr id="56" name="Text 50"/>
+          <p:cNvPr id="58" name="Text 52"/>
           <p:cNvSpPr txBox="1"/>
           <p:nvPr/>
         </p:nvSpPr>
@@ -42274,7 +43389,7 @@
       </p:sp>
       <p:sp>
         <p:nvSpPr>
-          <p:cNvPr id="57" name="Shape 51"/>
+          <p:cNvPr id="59" name="Shape 53"/>
           <p:cNvSpPr/>
           <p:nvPr/>
         </p:nvSpPr>
@@ -42301,7 +43416,7 @@
       </p:sp>
       <p:sp>
         <p:nvSpPr>
-          <p:cNvPr id="58" name="Text 52"/>
+          <p:cNvPr id="60" name="Text 54"/>
           <p:cNvSpPr txBox="1"/>
           <p:nvPr/>
         </p:nvSpPr>
@@ -42340,7 +43455,7 @@
       </p:sp>
       <p:sp>
         <p:nvSpPr>
-          <p:cNvPr id="59" name="Shape 53"/>
+          <p:cNvPr id="61" name="Shape 55"/>
           <p:cNvSpPr/>
           <p:nvPr/>
         </p:nvSpPr>
@@ -42367,7 +43482,7 @@
       </p:sp>
       <p:sp>
         <p:nvSpPr>
-          <p:cNvPr id="60" name="Text 54"/>
+          <p:cNvPr id="62" name="Text 56"/>
           <p:cNvSpPr txBox="1"/>
           <p:nvPr/>
         </p:nvSpPr>
@@ -42406,7 +43521,7 @@
       </p:sp>
       <p:sp>
         <p:nvSpPr>
-          <p:cNvPr id="61" name="Shape 55"/>
+          <p:cNvPr id="63" name="Shape 57"/>
           <p:cNvSpPr/>
           <p:nvPr/>
         </p:nvSpPr>
@@ -42433,7 +43548,7 @@
       </p:sp>
       <p:sp>
         <p:nvSpPr>
-          <p:cNvPr id="62" name="Text 56"/>
+          <p:cNvPr id="64" name="Text 58"/>
           <p:cNvSpPr txBox="1"/>
           <p:nvPr/>
         </p:nvSpPr>
@@ -42472,7 +43587,7 @@
       </p:sp>
       <p:sp>
         <p:nvSpPr>
-          <p:cNvPr id="63" name="Shape 57"/>
+          <p:cNvPr id="65" name="Shape 59"/>
           <p:cNvSpPr/>
           <p:nvPr/>
         </p:nvSpPr>
@@ -42499,7 +43614,7 @@
       </p:sp>
       <p:sp>
         <p:nvSpPr>
-          <p:cNvPr id="64" name="Text 58"/>
+          <p:cNvPr id="66" name="Text 60"/>
           <p:cNvSpPr txBox="1"/>
           <p:nvPr/>
         </p:nvSpPr>

--- a/docs/portfolio/ProjectGuard_Portfolio.pptx
+++ b/docs/portfolio/ProjectGuard_Portfolio.pptx
@@ -140,13 +140,13 @@
   <p:extLst>
     <p:ext uri="{521415D9-36F7-43E2-AB2F-B90AF26B5E84}">
       <p14:sectionLst xmlns:p14="http://schemas.microsoft.com/office/powerpoint/2010/main">
-        <p14:section name="표지" id="{88c0e07a-cad4-e5de-ad0c-52d2f3b16b99}">
+        <p14:section name="표지" id="{c4e4f53f-6ff8-f0c0-3ec5-cd80b614c3aa}">
           <p14:sldIdLst>
             <p14:sldId id="256"/>
             <p14:sldId id="257"/>
           </p14:sldIdLst>
         </p14:section>
-        <p14:section name="01 프로젝트 개요" id="{db77ed6d-b610-c02a-e811-5fea9ff4d919}">
+        <p14:section name="01 프로젝트 개요" id="{210ce4c3-3cfb-5256-0a16-cf3be75e65c8}">
           <p14:sldIdLst>
             <p14:sldId id="258"/>
             <p14:sldId id="259"/>
@@ -155,7 +155,7 @@
             <p14:sldId id="262"/>
           </p14:sldIdLst>
         </p14:section>
-        <p14:section name="02 설계와 기술" id="{330e2825-93b6-80b3-a76c-c8b47fb1b258}">
+        <p14:section name="02 설계와 기술" id="{88a07baa-9f4b-afbe-c38e-529cbd7c4f48}">
           <p14:sldIdLst>
             <p14:sldId id="263"/>
             <p14:sldId id="264"/>
@@ -164,7 +164,7 @@
             <p14:sldId id="267"/>
           </p14:sldIdLst>
         </p14:section>
-        <p14:section name="03 핵심 기능" id="{c3d4e8f8-7ffd-a76e-bf8e-2c806ce1a6bf}">
+        <p14:section name="03 핵심 기능" id="{18e22851-35a3-b4d5-967f-3982cf093373}">
           <p14:sldIdLst>
             <p14:sldId id="268"/>
             <p14:sldId id="269"/>
@@ -179,7 +179,7 @@
             <p14:sldId id="278"/>
           </p14:sldIdLst>
         </p14:section>
-        <p14:section name="04 트러블슈팅" id="{27a0919d-a8b7-c66e-952f-15e19466cb04}">
+        <p14:section name="04 트러블슈팅" id="{c2bfdf96-2c22-01e5-e21e-1dbd484e867f}">
           <p14:sldIdLst>
             <p14:sldId id="279"/>
             <p14:sldId id="280"/>
@@ -189,7 +189,7 @@
             <p14:sldId id="284"/>
           </p14:sldIdLst>
         </p14:section>
-        <p14:section name="05 평가와 배포" id="{1380d9ba-87a9-a183-f275-3c0753640473}">
+        <p14:section name="05 평가와 배포" id="{901d442e-3235-58af-fd6a-5e466e32c680}">
           <p14:sldIdLst>
             <p14:sldId id="285"/>
             <p14:sldId id="286"/>
@@ -4605,7 +4605,7 @@
                 <a:ea typeface="Malgun Gothic" pitchFamily="34" charset="-122"/>
                 <a:cs typeface="Malgun Gothic" pitchFamily="34" charset="-120"/>
               </a:rPr>
-              <a:t>2026.09.22 – 2026.10.10 개발 완료 · 10.15 보완 · 배포 준비   |   임채은 · 1인 풀스택 개발</a:t>
+              <a:t>2026.09.22 – 2026.10.15 개발 완료 · 10.16 배포 시작   |   임채은 · 1인 풀스택 개발</a:t>
             </a:r>
             <a:endParaRPr lang="en-US" sz="750" dirty="0"/>
           </a:p>
@@ -32588,7 +32588,7 @@
                 <a:ea typeface="Malgun Gothic" pitchFamily="34" charset="-122"/>
                 <a:cs typeface="Malgun Gothic" pitchFamily="34" charset="-120"/>
               </a:rPr>
-              <a:t>19일</a:t>
+              <a:t>24일</a:t>
             </a:r>
             <a:endParaRPr lang="en-US" sz="2000" dirty="0"/>
           </a:p>
@@ -33430,8 +33430,8 @@
         </p:nvSpPr>
         <p:spPr>
           <a:xfrm>
-            <a:off x="7447788" y="329184"/>
-            <a:ext cx="1284732" cy="219456"/>
+            <a:off x="6515100" y="329184"/>
+            <a:ext cx="2217420" cy="219456"/>
           </a:xfrm>
           <a:prstGeom prst="roundRect">
             <a:avLst>
@@ -33457,8 +33457,8 @@
         </p:nvSpPr>
         <p:spPr>
           <a:xfrm>
-            <a:off x="7447788" y="329184"/>
-            <a:ext cx="1284732" cy="219456"/>
+            <a:off x="6515100" y="329184"/>
+            <a:ext cx="2217420" cy="219456"/>
           </a:xfrm>
           <a:prstGeom prst="rect">
             <a:avLst/>
@@ -33482,7 +33482,7 @@
                 <a:ea typeface="Malgun Gothic" pitchFamily="34" charset="-122"/>
                 <a:cs typeface="Malgun Gothic" pitchFamily="34" charset="-120"/>
               </a:rPr>
-              <a:t>개발 완료 · 배포 직전</a:t>
+              <a:t>10.15 개발 완료 · 10.16 배포 시작</a:t>
             </a:r>
             <a:endParaRPr lang="en-US" sz="700" dirty="0"/>
           </a:p>
@@ -38320,7 +38320,7 @@
                 <a:ea typeface="Malgun Gothic" pitchFamily="34" charset="-122"/>
                 <a:cs typeface="Malgun Gothic" pitchFamily="34" charset="-120"/>
               </a:rPr>
-              <a:t>19일</a:t>
+              <a:t>24일</a:t>
             </a:r>
             <a:endParaRPr lang="en-US" sz="2200" dirty="0"/>
           </a:p>
@@ -38630,7 +38630,7 @@
         </p:nvSpPr>
         <p:spPr>
           <a:xfrm>
-            <a:off x="877824" y="2130552"/>
+            <a:off x="1014984" y="2130552"/>
             <a:ext cx="164592" cy="164592"/>
           </a:xfrm>
           <a:prstGeom prst="ellipse">
@@ -38655,8 +38655,8 @@
         </p:nvSpPr>
         <p:spPr>
           <a:xfrm>
-            <a:off x="411480" y="2377440"/>
-            <a:ext cx="1097280" cy="182880"/>
+            <a:off x="457200" y="2377440"/>
+            <a:ext cx="1280160" cy="182880"/>
           </a:xfrm>
           <a:prstGeom prst="rect">
             <a:avLst/>
@@ -38694,8 +38694,8 @@
         </p:nvSpPr>
         <p:spPr>
           <a:xfrm>
-            <a:off x="411480" y="2560320"/>
-            <a:ext cx="1097280" cy="219456"/>
+            <a:off x="457200" y="2560320"/>
+            <a:ext cx="1280160" cy="219456"/>
           </a:xfrm>
           <a:prstGeom prst="rect">
             <a:avLst/>
@@ -38733,8 +38733,8 @@
         </p:nvSpPr>
         <p:spPr>
           <a:xfrm>
-            <a:off x="411480" y="2834640"/>
-            <a:ext cx="1097280" cy="822960"/>
+            <a:off x="457200" y="2834640"/>
+            <a:ext cx="1280160" cy="822960"/>
           </a:xfrm>
           <a:prstGeom prst="rect">
             <a:avLst/>
@@ -38835,7 +38835,7 @@
         </p:nvSpPr>
         <p:spPr>
           <a:xfrm>
-            <a:off x="2066544" y="2130552"/>
+            <a:off x="2386584" y="2130552"/>
             <a:ext cx="164592" cy="164592"/>
           </a:xfrm>
           <a:prstGeom prst="ellipse">
@@ -38860,8 +38860,8 @@
         </p:nvSpPr>
         <p:spPr>
           <a:xfrm>
-            <a:off x="1600200" y="2377440"/>
-            <a:ext cx="1097280" cy="182880"/>
+            <a:off x="1828800" y="2377440"/>
+            <a:ext cx="1280160" cy="182880"/>
           </a:xfrm>
           <a:prstGeom prst="rect">
             <a:avLst/>
@@ -38899,8 +38899,8 @@
         </p:nvSpPr>
         <p:spPr>
           <a:xfrm>
-            <a:off x="1600200" y="2560320"/>
-            <a:ext cx="1097280" cy="219456"/>
+            <a:off x="1828800" y="2560320"/>
+            <a:ext cx="1280160" cy="219456"/>
           </a:xfrm>
           <a:prstGeom prst="rect">
             <a:avLst/>
@@ -38938,8 +38938,8 @@
         </p:nvSpPr>
         <p:spPr>
           <a:xfrm>
-            <a:off x="1600200" y="2834640"/>
-            <a:ext cx="1097280" cy="822960"/>
+            <a:off x="1828800" y="2834640"/>
+            <a:ext cx="1280160" cy="822960"/>
           </a:xfrm>
           <a:prstGeom prst="rect">
             <a:avLst/>
@@ -39040,7 +39040,7 @@
         </p:nvSpPr>
         <p:spPr>
           <a:xfrm>
-            <a:off x="3255264" y="2130552"/>
+            <a:off x="3758184" y="2130552"/>
             <a:ext cx="164592" cy="164592"/>
           </a:xfrm>
           <a:prstGeom prst="ellipse">
@@ -39065,8 +39065,8 @@
         </p:nvSpPr>
         <p:spPr>
           <a:xfrm>
-            <a:off x="2788920" y="2377440"/>
-            <a:ext cx="1097280" cy="182880"/>
+            <a:off x="3200400" y="2377440"/>
+            <a:ext cx="1280160" cy="182880"/>
           </a:xfrm>
           <a:prstGeom prst="rect">
             <a:avLst/>
@@ -39104,8 +39104,8 @@
         </p:nvSpPr>
         <p:spPr>
           <a:xfrm>
-            <a:off x="2788920" y="2560320"/>
-            <a:ext cx="1097280" cy="219456"/>
+            <a:off x="3200400" y="2560320"/>
+            <a:ext cx="1280160" cy="219456"/>
           </a:xfrm>
           <a:prstGeom prst="rect">
             <a:avLst/>
@@ -39143,8 +39143,8 @@
         </p:nvSpPr>
         <p:spPr>
           <a:xfrm>
-            <a:off x="2788920" y="2834640"/>
-            <a:ext cx="1097280" cy="822960"/>
+            <a:off x="3200400" y="2834640"/>
+            <a:ext cx="1280160" cy="822960"/>
           </a:xfrm>
           <a:prstGeom prst="rect">
             <a:avLst/>
@@ -39245,7 +39245,7 @@
         </p:nvSpPr>
         <p:spPr>
           <a:xfrm>
-            <a:off x="4443984" y="2130552"/>
+            <a:off x="5129784" y="2130552"/>
             <a:ext cx="164592" cy="164592"/>
           </a:xfrm>
           <a:prstGeom prst="ellipse">
@@ -39270,8 +39270,8 @@
         </p:nvSpPr>
         <p:spPr>
           <a:xfrm>
-            <a:off x="3977640" y="2377440"/>
-            <a:ext cx="1097280" cy="182880"/>
+            <a:off x="4572000" y="2377440"/>
+            <a:ext cx="1280160" cy="182880"/>
           </a:xfrm>
           <a:prstGeom prst="rect">
             <a:avLst/>
@@ -39309,8 +39309,8 @@
         </p:nvSpPr>
         <p:spPr>
           <a:xfrm>
-            <a:off x="3977640" y="2560320"/>
-            <a:ext cx="1097280" cy="219456"/>
+            <a:off x="4572000" y="2560320"/>
+            <a:ext cx="1280160" cy="219456"/>
           </a:xfrm>
           <a:prstGeom prst="rect">
             <a:avLst/>
@@ -39348,8 +39348,8 @@
         </p:nvSpPr>
         <p:spPr>
           <a:xfrm>
-            <a:off x="3977640" y="2834640"/>
-            <a:ext cx="1097280" cy="822960"/>
+            <a:off x="4572000" y="2834640"/>
+            <a:ext cx="1280160" cy="822960"/>
           </a:xfrm>
           <a:prstGeom prst="rect">
             <a:avLst/>
@@ -39450,7 +39450,7 @@
         </p:nvSpPr>
         <p:spPr>
           <a:xfrm>
-            <a:off x="5632704" y="2130552"/>
+            <a:off x="6501384" y="2130552"/>
             <a:ext cx="164592" cy="164592"/>
           </a:xfrm>
           <a:prstGeom prst="ellipse">
@@ -39475,8 +39475,8 @@
         </p:nvSpPr>
         <p:spPr>
           <a:xfrm>
-            <a:off x="5166360" y="2377440"/>
-            <a:ext cx="1097280" cy="182880"/>
+            <a:off x="5943600" y="2377440"/>
+            <a:ext cx="1280160" cy="182880"/>
           </a:xfrm>
           <a:prstGeom prst="rect">
             <a:avLst/>
@@ -39514,8 +39514,8 @@
         </p:nvSpPr>
         <p:spPr>
           <a:xfrm>
-            <a:off x="5166360" y="2560320"/>
-            <a:ext cx="1097280" cy="219456"/>
+            <a:off x="5943600" y="2560320"/>
+            <a:ext cx="1280160" cy="219456"/>
           </a:xfrm>
           <a:prstGeom prst="rect">
             <a:avLst/>
@@ -39553,8 +39553,8 @@
         </p:nvSpPr>
         <p:spPr>
           <a:xfrm>
-            <a:off x="5166360" y="2834640"/>
-            <a:ext cx="1097280" cy="822960"/>
+            <a:off x="5943600" y="2834640"/>
+            <a:ext cx="1280160" cy="822960"/>
           </a:xfrm>
           <a:prstGeom prst="rect">
             <a:avLst/>
@@ -39655,192 +39655,7 @@
         </p:nvSpPr>
         <p:spPr>
           <a:xfrm>
-            <a:off x="6821424" y="2130552"/>
-            <a:ext cx="164592" cy="164592"/>
-          </a:xfrm>
-          <a:prstGeom prst="ellipse">
-            <a:avLst/>
-          </a:prstGeom>
-          <a:solidFill>
-            <a:srgbClr val="F97316"/>
-          </a:solidFill>
-          <a:ln w="19050">
-            <a:solidFill>
-              <a:srgbClr val="FFFFFF"/>
-            </a:solidFill>
-            <a:prstDash val="solid"/>
-          </a:ln>
-        </p:spPr>
-      </p:sp>
-      <p:sp>
-        <p:nvSpPr>
-          <p:cNvPr id="38" name="Text 36"/>
-          <p:cNvSpPr txBox="1"/>
-          <p:nvPr/>
-        </p:nvSpPr>
-        <p:spPr>
-          <a:xfrm>
-            <a:off x="6355080" y="2377440"/>
-            <a:ext cx="1097280" cy="182880"/>
-          </a:xfrm>
-          <a:prstGeom prst="rect">
-            <a:avLst/>
-          </a:prstGeom>
-          <a:noFill/>
-          <a:ln/>
-        </p:spPr>
-        <p:txBody>
-          <a:bodyPr wrap="square" lIns="0" tIns="0" rIns="0" bIns="0" rtlCol="0" anchor="t"/>
-          <a:lstStyle/>
-          <a:p>
-            <a:pPr algn="ctr" indent="0" marL="0">
-              <a:buNone/>
-            </a:pPr>
-            <a:r>
-              <a:rPr lang="en-US" sz="850" b="1" dirty="0">
-                <a:solidFill>
-                  <a:srgbClr val="F97316"/>
-                </a:solidFill>
-                <a:latin typeface="Malgun Gothic" pitchFamily="34" charset="0"/>
-                <a:ea typeface="Malgun Gothic" pitchFamily="34" charset="-122"/>
-                <a:cs typeface="Malgun Gothic" pitchFamily="34" charset="-120"/>
-              </a:rPr>
-              <a:t>10.10</a:t>
-            </a:r>
-            <a:endParaRPr lang="en-US" sz="850" dirty="0"/>
-          </a:p>
-        </p:txBody>
-      </p:sp>
-      <p:sp>
-        <p:nvSpPr>
-          <p:cNvPr id="39" name="Text 37"/>
-          <p:cNvSpPr txBox="1"/>
-          <p:nvPr/>
-        </p:nvSpPr>
-        <p:spPr>
-          <a:xfrm>
-            <a:off x="6355080" y="2560320"/>
-            <a:ext cx="1097280" cy="219456"/>
-          </a:xfrm>
-          <a:prstGeom prst="rect">
-            <a:avLst/>
-          </a:prstGeom>
-          <a:noFill/>
-          <a:ln/>
-        </p:spPr>
-        <p:txBody>
-          <a:bodyPr wrap="square" lIns="0" tIns="0" rIns="0" bIns="0" rtlCol="0" anchor="t"/>
-          <a:lstStyle/>
-          <a:p>
-            <a:pPr algn="ctr" indent="0" marL="0">
-              <a:buNone/>
-            </a:pPr>
-            <a:r>
-              <a:rPr lang="en-US" sz="950" b="1" dirty="0">
-                <a:solidFill>
-                  <a:srgbClr val="18181B"/>
-                </a:solidFill>
-                <a:latin typeface="Malgun Gothic" pitchFamily="34" charset="0"/>
-                <a:ea typeface="Malgun Gothic" pitchFamily="34" charset="-122"/>
-                <a:cs typeface="Malgun Gothic" pitchFamily="34" charset="-120"/>
-              </a:rPr>
-              <a:t>개발 완료</a:t>
-            </a:r>
-            <a:endParaRPr lang="en-US" sz="950" dirty="0"/>
-          </a:p>
-        </p:txBody>
-      </p:sp>
-      <p:sp>
-        <p:nvSpPr>
-          <p:cNvPr id="40" name="Text 38"/>
-          <p:cNvSpPr txBox="1"/>
-          <p:nvPr/>
-        </p:nvSpPr>
-        <p:spPr>
-          <a:xfrm>
-            <a:off x="6355080" y="2834640"/>
-            <a:ext cx="1097280" cy="822960"/>
-          </a:xfrm>
-          <a:prstGeom prst="rect">
-            <a:avLst/>
-          </a:prstGeom>
-          <a:noFill/>
-          <a:ln/>
-        </p:spPr>
-        <p:txBody>
-          <a:bodyPr wrap="square" lIns="0" tIns="0" rIns="0" bIns="0" rtlCol="0" anchor="t"/>
-          <a:lstStyle/>
-          <a:p>
-            <a:pPr algn="ctr" indent="0" marL="0">
-              <a:lnSpc>
-                <a:spcPct val="125000"/>
-              </a:lnSpc>
-              <a:buNone/>
-            </a:pPr>
-            <a:r>
-              <a:rPr lang="en-US" sz="700" dirty="0">
-                <a:solidFill>
-                  <a:srgbClr val="52525B"/>
-                </a:solidFill>
-                <a:latin typeface="Malgun Gothic" pitchFamily="34" charset="0"/>
-                <a:ea typeface="Malgun Gothic" pitchFamily="34" charset="-122"/>
-                <a:cs typeface="Malgun Gothic" pitchFamily="34" charset="-120"/>
-              </a:rPr>
-              <a:t>전체 기능 마무리</a:t>
-            </a:r>
-            <a:endParaRPr lang="en-US" sz="700" dirty="0"/>
-          </a:p>
-          <a:p>
-            <a:pPr algn="ctr" indent="0" marL="0">
-              <a:lnSpc>
-                <a:spcPct val="125000"/>
-              </a:lnSpc>
-              <a:buNone/>
-            </a:pPr>
-            <a:r>
-              <a:rPr lang="en-US" sz="700" dirty="0">
-                <a:solidFill>
-                  <a:srgbClr val="52525B"/>
-                </a:solidFill>
-                <a:latin typeface="Malgun Gothic" pitchFamily="34" charset="0"/>
-                <a:ea typeface="Malgun Gothic" pitchFamily="34" charset="-122"/>
-                <a:cs typeface="Malgun Gothic" pitchFamily="34" charset="-120"/>
-              </a:rPr>
-              <a:t>결정 사항 정리</a:t>
-            </a:r>
-            <a:endParaRPr lang="en-US" sz="700" dirty="0"/>
-          </a:p>
-          <a:p>
-            <a:pPr algn="ctr" indent="0" marL="0">
-              <a:lnSpc>
-                <a:spcPct val="125000"/>
-              </a:lnSpc>
-              <a:buNone/>
-            </a:pPr>
-            <a:r>
-              <a:rPr lang="en-US" sz="700" dirty="0">
-                <a:solidFill>
-                  <a:srgbClr val="52525B"/>
-                </a:solidFill>
-                <a:latin typeface="Malgun Gothic" pitchFamily="34" charset="0"/>
-                <a:ea typeface="Malgun Gothic" pitchFamily="34" charset="-122"/>
-                <a:cs typeface="Malgun Gothic" pitchFamily="34" charset="-120"/>
-              </a:rPr>
-              <a:t>배포 준비 착수</a:t>
-            </a:r>
-            <a:endParaRPr lang="en-US" sz="700" dirty="0"/>
-          </a:p>
-        </p:txBody>
-      </p:sp>
-      <p:sp>
-        <p:nvSpPr>
-          <p:cNvPr id="41" name="Shape 39"/>
-          <p:cNvSpPr/>
-          <p:nvPr/>
-        </p:nvSpPr>
-        <p:spPr>
-          <a:xfrm>
-            <a:off x="8010144" y="2130552"/>
+            <a:off x="7872984" y="2130552"/>
             <a:ext cx="164592" cy="164592"/>
           </a:xfrm>
           <a:prstGeom prst="ellipse">
@@ -39859,14 +39674,14 @@
       </p:sp>
       <p:sp>
         <p:nvSpPr>
-          <p:cNvPr id="42" name="Text 40"/>
-          <p:cNvSpPr txBox="1"/>
-          <p:nvPr/>
-        </p:nvSpPr>
-        <p:spPr>
-          <a:xfrm>
-            <a:off x="7543800" y="2377440"/>
-            <a:ext cx="1097280" cy="182880"/>
+          <p:cNvPr id="38" name="Text 36"/>
+          <p:cNvSpPr txBox="1"/>
+          <p:nvPr/>
+        </p:nvSpPr>
+        <p:spPr>
+          <a:xfrm>
+            <a:off x="7315200" y="2377440"/>
+            <a:ext cx="1280160" cy="182880"/>
           </a:xfrm>
           <a:prstGeom prst="rect">
             <a:avLst/>
@@ -39898,14 +39713,14 @@
       </p:sp>
       <p:sp>
         <p:nvSpPr>
-          <p:cNvPr id="43" name="Text 41"/>
-          <p:cNvSpPr txBox="1"/>
-          <p:nvPr/>
-        </p:nvSpPr>
-        <p:spPr>
-          <a:xfrm>
-            <a:off x="7543800" y="2560320"/>
-            <a:ext cx="1097280" cy="219456"/>
+          <p:cNvPr id="39" name="Text 37"/>
+          <p:cNvSpPr txBox="1"/>
+          <p:nvPr/>
+        </p:nvSpPr>
+        <p:spPr>
+          <a:xfrm>
+            <a:off x="7315200" y="2560320"/>
+            <a:ext cx="1280160" cy="219456"/>
           </a:xfrm>
           <a:prstGeom prst="rect">
             <a:avLst/>
@@ -39929,7 +39744,7 @@
                 <a:ea typeface="Malgun Gothic" pitchFamily="34" charset="-122"/>
                 <a:cs typeface="Malgun Gothic" pitchFamily="34" charset="-120"/>
               </a:rPr>
-              <a:t>보완 · CI</a:t>
+              <a:t>개발 완료</a:t>
             </a:r>
             <a:endParaRPr lang="en-US" sz="950" dirty="0"/>
           </a:p>
@@ -39937,14 +39752,14 @@
       </p:sp>
       <p:sp>
         <p:nvSpPr>
-          <p:cNvPr id="44" name="Text 42"/>
-          <p:cNvSpPr txBox="1"/>
-          <p:nvPr/>
-        </p:nvSpPr>
-        <p:spPr>
-          <a:xfrm>
-            <a:off x="7543800" y="2834640"/>
-            <a:ext cx="1097280" cy="822960"/>
+          <p:cNvPr id="40" name="Text 38"/>
+          <p:cNvSpPr txBox="1"/>
+          <p:nvPr/>
+        </p:nvSpPr>
+        <p:spPr>
+          <a:xfrm>
+            <a:off x="7315200" y="2834640"/>
+            <a:ext cx="1280160" cy="822960"/>
           </a:xfrm>
           <a:prstGeom prst="rect">
             <a:avLst/>
@@ -40039,7 +39854,7 @@
       </p:sp>
       <p:sp>
         <p:nvSpPr>
-          <p:cNvPr id="45" name="Text 43"/>
+          <p:cNvPr id="41" name="Text 39"/>
           <p:cNvSpPr txBox="1"/>
           <p:nvPr/>
         </p:nvSpPr>
@@ -40287,7 +40102,7 @@
                 <a:ea typeface="Malgun Gothic" pitchFamily="34" charset="-122"/>
                 <a:cs typeface="Malgun Gothic" pitchFamily="34" charset="-120"/>
               </a:rPr>
-              <a:t>1인 · 19일</a:t>
+              <a:t>1인 · 24일</a:t>
             </a:r>
             <a:endParaRPr lang="en-US" sz="700" dirty="0"/>
           </a:p>

--- a/docs/portfolio/ProjectGuard_Portfolio.pptx
+++ b/docs/portfolio/ProjectGuard_Portfolio.pptx
@@ -4605,7 +4605,7 @@
                 <a:ea typeface="Malgun Gothic" pitchFamily="34" charset="-122"/>
                 <a:cs typeface="Malgun Gothic" pitchFamily="34" charset="-120"/>
               </a:rPr>
-              <a:t>2026.09.22 – 2026.10.15 개발 완료 · 10.16 배포 시작   |   임채은 · 1인 풀스택 개발</a:t>
+              <a:t>2026.09.22 – 10.15 개발 · 10.20 배포 · project-guard.duckdns.org   |   임채은 · 1인 풀스택 개발</a:t>
             </a:r>
             <a:endParaRPr lang="en-US" sz="750" dirty="0"/>
           </a:p>
@@ -21130,7 +21130,7 @@
                 <a:ea typeface="Malgun Gothic" pitchFamily="34" charset="-122"/>
                 <a:cs typeface="Malgun Gothic" pitchFamily="34" charset="-120"/>
               </a:rPr>
-              <a:t>성과, 배포 준비 현황, 다음 단계</a:t>
+              <a:t>성과, 운영 배포, 다음 단계</a:t>
             </a:r>
             <a:endParaRPr lang="en-US" sz="950" dirty="0"/>
           </a:p>
@@ -32190,7 +32190,7 @@
                 <a:ea typeface="Malgun Gothic" pitchFamily="34" charset="-122"/>
                 <a:cs typeface="Malgun Gothic" pitchFamily="34" charset="-120"/>
               </a:rPr>
-              <a:t>성과, 배포 준비 현황, 다음 단계</a:t>
+              <a:t>성과, 운영 배포, 다음 단계</a:t>
             </a:r>
             <a:endParaRPr lang="en-US" sz="1000" dirty="0"/>
           </a:p>
@@ -32744,7 +32744,7 @@
                 <a:ea typeface="Malgun Gothic" pitchFamily="34" charset="-122"/>
                 <a:cs typeface="Malgun Gothic" pitchFamily="34" charset="-120"/>
               </a:rPr>
-              <a:t>328개</a:t>
+              <a:t>336개</a:t>
             </a:r>
             <a:endParaRPr lang="en-US" sz="2000" dirty="0"/>
           </a:p>
@@ -32822,7 +32822,7 @@
                 <a:ea typeface="Malgun Gothic" pitchFamily="34" charset="-122"/>
                 <a:cs typeface="Malgun Gothic" pitchFamily="34" charset="-120"/>
               </a:rPr>
-              <a:t>54건</a:t>
+              <a:t>58건</a:t>
             </a:r>
             <a:endParaRPr lang="en-US" sz="2000" dirty="0"/>
           </a:p>
@@ -33040,7 +33040,7 @@
                 <a:ea typeface="Malgun Gothic" pitchFamily="34" charset="-122"/>
                 <a:cs typeface="Malgun Gothic" pitchFamily="34" charset="-120"/>
               </a:rPr>
-              <a:t>규칙 엔진(15개) · 공공 API 5종 연동 · WebSocket · PKCE · 토스 결제를 직접 설계하고 테스트 328개 · CI로 검증</a:t>
+              <a:t>규칙 엔진(15개) · 공공 API 5종 연동 · WebSocket · PKCE · 토스 결제를 직접 설계하고 테스트 336개 · CI로 검증</a:t>
             </a:r>
             <a:endParaRPr lang="en-US" sz="950" dirty="0"/>
           </a:p>
@@ -33242,7 +33242,7 @@
                 <a:ea typeface="Malgun Gothic" pitchFamily="34" charset="-122"/>
                 <a:cs typeface="Malgun Gothic" pitchFamily="34" charset="-120"/>
               </a:rPr>
-              <a:t>AI 도구(Claude Code)로 구현 속도를 높이고, 설계 결정 · 원인 분석 · 검증은 직접 — 결정 54건을 문서로 남김</a:t>
+              <a:t>AI 도구(Claude Code)로 구현 속도를 높이고, 설계 결정 · 원인 분석 · 검증은 직접 — 결정 58건을 문서로 남김</a:t>
             </a:r>
             <a:endParaRPr lang="en-US" sz="950" dirty="0"/>
           </a:p>
@@ -33416,7 +33416,7 @@
                 <a:ea typeface="Malgun Gothic" pitchFamily="34" charset="-122"/>
                 <a:cs typeface="Malgun Gothic" pitchFamily="34" charset="-120"/>
               </a:rPr>
-              <a:t>배포 준비 현황</a:t>
+              <a:t>운영 배포</a:t>
             </a:r>
             <a:endParaRPr lang="en-US" sz="2100" dirty="0"/>
           </a:p>
@@ -33482,7 +33482,7 @@
                 <a:ea typeface="Malgun Gothic" pitchFamily="34" charset="-122"/>
                 <a:cs typeface="Malgun Gothic" pitchFamily="34" charset="-120"/>
               </a:rPr>
-              <a:t>10.15 개발 완료 · 10.16 배포 시작</a:t>
+              <a:t>10.20 AWS 배포 · 운영 중</a:t>
             </a:r>
             <a:endParaRPr lang="en-US" sz="700" dirty="0"/>
           </a:p>
@@ -33611,7 +33611,7 @@
                 <a:ea typeface="Malgun Gothic" pitchFamily="34" charset="-122"/>
                 <a:cs typeface="Malgun Gothic" pitchFamily="34" charset="-120"/>
               </a:rPr>
-              <a:t>이미 준비된 것</a:t>
+              <a:t>배포하며 찾아 고친 것</a:t>
             </a:r>
             <a:endParaRPr lang="en-US" sz="1100" dirty="0"/>
           </a:p>
@@ -33689,7 +33689,28 @@
                 <a:ea typeface="Malgun Gothic" pitchFamily="34" charset="-122"/>
                 <a:cs typeface="Malgun Gothic" pitchFamily="34" charset="-120"/>
               </a:rPr>
-              <a:t>운영 DB 드라이버(PostgreSQL) 포함, DB 주소·DDL 설정을 환경변수로 분리 (운영은 validate)</a:t>
+              <a:t>빈 운영 DB에서 시작 실패 → Flyway 마이그레이션 도입,</a:t>
+            </a:r>
+            <a:br>
+              <a:rPr lang="en-US" sz="830" dirty="0">
+                <a:solidFill>
+                  <a:srgbClr val="52525B"/>
+                </a:solidFill>
+                <a:latin typeface="Malgun Gothic" pitchFamily="34" charset="0"/>
+                <a:ea typeface="Malgun Gothic" pitchFamily="34" charset="-122"/>
+                <a:cs typeface="Malgun Gothic" pitchFamily="34" charset="-120"/>
+              </a:rPr>
+            </a:br>
+            <a:r>
+              <a:rPr lang="en-US" sz="830" dirty="0">
+                <a:solidFill>
+                  <a:srgbClr val="52525B"/>
+                </a:solidFill>
+                <a:latin typeface="Malgun Gothic" pitchFamily="34" charset="0"/>
+                <a:ea typeface="Malgun Gothic" pitchFamily="34" charset="-122"/>
+                <a:cs typeface="Malgun Gothic" pitchFamily="34" charset="-120"/>
+              </a:rPr>
+              <a:t>실제 MySQL로 스키마 검증 테스트</a:t>
             </a:r>
             <a:endParaRPr lang="en-US" sz="830" dirty="0"/>
           </a:p>
@@ -33767,7 +33788,28 @@
                 <a:ea typeface="Malgun Gothic" pitchFamily="34" charset="-122"/>
                 <a:cs typeface="Malgun Gothic" pitchFamily="34" charset="-120"/>
               </a:rPr>
-              <a:t>운영 환경에서 secure 쿠키 · 보안 헤더 · H2 콘솔 차단</a:t>
+              <a:t>1MB 넘는 업로드 실패(Server Action 한도) →</a:t>
+            </a:r>
+            <a:br>
+              <a:rPr lang="en-US" sz="830" dirty="0">
+                <a:solidFill>
+                  <a:srgbClr val="52525B"/>
+                </a:solidFill>
+                <a:latin typeface="Malgun Gothic" pitchFamily="34" charset="0"/>
+                <a:ea typeface="Malgun Gothic" pitchFamily="34" charset="-122"/>
+                <a:cs typeface="Malgun Gothic" pitchFamily="34" charset="-120"/>
+              </a:rPr>
+            </a:br>
+            <a:r>
+              <a:rPr lang="en-US" sz="830" dirty="0">
+                <a:solidFill>
+                  <a:srgbClr val="52525B"/>
+                </a:solidFill>
+                <a:latin typeface="Malgun Gothic" pitchFamily="34" charset="0"/>
+                <a:ea typeface="Malgun Gothic" pitchFamily="34" charset="-122"/>
+                <a:cs typeface="Malgun Gothic" pitchFamily="34" charset="-120"/>
+              </a:rPr>
+              <a:t>1회용 입장권으로 브라우저가 백엔드에 직접 업로드</a:t>
             </a:r>
             <a:endParaRPr lang="en-US" sz="830" dirty="0"/>
           </a:p>
@@ -33845,7 +33887,28 @@
                 <a:ea typeface="Malgun Gothic" pitchFamily="34" charset="-122"/>
                 <a:cs typeface="Malgun Gothic" pitchFamily="34" charset="-120"/>
               </a:rPr>
-              <a:t>WebSocket 허용 Origin과 메일 링크 주소를 FRONTEND_ORIGIN 한 곳에서 관리</a:t>
+              <a:t>배포 서버의 환경변수가 빈 값으로 덮임 →</a:t>
+            </a:r>
+            <a:br>
+              <a:rPr lang="en-US" sz="830" dirty="0">
+                <a:solidFill>
+                  <a:srgbClr val="52525B"/>
+                </a:solidFill>
+                <a:latin typeface="Malgun Gothic" pitchFamily="34" charset="0"/>
+                <a:ea typeface="Malgun Gothic" pitchFamily="34" charset="-122"/>
+                <a:cs typeface="Malgun Gothic" pitchFamily="34" charset="-120"/>
+              </a:rPr>
+            </a:br>
+            <a:r>
+              <a:rPr lang="en-US" sz="830" dirty="0">
+                <a:solidFill>
+                  <a:srgbClr val="52525B"/>
+                </a:solidFill>
+                <a:latin typeface="Malgun Gothic" pitchFamily="34" charset="0"/>
+                <a:ea typeface="Malgun Gothic" pitchFamily="34" charset="-122"/>
+                <a:cs typeface="Malgun Gothic" pitchFamily="34" charset="-120"/>
+              </a:rPr>
+              <a:t>APP_ENV=production에서만 서버 값 사용</a:t>
             </a:r>
             <a:endParaRPr lang="en-US" sz="830" dirty="0"/>
           </a:p>
@@ -33923,7 +33986,28 @@
                 <a:ea typeface="Malgun Gothic" pitchFamily="34" charset="-122"/>
                 <a:cs typeface="Malgun Gothic" pitchFamily="34" charset="-120"/>
               </a:rPr>
-              <a:t>모든 외부 키를 .env로 분리, 키가 없으면 해당 조회만 건너뛰고 분석은 동작</a:t>
+              <a:t>MySQL 예약어(read) 컬럼 · 인덱스 길이 초과 →</a:t>
+            </a:r>
+            <a:br>
+              <a:rPr lang="en-US" sz="830" dirty="0">
+                <a:solidFill>
+                  <a:srgbClr val="52525B"/>
+                </a:solidFill>
+                <a:latin typeface="Malgun Gothic" pitchFamily="34" charset="0"/>
+                <a:ea typeface="Malgun Gothic" pitchFamily="34" charset="-122"/>
+                <a:cs typeface="Malgun Gothic" pitchFamily="34" charset="-120"/>
+              </a:rPr>
+            </a:br>
+            <a:r>
+              <a:rPr lang="en-US" sz="830" dirty="0">
+                <a:solidFill>
+                  <a:srgbClr val="52525B"/>
+                </a:solidFill>
+                <a:latin typeface="Malgun Gothic" pitchFamily="34" charset="0"/>
+                <a:ea typeface="Malgun Gothic" pitchFamily="34" charset="-122"/>
+                <a:cs typeface="Malgun Gothic" pitchFamily="34" charset="-120"/>
+              </a:rPr>
+              <a:t>예약어 자동 인용 · ascii 컬럼으로 해결</a:t>
             </a:r>
             <a:endParaRPr lang="en-US" sz="830" dirty="0"/>
           </a:p>
@@ -34001,7 +34085,28 @@
                 <a:ea typeface="Malgun Gothic" pitchFamily="34" charset="-122"/>
                 <a:cs typeface="Malgun Gothic" pitchFamily="34" charset="-120"/>
               </a:rPr>
-              <a:t>GitHub Actions CI — 백엔드 테스트 · 웹 lint·타입·빌드·audit · 앱 analyze·test 자동 실행 (테스트 328개)</a:t>
+              <a:t>프록시 뒤에서 로그인 후 localhost로 이동 →</a:t>
+            </a:r>
+            <a:br>
+              <a:rPr lang="en-US" sz="830" dirty="0">
+                <a:solidFill>
+                  <a:srgbClr val="52525B"/>
+                </a:solidFill>
+                <a:latin typeface="Malgun Gothic" pitchFamily="34" charset="0"/>
+                <a:ea typeface="Malgun Gothic" pitchFamily="34" charset="-122"/>
+                <a:cs typeface="Malgun Gothic" pitchFamily="34" charset="-120"/>
+              </a:rPr>
+            </a:br>
+            <a:r>
+              <a:rPr lang="en-US" sz="830" dirty="0">
+                <a:solidFill>
+                  <a:srgbClr val="52525B"/>
+                </a:solidFill>
+                <a:latin typeface="Malgun Gothic" pitchFamily="34" charset="0"/>
+                <a:ea typeface="Malgun Gothic" pitchFamily="34" charset="-122"/>
+                <a:cs typeface="Malgun Gothic" pitchFamily="34" charset="-120"/>
+              </a:rPr>
+              <a:t>공개 주소 기준으로 리다이렉트</a:t>
             </a:r>
             <a:endParaRPr lang="en-US" sz="830" dirty="0"/>
           </a:p>
@@ -34091,7 +34196,7 @@
                 <a:ea typeface="Malgun Gothic" pitchFamily="34" charset="-122"/>
                 <a:cs typeface="Malgun Gothic" pitchFamily="34" charset="-120"/>
               </a:rPr>
-              <a:t>배포할 때 할 일</a:t>
+              <a:t>운영 구성</a:t>
             </a:r>
             <a:endParaRPr lang="en-US" sz="1100" dirty="0"/>
           </a:p>
@@ -34196,7 +34301,7 @@
                 <a:ea typeface="Malgun Gothic" pitchFamily="34" charset="-122"/>
                 <a:cs typeface="Malgun Gothic" pitchFamily="34" charset="-120"/>
               </a:rPr>
-              <a:t>웹 Vercel · 백엔드 Render/Fly.io · DB PostgreSQL</a:t>
+              <a:t>AWS EC2(t4g.small) 한 대에 웹·백엔드·MySQL, Caddy 자동 HTTPS</a:t>
             </a:r>
             <a:endParaRPr lang="en-US" sz="830" dirty="0"/>
           </a:p>
@@ -34301,7 +34406,7 @@
                 <a:ea typeface="Malgun Gothic" pitchFamily="34" charset="-122"/>
                 <a:cs typeface="Malgun Gothic" pitchFamily="34" charset="-120"/>
               </a:rPr>
-              <a:t>Flyway 마이그레이션 도입 후 DDL_AUTO=validate</a:t>
+              <a:t>MySQL 8.0 · Flyway(validate) · 매일 자동 백업 14일 보관</a:t>
             </a:r>
             <a:endParaRPr lang="en-US" sz="830" dirty="0"/>
           </a:p>
@@ -34406,7 +34511,7 @@
                 <a:ea typeface="Malgun Gothic" pitchFamily="34" charset="-122"/>
                 <a:cs typeface="Malgun Gothic" pitchFamily="34" charset="-120"/>
               </a:rPr>
-              <a:t>FRONTEND_ORIGIN · OAuth 리다이렉트 URI · 브이월드 도메인 · wss 교체</a:t>
+              <a:t>project-guard.duckdns.org (API는 api. 하위 주소)</a:t>
             </a:r>
             <a:endParaRPr lang="en-US" sz="830" dirty="0"/>
           </a:p>
@@ -34472,7 +34577,7 @@
                 <a:ea typeface="Malgun Gothic" pitchFamily="34" charset="-122"/>
                 <a:cs typeface="Malgun Gothic" pitchFamily="34" charset="-120"/>
               </a:rPr>
-              <a:t>키</a:t>
+              <a:t>배포</a:t>
             </a:r>
             <a:endParaRPr lang="en-US" sz="750" dirty="0"/>
           </a:p>
@@ -34511,7 +34616,28 @@
                 <a:ea typeface="Malgun Gothic" pitchFamily="34" charset="-122"/>
                 <a:cs typeface="Malgun Gothic" pitchFamily="34" charset="-120"/>
               </a:rPr>
-              <a:t>토스 라이브 키 · FCM · VAPID · 메일 계정 등록</a:t>
+              <a:t>GitHub Actions CI(테스트 336개) →</a:t>
+            </a:r>
+            <a:br>
+              <a:rPr lang="en-US" sz="830" dirty="0">
+                <a:solidFill>
+                  <a:srgbClr val="D4D4D8"/>
+                </a:solidFill>
+                <a:latin typeface="Malgun Gothic" pitchFamily="34" charset="0"/>
+                <a:ea typeface="Malgun Gothic" pitchFamily="34" charset="-122"/>
+                <a:cs typeface="Malgun Gothic" pitchFamily="34" charset="-120"/>
+              </a:rPr>
+            </a:br>
+            <a:r>
+              <a:rPr lang="en-US" sz="830" dirty="0">
+                <a:solidFill>
+                  <a:srgbClr val="D4D4D8"/>
+                </a:solidFill>
+                <a:latin typeface="Malgun Gothic" pitchFamily="34" charset="0"/>
+                <a:ea typeface="Malgun Gothic" pitchFamily="34" charset="-122"/>
+                <a:cs typeface="Malgun Gothic" pitchFamily="34" charset="-120"/>
+              </a:rPr>
+              <a:t>서버 배포 스크립트(release.sh)</a:t>
             </a:r>
             <a:endParaRPr lang="en-US" sz="830" dirty="0"/>
           </a:p>
@@ -34577,7 +34703,7 @@
                 <a:ea typeface="Malgun Gothic" pitchFamily="34" charset="-122"/>
                 <a:cs typeface="Malgun Gothic" pitchFamily="34" charset="-120"/>
               </a:rPr>
-              <a:t>확인</a:t>
+              <a:t>체험</a:t>
             </a:r>
             <a:endParaRPr lang="en-US" sz="750" dirty="0"/>
           </a:p>
@@ -34616,7 +34742,28 @@
                 <a:ea typeface="Malgun Gothic" pitchFamily="34" charset="-122"/>
                 <a:cs typeface="Malgun Gothic" pitchFamily="34" charset="-120"/>
               </a:rPr>
-              <a:t>결제창을 거친 재승인 응답 · 실기기 푸시 검증, 화면 캡처</a:t>
+              <a:t>회원 a@naver.com · 변호사 aa@naver.com</a:t>
+            </a:r>
+            <a:br>
+              <a:rPr lang="en-US" sz="830" dirty="0">
+                <a:solidFill>
+                  <a:srgbClr val="D4D4D8"/>
+                </a:solidFill>
+                <a:latin typeface="Malgun Gothic" pitchFamily="34" charset="0"/>
+                <a:ea typeface="Malgun Gothic" pitchFamily="34" charset="-122"/>
+                <a:cs typeface="Malgun Gothic" pitchFamily="34" charset="-120"/>
+              </a:rPr>
+            </a:br>
+            <a:r>
+              <a:rPr lang="en-US" sz="830" dirty="0">
+                <a:solidFill>
+                  <a:srgbClr val="D4D4D8"/>
+                </a:solidFill>
+                <a:latin typeface="Malgun Gothic" pitchFamily="34" charset="0"/>
+                <a:ea typeface="Malgun Gothic" pitchFamily="34" charset="-122"/>
+                <a:cs typeface="Malgun Gothic" pitchFamily="34" charset="-120"/>
+              </a:rPr>
+              <a:t>관리자 aaa@naver.com · 비밀번호 모두 12345678</a:t>
             </a:r>
             <a:endParaRPr lang="en-US" sz="830" dirty="0"/>
           </a:p>
@@ -34655,7 +34802,7 @@
                 <a:ea typeface="Malgun Gothic" pitchFamily="34" charset="-122"/>
                 <a:cs typeface="Malgun Gothic" pitchFamily="34" charset="-120"/>
               </a:rPr>
-              <a:t>코드는 완성 — 남은 것은 운영 환경 값과 인프라 구성</a:t>
+              <a:t>운영 사이트에서 직접 체험할 수 있어요 — 결제는 토스 테스트 키라 실제 청구 없음</a:t>
             </a:r>
             <a:endParaRPr lang="en-US" sz="950" dirty="0"/>
           </a:p>
@@ -34923,7 +35070,7 @@
                 <a:ea typeface="Malgun Gothic" pitchFamily="34" charset="-122"/>
                 <a:cs typeface="Malgun Gothic" pitchFamily="34" charset="-120"/>
               </a:rPr>
-              <a:t>운영 배포</a:t>
+              <a:t>운영 고도화</a:t>
             </a:r>
             <a:endParaRPr lang="en-US" sz="1200" dirty="0"/>
           </a:p>
@@ -34962,7 +35109,7 @@
                 <a:ea typeface="Malgun Gothic" pitchFamily="34" charset="-122"/>
                 <a:cs typeface="Malgun Gothic" pitchFamily="34" charset="-120"/>
               </a:rPr>
-              <a:t>배포 후 모니터링 · 오류 알림 구성, 실제 화면 캡처를 포트폴리오에 반영</a:t>
+              <a:t>모니터링 · 오류 알림 구성, 백업 외부 보관(S3), 실제 화면 캡처를 포트폴리오에 반영</a:t>
             </a:r>
             <a:endParaRPr lang="en-US" sz="950" dirty="0"/>
           </a:p>
@@ -35672,7 +35819,7 @@
                 <a:ea typeface="Malgun Gothic" pitchFamily="34" charset="-122"/>
                 <a:cs typeface="Malgun Gothic" pitchFamily="34" charset="-120"/>
               </a:rPr>
-              <a:t>임채은   ·   github.com/chean0830/guard-project</a:t>
+              <a:t>임채은   ·   project-guard.duckdns.org   ·   github.com/chean0830/guard-project</a:t>
             </a:r>
             <a:endParaRPr lang="en-US" sz="800" dirty="0"/>
           </a:p>

--- a/docs/portfolio/ProjectGuard_Portfolio.pptx
+++ b/docs/portfolio/ProjectGuard_Portfolio.pptx
@@ -5993,7 +5993,7 @@
                 <a:ea typeface="Malgun Gothic" pitchFamily="34" charset="-122"/>
                 <a:cs typeface="Malgun Gothic" pitchFamily="34" charset="-120"/>
               </a:rPr>
-              <a:t>Java 25 · REST + WebSocket · 82개 API</a:t>
+              <a:t>Java 25 · REST + WebSocket · 83개 API</a:t>
             </a:r>
             <a:endParaRPr lang="en-US" sz="750" dirty="0"/>
           </a:p>
@@ -6761,7 +6761,7 @@
                 <a:ea typeface="Malgun Gothic" pitchFamily="34" charset="-122"/>
                 <a:cs typeface="Malgun Gothic" pitchFamily="34" charset="-120"/>
               </a:rPr>
-              <a:t>H2 → PostgreSQL</a:t>
+              <a:t>H2 → MySQL 8</a:t>
             </a:r>
             <a:endParaRPr lang="en-US" sz="1000" dirty="0"/>
           </a:p>
@@ -6817,7 +6817,7 @@
                 <a:ea typeface="Malgun Gothic" pitchFamily="34" charset="-122"/>
                 <a:cs typeface="Malgun Gothic" pitchFamily="34" charset="-120"/>
               </a:rPr>
-              <a:t>배포 시 PostgreSQL 전환</a:t>
+              <a:t>운영 MySQL · Flyway (AWS EC2)</a:t>
             </a:r>
             <a:endParaRPr lang="en-US" sz="750" dirty="0"/>
           </a:p>
@@ -38701,7 +38701,7 @@
                 <a:ea typeface="Malgun Gothic" pitchFamily="34" charset="-122"/>
                 <a:cs typeface="Malgun Gothic" pitchFamily="34" charset="-120"/>
               </a:rPr>
-              <a:t>328개</a:t>
+              <a:t>336개</a:t>
             </a:r>
             <a:endParaRPr lang="en-US" sz="2200" dirty="0"/>
           </a:p>
@@ -40032,7 +40032,7 @@
                 <a:ea typeface="Malgun Gothic" pitchFamily="34" charset="-122"/>
                 <a:cs typeface="Malgun Gothic" pitchFamily="34" charset="-120"/>
               </a:rPr>
-              <a:t>기능 단위 feature 브랜치 → PR → main, 결정 사항 54건을 문서로 기록 · GitHub Actions CI로 자동 검사</a:t>
+              <a:t>기능 단위 feature 브랜치 → PR → main, 결정 사항 58건을 문서로 기록 · GitHub Actions CI로 자동 검사</a:t>
             </a:r>
             <a:endParaRPr lang="en-US" sz="900" dirty="0"/>
           </a:p>
@@ -40475,7 +40475,7 @@
                 <a:ea typeface="Malgun Gothic" pitchFamily="34" charset="-122"/>
                 <a:cs typeface="Malgun Gothic" pitchFamily="34" charset="-120"/>
               </a:rPr>
-              <a:t>82개</a:t>
+              <a:t>83개</a:t>
             </a:r>
             <a:endParaRPr lang="en-US" sz="1800" dirty="0"/>
           </a:p>
@@ -40895,7 +40895,7 @@
                 <a:ea typeface="Malgun Gothic" pitchFamily="34" charset="-122"/>
                 <a:cs typeface="Malgun Gothic" pitchFamily="34" charset="-120"/>
               </a:rPr>
-              <a:t>328개</a:t>
+              <a:t>336개</a:t>
             </a:r>
             <a:endParaRPr lang="en-US" sz="1800" dirty="0"/>
           </a:p>
@@ -41000,7 +41000,7 @@
                 <a:ea typeface="Malgun Gothic" pitchFamily="34" charset="-122"/>
                 <a:cs typeface="Malgun Gothic" pitchFamily="34" charset="-120"/>
               </a:rPr>
-              <a:t>54건</a:t>
+              <a:t>58건</a:t>
             </a:r>
             <a:endParaRPr lang="en-US" sz="1800" dirty="0"/>
           </a:p>
@@ -41105,7 +41105,7 @@
                 <a:ea typeface="Malgun Gothic" pitchFamily="34" charset="-122"/>
                 <a:cs typeface="Malgun Gothic" pitchFamily="34" charset="-120"/>
               </a:rPr>
-              <a:t>테스트 328개 = 백엔드 299 · Playwright e2e 22 · Flutter 7 — GitHub Actions CI로 자동 실행</a:t>
+              <a:t>테스트 336개 = 백엔드 307 · Playwright e2e 22 · Flutter 7 — GitHub Actions CI로 자동 실행</a:t>
             </a:r>
             <a:endParaRPr lang="en-US" sz="900" dirty="0"/>
           </a:p>
@@ -42098,7 +42098,7 @@
                 <a:ea typeface="Malgun Gothic" pitchFamily="34" charset="-122"/>
                 <a:cs typeface="Malgun Gothic" pitchFamily="34" charset="-120"/>
               </a:rPr>
-              <a:t>H2 → PostgreSQL</a:t>
+              <a:t>H2 → MySQL 8</a:t>
             </a:r>
             <a:endParaRPr lang="en-US" sz="850" dirty="0"/>
           </a:p>
